--- a/output/wordlabs-build-3day.pptx
+++ b/output/wordlabs-build-3day.pptx
@@ -4240,7 +4240,7 @@
                 <a:ea typeface="Calibri" pitchFamily="34" charset="-122"/>
                 <a:cs typeface="Calibri" pitchFamily="34" charset="-120"/>
               </a:rPr>
-              <a:t>"to construct or put together"</a:t>
+              <a:t>"to construct or make"</a:t>
             </a:r>
             <a:endParaRPr lang="en-US" sz="2200" dirty="0"/>
           </a:p>
@@ -4279,7 +4279,7 @@
                 <a:ea typeface="Calibri" pitchFamily="34" charset="-122"/>
                 <a:cs typeface="Calibri" pitchFamily="34" charset="-120"/>
               </a:rPr>
-              <a:t>Origin: Latin: byldan</a:t>
+              <a:t>Origin: Latin: buildjan</a:t>
             </a:r>
             <a:endParaRPr lang="en-US" sz="1300" dirty="0"/>
           </a:p>
@@ -5288,7 +5288,7 @@
                 <a:ea typeface="Calibri" pitchFamily="34" charset="-122"/>
                 <a:cs typeface="Calibri" pitchFamily="34" charset="-120"/>
               </a:rPr>
-              <a:t>Word Labs  •  wordlabs.app  •  Root: 'build' = to construct or put together</a:t>
+              <a:t>Word Labs  •  wordlabs.app  •  Root: 'build' = to construct or make</a:t>
             </a:r>
             <a:endParaRPr lang="en-US" sz="800" dirty="0"/>
           </a:p>
@@ -5928,7 +5928,7 @@
                 <a:ea typeface="Calibri" pitchFamily="34" charset="-122"/>
                 <a:cs typeface="Calibri" pitchFamily="34" charset="-120"/>
               </a:rPr>
-              <a:t>Word Labs  •  wordlabs.app  •  Root: 'build' = to construct or put together</a:t>
+              <a:t>Word Labs  •  wordlabs.app  •  Root: 'build' = to construct or make</a:t>
             </a:r>
             <a:endParaRPr lang="en-US" sz="800" dirty="0"/>
           </a:p>
@@ -6071,7 +6071,7 @@
                 <a:ea typeface="Calibri" pitchFamily="34" charset="-122"/>
                 <a:cs typeface="Calibri" pitchFamily="34" charset="-120"/>
               </a:rPr>
-              <a:t> spent all morning </a:t>
+              <a:t> carefully planned the </a:t>
             </a:r>
             <a:pPr algn="l" indent="0" marL="0">
               <a:buNone/>
@@ -6102,7 +6102,7 @@
                 <a:ea typeface="Calibri" pitchFamily="34" charset="-122"/>
                 <a:cs typeface="Calibri" pitchFamily="34" charset="-120"/>
               </a:rPr>
-              <a:t> the collapsed stone wall.</a:t>
+              <a:t> of the old library.</a:t>
             </a:r>
             <a:endParaRPr lang="en-US" sz="1800" dirty="0"/>
           </a:p>
@@ -6716,7 +6716,7 @@
                 <a:ea typeface="Calibri" pitchFamily="34" charset="-122"/>
                 <a:cs typeface="Calibri" pitchFamily="34" charset="-120"/>
               </a:rPr>
-              <a:t>Word Labs  •  wordlabs.app  •  Root: 'build' = to construct or put together</a:t>
+              <a:t>Word Labs  •  wordlabs.app  •  Root: 'build' = to construct or make</a:t>
             </a:r>
             <a:endParaRPr lang="en-US" sz="800" dirty="0"/>
           </a:p>
@@ -7543,7 +7543,7 @@
                 <a:ea typeface="Calibri" pitchFamily="34" charset="-122"/>
                 <a:cs typeface="Calibri" pitchFamily="34" charset="-120"/>
               </a:rPr>
-              <a:t>Word Labs  •  wordlabs.app  •  Root: 'build' = to construct or put together</a:t>
+              <a:t>Word Labs  •  wordlabs.app  •  Root: 'build' = to construct or make</a:t>
             </a:r>
             <a:endParaRPr lang="en-US" sz="800" dirty="0"/>
           </a:p>
@@ -7860,7 +7860,7 @@
                 <a:ea typeface="Calibri" pitchFamily="34" charset="-122"/>
                 <a:cs typeface="Calibri" pitchFamily="34" charset="-120"/>
               </a:rPr>
-              <a:t>to construct</a:t>
+              <a:t>to construct or make</a:t>
             </a:r>
             <a:endParaRPr lang="en-US" sz="850" dirty="0"/>
           </a:p>
@@ -8528,7 +8528,7 @@
                 <a:ea typeface="Calibri" pitchFamily="34" charset="-122"/>
                 <a:cs typeface="Calibri" pitchFamily="34" charset="-120"/>
               </a:rPr>
-              <a:t>Word Labs  •  wordlabs.app  •  Root: 'build' = to construct or put together</a:t>
+              <a:t>Word Labs  •  wordlabs.app  •  Root: 'build' = to construct or make</a:t>
             </a:r>
             <a:endParaRPr lang="en-US" sz="800" dirty="0"/>
           </a:p>
@@ -8845,7 +8845,7 @@
                 <a:ea typeface="Calibri" pitchFamily="34" charset="-122"/>
                 <a:cs typeface="Calibri" pitchFamily="34" charset="-120"/>
               </a:rPr>
-              <a:t>to construct</a:t>
+              <a:t>to construct or make</a:t>
             </a:r>
             <a:endParaRPr lang="en-US" sz="850" dirty="0"/>
           </a:p>
@@ -9645,7 +9645,7 @@
                 <a:ea typeface="Calibri" pitchFamily="34" charset="-122"/>
                 <a:cs typeface="Calibri" pitchFamily="34" charset="-120"/>
               </a:rPr>
-              <a:t>Word Labs  •  wordlabs.app  •  Root: 'build' = to construct or put together</a:t>
+              <a:t>Word Labs  •  wordlabs.app  •  Root: 'build' = to construct or make</a:t>
             </a:r>
             <a:endParaRPr lang="en-US" sz="800" dirty="0"/>
           </a:p>
@@ -9962,7 +9962,7 @@
                 <a:ea typeface="Calibri" pitchFamily="34" charset="-122"/>
                 <a:cs typeface="Calibri" pitchFamily="34" charset="-120"/>
               </a:rPr>
-              <a:t>to construct</a:t>
+              <a:t>to construct or make</a:t>
             </a:r>
             <a:endParaRPr lang="en-US" sz="850" dirty="0"/>
           </a:p>
@@ -11053,7 +11053,7 @@
                 <a:ea typeface="Calibri" pitchFamily="34" charset="-122"/>
                 <a:cs typeface="Calibri" pitchFamily="34" charset="-120"/>
               </a:rPr>
-              <a:t>Word Labs  •  wordlabs.app  •  Root: 'build' = to construct or put together</a:t>
+              <a:t>Word Labs  •  wordlabs.app  •  Root: 'build' = to construct or make</a:t>
             </a:r>
             <a:endParaRPr lang="en-US" sz="800" dirty="0"/>
           </a:p>
@@ -11880,7 +11880,7 @@
                 <a:ea typeface="Calibri" pitchFamily="34" charset="-122"/>
                 <a:cs typeface="Calibri" pitchFamily="34" charset="-120"/>
               </a:rPr>
-              <a:t>Word Labs  •  wordlabs.app  •  Root: 'build' = to construct or put together</a:t>
+              <a:t>Word Labs  •  wordlabs.app  •  Root: 'build' = to construct or make</a:t>
             </a:r>
             <a:endParaRPr lang="en-US" sz="800" dirty="0"/>
           </a:p>
@@ -12309,7 +12309,7 @@
                 <a:ea typeface="Calibri" pitchFamily="34" charset="-122"/>
                 <a:cs typeface="Calibri" pitchFamily="34" charset="-120"/>
               </a:rPr>
-              <a:t>to construct</a:t>
+              <a:t>to construct or make</a:t>
             </a:r>
             <a:endParaRPr lang="en-US" sz="850" dirty="0"/>
           </a:p>
@@ -12977,7 +12977,7 @@
                 <a:ea typeface="Calibri" pitchFamily="34" charset="-122"/>
                 <a:cs typeface="Calibri" pitchFamily="34" charset="-120"/>
               </a:rPr>
-              <a:t>Word Labs  •  wordlabs.app  •  Root: 'build' = to construct or put together</a:t>
+              <a:t>Word Labs  •  wordlabs.app  •  Root: 'build' = to construct or make</a:t>
             </a:r>
             <a:endParaRPr lang="en-US" sz="800" dirty="0"/>
           </a:p>
@@ -13406,7 +13406,7 @@
                 <a:ea typeface="Calibri" pitchFamily="34" charset="-122"/>
                 <a:cs typeface="Calibri" pitchFamily="34" charset="-120"/>
               </a:rPr>
-              <a:t>to construct</a:t>
+              <a:t>to construct or make</a:t>
             </a:r>
             <a:endParaRPr lang="en-US" sz="850" dirty="0"/>
           </a:p>
@@ -14220,7 +14220,7 @@
                 <a:ea typeface="Calibri" pitchFamily="34" charset="-122"/>
                 <a:cs typeface="Calibri" pitchFamily="34" charset="-120"/>
               </a:rPr>
-              <a:t>Root 'build' — to construct or put together</a:t>
+              <a:t>Root 'build' — to construct or make</a:t>
             </a:r>
             <a:endParaRPr lang="en-US" sz="1600" dirty="0"/>
           </a:p>
@@ -14576,7 +14576,7 @@
                 <a:ea typeface="Calibri" pitchFamily="34" charset="-122"/>
                 <a:cs typeface="Calibri" pitchFamily="34" charset="-120"/>
               </a:rPr>
-              <a:t>Word Labs  •  wordlabs.app  •  Root: 'build' = to construct or put together</a:t>
+              <a:t>Word Labs  •  wordlabs.app  •  Root: 'build' = to construct or make</a:t>
             </a:r>
             <a:endParaRPr lang="en-US" sz="800" dirty="0"/>
           </a:p>
@@ -15005,7 +15005,7 @@
                 <a:ea typeface="Calibri" pitchFamily="34" charset="-122"/>
                 <a:cs typeface="Calibri" pitchFamily="34" charset="-120"/>
               </a:rPr>
-              <a:t>to construct</a:t>
+              <a:t>to construct or make</a:t>
             </a:r>
             <a:endParaRPr lang="en-US" sz="850" dirty="0"/>
           </a:p>
@@ -15593,7 +15593,7 @@
         </p:nvSpPr>
         <p:spPr>
           <a:xfrm>
-            <a:off x="2124837" y="4169664"/>
+            <a:off x="2023872" y="4169664"/>
             <a:ext cx="685800" cy="475488"/>
           </a:xfrm>
           <a:prstGeom prst="rect">
@@ -15620,7 +15620,7 @@
         </p:nvSpPr>
         <p:spPr>
           <a:xfrm>
-            <a:off x="2124837" y="4169664"/>
+            <a:off x="2023872" y="4169664"/>
             <a:ext cx="685800" cy="475488"/>
           </a:xfrm>
           <a:prstGeom prst="rect">
@@ -15659,7 +15659,7 @@
         </p:nvSpPr>
         <p:spPr>
           <a:xfrm>
-            <a:off x="3033522" y="4169664"/>
+            <a:off x="2831592" y="4169664"/>
             <a:ext cx="685800" cy="475488"/>
           </a:xfrm>
           <a:prstGeom prst="rect">
@@ -15686,7 +15686,7 @@
         </p:nvSpPr>
         <p:spPr>
           <a:xfrm>
-            <a:off x="3033522" y="4169664"/>
+            <a:off x="2831592" y="4169664"/>
             <a:ext cx="685800" cy="475488"/>
           </a:xfrm>
           <a:prstGeom prst="rect">
@@ -15725,7 +15725,7 @@
         </p:nvSpPr>
         <p:spPr>
           <a:xfrm>
-            <a:off x="3942207" y="4169664"/>
+            <a:off x="3639312" y="4169664"/>
             <a:ext cx="685800" cy="475488"/>
           </a:xfrm>
           <a:prstGeom prst="rect">
@@ -15752,7 +15752,7 @@
         </p:nvSpPr>
         <p:spPr>
           <a:xfrm>
-            <a:off x="3942207" y="4169664"/>
+            <a:off x="3639312" y="4169664"/>
             <a:ext cx="685800" cy="475488"/>
           </a:xfrm>
           <a:prstGeom prst="rect">
@@ -15791,7 +15791,7 @@
         </p:nvSpPr>
         <p:spPr>
           <a:xfrm>
-            <a:off x="4850892" y="4169664"/>
+            <a:off x="4447032" y="4169664"/>
             <a:ext cx="685800" cy="475488"/>
           </a:xfrm>
           <a:prstGeom prst="rect">
@@ -15818,7 +15818,7 @@
         </p:nvSpPr>
         <p:spPr>
           <a:xfrm>
-            <a:off x="4850892" y="4169664"/>
+            <a:off x="4447032" y="4169664"/>
             <a:ext cx="685800" cy="475488"/>
           </a:xfrm>
           <a:prstGeom prst="rect">
@@ -15857,7 +15857,7 @@
         </p:nvSpPr>
         <p:spPr>
           <a:xfrm>
-            <a:off x="5759577" y="4169664"/>
+            <a:off x="5254752" y="4169664"/>
             <a:ext cx="685800" cy="475488"/>
           </a:xfrm>
           <a:prstGeom prst="rect">
@@ -15884,7 +15884,7 @@
         </p:nvSpPr>
         <p:spPr>
           <a:xfrm>
-            <a:off x="5759577" y="4169664"/>
+            <a:off x="5254752" y="4169664"/>
             <a:ext cx="685800" cy="475488"/>
           </a:xfrm>
           <a:prstGeom prst="rect">
@@ -15923,7 +15923,7 @@
         </p:nvSpPr>
         <p:spPr>
           <a:xfrm>
-            <a:off x="6668262" y="4169664"/>
+            <a:off x="6062472" y="4169664"/>
             <a:ext cx="685800" cy="475488"/>
           </a:xfrm>
           <a:prstGeom prst="rect">
@@ -15950,7 +15950,7 @@
         </p:nvSpPr>
         <p:spPr>
           <a:xfrm>
-            <a:off x="6668262" y="4169664"/>
+            <a:off x="6062472" y="4169664"/>
             <a:ext cx="685800" cy="475488"/>
           </a:xfrm>
           <a:prstGeom prst="rect">
@@ -15989,7 +15989,7 @@
         </p:nvSpPr>
         <p:spPr>
           <a:xfrm>
-            <a:off x="7576947" y="4169664"/>
+            <a:off x="6870192" y="4169664"/>
             <a:ext cx="685800" cy="475488"/>
           </a:xfrm>
           <a:prstGeom prst="rect">
@@ -16016,7 +16016,7 @@
         </p:nvSpPr>
         <p:spPr>
           <a:xfrm>
-            <a:off x="7576947" y="4169664"/>
+            <a:off x="6870192" y="4169664"/>
             <a:ext cx="685800" cy="475488"/>
           </a:xfrm>
           <a:prstGeom prst="rect">
@@ -16041,7 +16041,73 @@
                 <a:ea typeface="Trebuchet MS" pitchFamily="34" charset="-122"/>
                 <a:cs typeface="Trebuchet MS" pitchFamily="34" charset="-120"/>
               </a:rPr>
-              <a:t>ing</a:t>
+              <a:t>i</a:t>
+            </a:r>
+            <a:endParaRPr lang="en-US" sz="900" dirty="0"/>
+          </a:p>
+        </p:txBody>
+      </p:sp>
+      <p:sp>
+        <p:nvSpPr>
+          <p:cNvPr id="53" name="Shape 51"/>
+          <p:cNvSpPr/>
+          <p:nvPr/>
+        </p:nvSpPr>
+        <p:spPr>
+          <a:xfrm>
+            <a:off x="7677912" y="4169664"/>
+            <a:ext cx="685800" cy="475488"/>
+          </a:xfrm>
+          <a:prstGeom prst="rect">
+            <a:avLst>
+              <a:gd name="adj" fmla="val 7692"/>
+            </a:avLst>
+          </a:prstGeom>
+          <a:solidFill>
+            <a:srgbClr val="FFFFFF"/>
+          </a:solidFill>
+          <a:ln w="12700">
+            <a:solidFill>
+              <a:srgbClr val="DB2777"/>
+            </a:solidFill>
+            <a:prstDash val="solid"/>
+          </a:ln>
+        </p:spPr>
+      </p:sp>
+      <p:sp>
+        <p:nvSpPr>
+          <p:cNvPr id="54" name="Text 52"/>
+          <p:cNvSpPr/>
+          <p:nvPr/>
+        </p:nvSpPr>
+        <p:spPr>
+          <a:xfrm>
+            <a:off x="7677912" y="4169664"/>
+            <a:ext cx="685800" cy="475488"/>
+          </a:xfrm>
+          <a:prstGeom prst="rect">
+            <a:avLst/>
+          </a:prstGeom>
+          <a:noFill/>
+          <a:ln/>
+        </p:spPr>
+        <p:txBody>
+          <a:bodyPr wrap="square" lIns="0" tIns="0" rIns="0" bIns="0" rtlCol="0" anchor="ctr"/>
+          <a:lstStyle/>
+          <a:p>
+            <a:pPr algn="ctr" indent="0" marL="0">
+              <a:buNone/>
+            </a:pPr>
+            <a:r>
+              <a:rPr lang="en-US" sz="900" b="1" dirty="0">
+                <a:solidFill>
+                  <a:srgbClr val="9D174D"/>
+                </a:solidFill>
+                <a:latin typeface="Trebuchet MS" pitchFamily="34" charset="0"/>
+                <a:ea typeface="Trebuchet MS" pitchFamily="34" charset="-122"/>
+                <a:cs typeface="Trebuchet MS" pitchFamily="34" charset="-120"/>
+              </a:rPr>
+              <a:t>ng</a:t>
             </a:r>
             <a:endParaRPr lang="en-US" sz="900" dirty="0"/>
           </a:p>
@@ -16615,7 +16681,7 @@
                 <a:ea typeface="Calibri" pitchFamily="34" charset="-122"/>
                 <a:cs typeface="Calibri" pitchFamily="34" charset="-120"/>
               </a:rPr>
-              <a:t>Word Labs  •  wordlabs.app  •  Root: 'build' = to construct or put together</a:t>
+              <a:t>Word Labs  •  wordlabs.app  •  Root: 'build' = to construct or make</a:t>
             </a:r>
             <a:endParaRPr lang="en-US" sz="800" dirty="0"/>
           </a:p>
@@ -17255,7 +17321,7 @@
                 <a:ea typeface="Calibri" pitchFamily="34" charset="-122"/>
                 <a:cs typeface="Calibri" pitchFamily="34" charset="-120"/>
               </a:rPr>
-              <a:t>Word Labs  •  wordlabs.app  •  Root: 'build' = to construct or put together</a:t>
+              <a:t>Word Labs  •  wordlabs.app  •  Root: 'build' = to construct or make</a:t>
             </a:r>
             <a:endParaRPr lang="en-US" sz="800" dirty="0"/>
           </a:p>
@@ -17367,7 +17433,7 @@
                 <a:ea typeface="Calibri" pitchFamily="34" charset="-122"/>
                 <a:cs typeface="Calibri" pitchFamily="34" charset="-120"/>
               </a:rPr>
-              <a:t>Skilled </a:t>
+              <a:t>The skilled </a:t>
             </a:r>
             <a:pPr algn="l" indent="0" marL="0">
               <a:buNone/>
@@ -17398,7 +17464,7 @@
                 <a:ea typeface="Calibri" pitchFamily="34" charset="-122"/>
                 <a:cs typeface="Calibri" pitchFamily="34" charset="-120"/>
               </a:rPr>
-              <a:t> are </a:t>
+              <a:t> finished the </a:t>
             </a:r>
             <a:pPr algn="l" indent="0" marL="0">
               <a:buNone/>
@@ -17415,7 +17481,7 @@
                 <a:ea typeface="Calibri" pitchFamily="34" charset="-122"/>
                 <a:cs typeface="Calibri" pitchFamily="34" charset="-120"/>
               </a:rPr>
-              <a:t>rebuilding</a:t>
+              <a:t>outbuilding</a:t>
             </a:r>
             <a:pPr algn="l" indent="0" marL="0">
               <a:buNone/>
@@ -17429,7 +17495,7 @@
                 <a:ea typeface="Calibri" pitchFamily="34" charset="-122"/>
                 <a:cs typeface="Calibri" pitchFamily="34" charset="-120"/>
               </a:rPr>
-              <a:t> the old hall, but the new </a:t>
+              <a:t> quickly, but they still needed to </a:t>
             </a:r>
             <a:pPr algn="l" indent="0" marL="0">
               <a:buNone/>
@@ -17446,7 +17512,7 @@
                 <a:ea typeface="Calibri" pitchFamily="34" charset="-122"/>
                 <a:cs typeface="Calibri" pitchFamily="34" charset="-120"/>
               </a:rPr>
-              <a:t>building</a:t>
+              <a:t>rebuild</a:t>
             </a:r>
             <a:pPr algn="l" indent="0" marL="0">
               <a:buNone/>
@@ -17460,7 +17526,7 @@
                 <a:ea typeface="Calibri" pitchFamily="34" charset="-122"/>
                 <a:cs typeface="Calibri" pitchFamily="34" charset="-120"/>
               </a:rPr>
-              <a:t> must be finished before winter.</a:t>
+              <a:t> the collapsed fence.</a:t>
             </a:r>
             <a:endParaRPr lang="en-US" sz="1800" dirty="0"/>
           </a:p>
@@ -17743,7 +17809,7 @@
                 <a:ea typeface="Trebuchet MS" pitchFamily="34" charset="-122"/>
                 <a:cs typeface="Trebuchet MS" pitchFamily="34" charset="-120"/>
               </a:rPr>
-              <a:t>rebuilding</a:t>
+              <a:t>outbuilding</a:t>
             </a:r>
             <a:endParaRPr lang="en-US" sz="1400" dirty="0"/>
           </a:p>
@@ -17871,7 +17937,7 @@
                 <a:ea typeface="Trebuchet MS" pitchFamily="34" charset="-122"/>
                 <a:cs typeface="Trebuchet MS" pitchFamily="34" charset="-120"/>
               </a:rPr>
-              <a:t>building</a:t>
+              <a:t>rebuild</a:t>
             </a:r>
             <a:endParaRPr lang="en-US" sz="1400" dirty="0"/>
           </a:p>
@@ -18202,7 +18268,7 @@
                 <a:ea typeface="Calibri" pitchFamily="34" charset="-122"/>
                 <a:cs typeface="Calibri" pitchFamily="34" charset="-120"/>
               </a:rPr>
-              <a:t>Word Labs  •  wordlabs.app  •  Root: 'build' = to construct or put together</a:t>
+              <a:t>Word Labs  •  wordlabs.app  •  Root: 'build' = to construct or make</a:t>
             </a:r>
             <a:endParaRPr lang="en-US" sz="800" dirty="0"/>
           </a:p>
@@ -19029,7 +19095,7 @@
                 <a:ea typeface="Calibri" pitchFamily="34" charset="-122"/>
                 <a:cs typeface="Calibri" pitchFamily="34" charset="-120"/>
               </a:rPr>
-              <a:t>Word Labs  •  wordlabs.app  •  Root: 'build' = to construct or put together</a:t>
+              <a:t>Word Labs  •  wordlabs.app  •  Root: 'build' = to construct or make</a:t>
             </a:r>
             <a:endParaRPr lang="en-US" sz="800" dirty="0"/>
           </a:p>
@@ -19346,7 +19412,7 @@
                 <a:ea typeface="Calibri" pitchFamily="34" charset="-122"/>
                 <a:cs typeface="Calibri" pitchFamily="34" charset="-120"/>
               </a:rPr>
-              <a:t>to construct</a:t>
+              <a:t>to construct or make</a:t>
             </a:r>
             <a:endParaRPr lang="en-US" sz="850" dirty="0"/>
           </a:p>
@@ -20126,7 +20192,7 @@
                 <a:ea typeface="Calibri" pitchFamily="34" charset="-122"/>
                 <a:cs typeface="Calibri" pitchFamily="34" charset="-120"/>
               </a:rPr>
-              <a:t>Word Labs  •  wordlabs.app  •  Root: 'build' = to construct or put together</a:t>
+              <a:t>Word Labs  •  wordlabs.app  •  Root: 'build' = to construct or make</a:t>
             </a:r>
             <a:endParaRPr lang="en-US" sz="800" dirty="0"/>
           </a:p>
@@ -20443,7 +20509,7 @@
                 <a:ea typeface="Calibri" pitchFamily="34" charset="-122"/>
                 <a:cs typeface="Calibri" pitchFamily="34" charset="-120"/>
               </a:rPr>
-              <a:t>to construct</a:t>
+              <a:t>to construct or make</a:t>
             </a:r>
             <a:endParaRPr lang="en-US" sz="850" dirty="0"/>
           </a:p>
@@ -21355,7 +21421,7 @@
                 <a:ea typeface="Calibri" pitchFamily="34" charset="-122"/>
                 <a:cs typeface="Calibri" pitchFamily="34" charset="-120"/>
               </a:rPr>
-              <a:t>Word Labs  •  wordlabs.app  •  Root: 'build' = to construct or put together</a:t>
+              <a:t>Word Labs  •  wordlabs.app  •  Root: 'build' = to construct or make</a:t>
             </a:r>
             <a:endParaRPr lang="en-US" sz="800" dirty="0"/>
           </a:p>
@@ -21672,7 +21738,7 @@
                 <a:ea typeface="Calibri" pitchFamily="34" charset="-122"/>
                 <a:cs typeface="Calibri" pitchFamily="34" charset="-120"/>
               </a:rPr>
-              <a:t>to construct</a:t>
+              <a:t>to construct or make</a:t>
             </a:r>
             <a:endParaRPr lang="en-US" sz="850" dirty="0"/>
           </a:p>
@@ -22941,7 +23007,7 @@
                 <a:ea typeface="Calibri" pitchFamily="34" charset="-122"/>
                 <a:cs typeface="Calibri" pitchFamily="34" charset="-120"/>
               </a:rPr>
-              <a:t>Word Labs  •  wordlabs.app  •  Root: 'build' = to construct or put together</a:t>
+              <a:t>Word Labs  •  wordlabs.app  •  Root: 'build' = to construct or make</a:t>
             </a:r>
             <a:endParaRPr lang="en-US" sz="800" dirty="0"/>
           </a:p>
@@ -23080,7 +23146,7 @@
                 <a:ea typeface="Trebuchet MS" pitchFamily="34" charset="-122"/>
                 <a:cs typeface="Trebuchet MS" pitchFamily="34" charset="-120"/>
               </a:rPr>
-              <a:t>rebuilding</a:t>
+              <a:t>outbuilding</a:t>
             </a:r>
             <a:endParaRPr lang="en-US" sz="2800" dirty="0"/>
           </a:p>
@@ -23768,7 +23834,7 @@
                 <a:ea typeface="Calibri" pitchFamily="34" charset="-122"/>
                 <a:cs typeface="Calibri" pitchFamily="34" charset="-120"/>
               </a:rPr>
-              <a:t>Word Labs  •  wordlabs.app  •  Root: 'build' = to construct or put together</a:t>
+              <a:t>Word Labs  •  wordlabs.app  •  Root: 'build' = to construct or make</a:t>
             </a:r>
             <a:endParaRPr lang="en-US" sz="800" dirty="0"/>
           </a:p>
@@ -23907,7 +23973,7 @@
                 <a:ea typeface="Trebuchet MS" pitchFamily="34" charset="-122"/>
                 <a:cs typeface="Trebuchet MS" pitchFamily="34" charset="-120"/>
               </a:rPr>
-              <a:t>rebuilding</a:t>
+              <a:t>outbuilding</a:t>
             </a:r>
             <a:endParaRPr lang="en-US" sz="2800" dirty="0"/>
           </a:p>
@@ -24046,7 +24112,7 @@
                 <a:ea typeface="Trebuchet MS" pitchFamily="34" charset="-122"/>
                 <a:cs typeface="Trebuchet MS" pitchFamily="34" charset="-120"/>
               </a:rPr>
-              <a:t>re</a:t>
+              <a:t>out</a:t>
             </a:r>
             <a:endParaRPr lang="en-US" sz="1300" dirty="0"/>
           </a:p>
@@ -24085,7 +24151,7 @@
                 <a:ea typeface="Calibri" pitchFamily="34" charset="-122"/>
                 <a:cs typeface="Calibri" pitchFamily="34" charset="-120"/>
               </a:rPr>
-              <a:t>again</a:t>
+              <a:t>outside or separate from</a:t>
             </a:r>
             <a:endParaRPr lang="en-US" sz="850" dirty="0"/>
           </a:p>
@@ -24197,7 +24263,7 @@
                 <a:ea typeface="Calibri" pitchFamily="34" charset="-122"/>
                 <a:cs typeface="Calibri" pitchFamily="34" charset="-120"/>
               </a:rPr>
-              <a:t>to construct</a:t>
+              <a:t>to construct or make</a:t>
             </a:r>
             <a:endParaRPr lang="en-US" sz="850" dirty="0"/>
           </a:p>
@@ -24309,7 +24375,7 @@
                 <a:ea typeface="Calibri" pitchFamily="34" charset="-122"/>
                 <a:cs typeface="Calibri" pitchFamily="34" charset="-120"/>
               </a:rPr>
-              <a:t>action in progress</a:t>
+              <a:t>a place or result of an action</a:t>
             </a:r>
             <a:endParaRPr lang="en-US" sz="850" dirty="0"/>
           </a:p>
@@ -24865,7 +24931,7 @@
                 <a:ea typeface="Calibri" pitchFamily="34" charset="-122"/>
                 <a:cs typeface="Calibri" pitchFamily="34" charset="-120"/>
               </a:rPr>
-              <a:t>Word Labs  •  wordlabs.app  •  Root: 'build' = to construct or put together</a:t>
+              <a:t>Word Labs  •  wordlabs.app  •  Root: 'build' = to construct or make</a:t>
             </a:r>
             <a:endParaRPr lang="en-US" sz="800" dirty="0"/>
           </a:p>
@@ -24938,7 +25004,7 @@
                 <a:ea typeface="Trebuchet MS" pitchFamily="34" charset="-122"/>
                 <a:cs typeface="Trebuchet MS" pitchFamily="34" charset="-120"/>
               </a:rPr>
-              <a:t>We are learning that the root 'build' means 'to construct or put together'.</a:t>
+              <a:t>We are learning that the root 'build' means 'to construct or make'.</a:t>
             </a:r>
             <a:endParaRPr lang="en-US" sz="2000" dirty="0"/>
           </a:p>
@@ -25584,7 +25650,7 @@
                 <a:ea typeface="Calibri" pitchFamily="34" charset="-122"/>
                 <a:cs typeface="Calibri" pitchFamily="34" charset="-120"/>
               </a:rPr>
-              <a:t>Word Labs  •  wordlabs.app  •  Root: 'build' = to construct or put together</a:t>
+              <a:t>Word Labs  •  wordlabs.app  •  Root: 'build' = to construct or make</a:t>
             </a:r>
             <a:endParaRPr lang="en-US" sz="800" dirty="0"/>
           </a:p>
@@ -25723,7 +25789,7 @@
                 <a:ea typeface="Trebuchet MS" pitchFamily="34" charset="-122"/>
                 <a:cs typeface="Trebuchet MS" pitchFamily="34" charset="-120"/>
               </a:rPr>
-              <a:t>rebuilding</a:t>
+              <a:t>outbuilding</a:t>
             </a:r>
             <a:endParaRPr lang="en-US" sz="2800" dirty="0"/>
           </a:p>
@@ -25862,7 +25928,7 @@
                 <a:ea typeface="Trebuchet MS" pitchFamily="34" charset="-122"/>
                 <a:cs typeface="Trebuchet MS" pitchFamily="34" charset="-120"/>
               </a:rPr>
-              <a:t>re</a:t>
+              <a:t>out</a:t>
             </a:r>
             <a:endParaRPr lang="en-US" sz="1300" dirty="0"/>
           </a:p>
@@ -25901,7 +25967,7 @@
                 <a:ea typeface="Calibri" pitchFamily="34" charset="-122"/>
                 <a:cs typeface="Calibri" pitchFamily="34" charset="-120"/>
               </a:rPr>
-              <a:t>again</a:t>
+              <a:t>outside or separate from</a:t>
             </a:r>
             <a:endParaRPr lang="en-US" sz="850" dirty="0"/>
           </a:p>
@@ -26013,7 +26079,7 @@
                 <a:ea typeface="Calibri" pitchFamily="34" charset="-122"/>
                 <a:cs typeface="Calibri" pitchFamily="34" charset="-120"/>
               </a:rPr>
-              <a:t>to construct</a:t>
+              <a:t>to construct or make</a:t>
             </a:r>
             <a:endParaRPr lang="en-US" sz="850" dirty="0"/>
           </a:p>
@@ -26125,7 +26191,7 @@
                 <a:ea typeface="Calibri" pitchFamily="34" charset="-122"/>
                 <a:cs typeface="Calibri" pitchFamily="34" charset="-120"/>
               </a:rPr>
-              <a:t>action in progress</a:t>
+              <a:t>a place or result of an action</a:t>
             </a:r>
             <a:endParaRPr lang="en-US" sz="850" dirty="0"/>
           </a:p>
@@ -26284,7 +26350,7 @@
                 <a:ea typeface="Trebuchet MS" pitchFamily="34" charset="-122"/>
                 <a:cs typeface="Trebuchet MS" pitchFamily="34" charset="-120"/>
               </a:rPr>
-              <a:t>re</a:t>
+              <a:t>out</a:t>
             </a:r>
             <a:endParaRPr lang="en-US" sz="1400" dirty="0"/>
           </a:p>
@@ -26918,7 +26984,7 @@
                 <a:ea typeface="Calibri" pitchFamily="34" charset="-122"/>
                 <a:cs typeface="Calibri" pitchFamily="34" charset="-120"/>
               </a:rPr>
-              <a:t>Word Labs  •  wordlabs.app  •  Root: 'build' = to construct or put together</a:t>
+              <a:t>Word Labs  •  wordlabs.app  •  Root: 'build' = to construct or make</a:t>
             </a:r>
             <a:endParaRPr lang="en-US" sz="800" dirty="0"/>
           </a:p>
@@ -27057,7 +27123,7 @@
                 <a:ea typeface="Trebuchet MS" pitchFamily="34" charset="-122"/>
                 <a:cs typeface="Trebuchet MS" pitchFamily="34" charset="-120"/>
               </a:rPr>
-              <a:t>rebuilding</a:t>
+              <a:t>outbuilding</a:t>
             </a:r>
             <a:endParaRPr lang="en-US" sz="2800" dirty="0"/>
           </a:p>
@@ -27196,7 +27262,7 @@
                 <a:ea typeface="Trebuchet MS" pitchFamily="34" charset="-122"/>
                 <a:cs typeface="Trebuchet MS" pitchFamily="34" charset="-120"/>
               </a:rPr>
-              <a:t>re</a:t>
+              <a:t>out</a:t>
             </a:r>
             <a:endParaRPr lang="en-US" sz="1300" dirty="0"/>
           </a:p>
@@ -27235,7 +27301,7 @@
                 <a:ea typeface="Calibri" pitchFamily="34" charset="-122"/>
                 <a:cs typeface="Calibri" pitchFamily="34" charset="-120"/>
               </a:rPr>
-              <a:t>again</a:t>
+              <a:t>outside or separate from</a:t>
             </a:r>
             <a:endParaRPr lang="en-US" sz="850" dirty="0"/>
           </a:p>
@@ -27347,7 +27413,7 @@
                 <a:ea typeface="Calibri" pitchFamily="34" charset="-122"/>
                 <a:cs typeface="Calibri" pitchFamily="34" charset="-120"/>
               </a:rPr>
-              <a:t>to construct</a:t>
+              <a:t>to construct or make</a:t>
             </a:r>
             <a:endParaRPr lang="en-US" sz="850" dirty="0"/>
           </a:p>
@@ -27459,7 +27525,7 @@
                 <a:ea typeface="Calibri" pitchFamily="34" charset="-122"/>
                 <a:cs typeface="Calibri" pitchFamily="34" charset="-120"/>
               </a:rPr>
-              <a:t>action in progress</a:t>
+              <a:t>a place or result of an action</a:t>
             </a:r>
             <a:endParaRPr lang="en-US" sz="850" dirty="0"/>
           </a:p>
@@ -27618,7 +27684,7 @@
                 <a:ea typeface="Trebuchet MS" pitchFamily="34" charset="-122"/>
                 <a:cs typeface="Trebuchet MS" pitchFamily="34" charset="-120"/>
               </a:rPr>
-              <a:t>re</a:t>
+              <a:t>out</a:t>
             </a:r>
             <a:endParaRPr lang="en-US" sz="1400" dirty="0"/>
           </a:p>
@@ -27935,7 +28001,7 @@
         </p:nvSpPr>
         <p:spPr>
           <a:xfrm>
-            <a:off x="2124837" y="4169664"/>
+            <a:off x="2023872" y="4169664"/>
             <a:ext cx="685800" cy="475488"/>
           </a:xfrm>
           <a:prstGeom prst="rect">
@@ -27962,7 +28028,7 @@
         </p:nvSpPr>
         <p:spPr>
           <a:xfrm>
-            <a:off x="2124837" y="4169664"/>
+            <a:off x="2023872" y="4169664"/>
             <a:ext cx="685800" cy="475488"/>
           </a:xfrm>
           <a:prstGeom prst="rect">
@@ -27987,7 +28053,7 @@
                 <a:ea typeface="Trebuchet MS" pitchFamily="34" charset="-122"/>
                 <a:cs typeface="Trebuchet MS" pitchFamily="34" charset="-120"/>
               </a:rPr>
-              <a:t>r</a:t>
+              <a:t>ou</a:t>
             </a:r>
             <a:endParaRPr lang="en-US" sz="900" dirty="0"/>
           </a:p>
@@ -28001,7 +28067,7 @@
         </p:nvSpPr>
         <p:spPr>
           <a:xfrm>
-            <a:off x="3033522" y="4169664"/>
+            <a:off x="2831592" y="4169664"/>
             <a:ext cx="685800" cy="475488"/>
           </a:xfrm>
           <a:prstGeom prst="rect">
@@ -28028,7 +28094,7 @@
         </p:nvSpPr>
         <p:spPr>
           <a:xfrm>
-            <a:off x="3033522" y="4169664"/>
+            <a:off x="2831592" y="4169664"/>
             <a:ext cx="685800" cy="475488"/>
           </a:xfrm>
           <a:prstGeom prst="rect">
@@ -28053,7 +28119,7 @@
                 <a:ea typeface="Trebuchet MS" pitchFamily="34" charset="-122"/>
                 <a:cs typeface="Trebuchet MS" pitchFamily="34" charset="-120"/>
               </a:rPr>
-              <a:t>e</a:t>
+              <a:t>t</a:t>
             </a:r>
             <a:endParaRPr lang="en-US" sz="900" dirty="0"/>
           </a:p>
@@ -28067,7 +28133,7 @@
         </p:nvSpPr>
         <p:spPr>
           <a:xfrm>
-            <a:off x="3942207" y="4169664"/>
+            <a:off x="3639312" y="4169664"/>
             <a:ext cx="685800" cy="475488"/>
           </a:xfrm>
           <a:prstGeom prst="rect">
@@ -28094,7 +28160,7 @@
         </p:nvSpPr>
         <p:spPr>
           <a:xfrm>
-            <a:off x="3942207" y="4169664"/>
+            <a:off x="3639312" y="4169664"/>
             <a:ext cx="685800" cy="475488"/>
           </a:xfrm>
           <a:prstGeom prst="rect">
@@ -28133,7 +28199,7 @@
         </p:nvSpPr>
         <p:spPr>
           <a:xfrm>
-            <a:off x="4850892" y="4169664"/>
+            <a:off x="4447032" y="4169664"/>
             <a:ext cx="685800" cy="475488"/>
           </a:xfrm>
           <a:prstGeom prst="rect">
@@ -28160,7 +28226,7 @@
         </p:nvSpPr>
         <p:spPr>
           <a:xfrm>
-            <a:off x="4850892" y="4169664"/>
+            <a:off x="4447032" y="4169664"/>
             <a:ext cx="685800" cy="475488"/>
           </a:xfrm>
           <a:prstGeom prst="rect">
@@ -28199,7 +28265,7 @@
         </p:nvSpPr>
         <p:spPr>
           <a:xfrm>
-            <a:off x="5759577" y="4169664"/>
+            <a:off x="5254752" y="4169664"/>
             <a:ext cx="685800" cy="475488"/>
           </a:xfrm>
           <a:prstGeom prst="rect">
@@ -28226,7 +28292,7 @@
         </p:nvSpPr>
         <p:spPr>
           <a:xfrm>
-            <a:off x="5759577" y="4169664"/>
+            <a:off x="5254752" y="4169664"/>
             <a:ext cx="685800" cy="475488"/>
           </a:xfrm>
           <a:prstGeom prst="rect">
@@ -28265,7 +28331,7 @@
         </p:nvSpPr>
         <p:spPr>
           <a:xfrm>
-            <a:off x="6668262" y="4169664"/>
+            <a:off x="6062472" y="4169664"/>
             <a:ext cx="685800" cy="475488"/>
           </a:xfrm>
           <a:prstGeom prst="rect">
@@ -28292,7 +28358,7 @@
         </p:nvSpPr>
         <p:spPr>
           <a:xfrm>
-            <a:off x="6668262" y="4169664"/>
+            <a:off x="6062472" y="4169664"/>
             <a:ext cx="685800" cy="475488"/>
           </a:xfrm>
           <a:prstGeom prst="rect">
@@ -28331,7 +28397,7 @@
         </p:nvSpPr>
         <p:spPr>
           <a:xfrm>
-            <a:off x="7576947" y="4169664"/>
+            <a:off x="6870192" y="4169664"/>
             <a:ext cx="685800" cy="475488"/>
           </a:xfrm>
           <a:prstGeom prst="rect">
@@ -28358,7 +28424,7 @@
         </p:nvSpPr>
         <p:spPr>
           <a:xfrm>
-            <a:off x="7576947" y="4169664"/>
+            <a:off x="6870192" y="4169664"/>
             <a:ext cx="685800" cy="475488"/>
           </a:xfrm>
           <a:prstGeom prst="rect">
@@ -28383,7 +28449,73 @@
                 <a:ea typeface="Trebuchet MS" pitchFamily="34" charset="-122"/>
                 <a:cs typeface="Trebuchet MS" pitchFamily="34" charset="-120"/>
               </a:rPr>
-              <a:t>ing</a:t>
+              <a:t>i</a:t>
+            </a:r>
+            <a:endParaRPr lang="en-US" sz="900" dirty="0"/>
+          </a:p>
+        </p:txBody>
+      </p:sp>
+      <p:sp>
+        <p:nvSpPr>
+          <p:cNvPr id="53" name="Shape 51"/>
+          <p:cNvSpPr/>
+          <p:nvPr/>
+        </p:nvSpPr>
+        <p:spPr>
+          <a:xfrm>
+            <a:off x="7677912" y="4169664"/>
+            <a:ext cx="685800" cy="475488"/>
+          </a:xfrm>
+          <a:prstGeom prst="rect">
+            <a:avLst>
+              <a:gd name="adj" fmla="val 7692"/>
+            </a:avLst>
+          </a:prstGeom>
+          <a:solidFill>
+            <a:srgbClr val="FFFFFF"/>
+          </a:solidFill>
+          <a:ln w="12700">
+            <a:solidFill>
+              <a:srgbClr val="DB2777"/>
+            </a:solidFill>
+            <a:prstDash val="solid"/>
+          </a:ln>
+        </p:spPr>
+      </p:sp>
+      <p:sp>
+        <p:nvSpPr>
+          <p:cNvPr id="54" name="Text 52"/>
+          <p:cNvSpPr/>
+          <p:nvPr/>
+        </p:nvSpPr>
+        <p:spPr>
+          <a:xfrm>
+            <a:off x="7677912" y="4169664"/>
+            <a:ext cx="685800" cy="475488"/>
+          </a:xfrm>
+          <a:prstGeom prst="rect">
+            <a:avLst/>
+          </a:prstGeom>
+          <a:noFill/>
+          <a:ln/>
+        </p:spPr>
+        <p:txBody>
+          <a:bodyPr wrap="square" lIns="0" tIns="0" rIns="0" bIns="0" rtlCol="0" anchor="ctr"/>
+          <a:lstStyle/>
+          <a:p>
+            <a:pPr algn="ctr" indent="0" marL="0">
+              <a:buNone/>
+            </a:pPr>
+            <a:r>
+              <a:rPr lang="en-US" sz="900" b="1" dirty="0">
+                <a:solidFill>
+                  <a:srgbClr val="9D174D"/>
+                </a:solidFill>
+                <a:latin typeface="Trebuchet MS" pitchFamily="34" charset="0"/>
+                <a:ea typeface="Trebuchet MS" pitchFamily="34" charset="-122"/>
+                <a:cs typeface="Trebuchet MS" pitchFamily="34" charset="-120"/>
+              </a:rPr>
+              <a:t>ng</a:t>
             </a:r>
             <a:endParaRPr lang="en-US" sz="900" dirty="0"/>
           </a:p>
@@ -28675,7 +28807,7 @@
                 <a:ea typeface="Calibri" pitchFamily="34" charset="-122"/>
                 <a:cs typeface="Calibri" pitchFamily="34" charset="-120"/>
               </a:rPr>
-              <a:t>Word Labs  •  wordlabs.app  •  Root: 'build' = to construct or put together</a:t>
+              <a:t>Word Labs  •  wordlabs.app  •  Root: 'build' = to construct or make</a:t>
             </a:r>
             <a:endParaRPr lang="en-US" sz="800" dirty="0"/>
           </a:p>
@@ -28814,7 +28946,7 @@
                 <a:ea typeface="Trebuchet MS" pitchFamily="34" charset="-122"/>
                 <a:cs typeface="Trebuchet MS" pitchFamily="34" charset="-120"/>
               </a:rPr>
-              <a:t>building</a:t>
+              <a:t>rebuild</a:t>
             </a:r>
             <a:endParaRPr lang="en-US" sz="2800" dirty="0"/>
           </a:p>
@@ -29502,7 +29634,7 @@
                 <a:ea typeface="Calibri" pitchFamily="34" charset="-122"/>
                 <a:cs typeface="Calibri" pitchFamily="34" charset="-120"/>
               </a:rPr>
-              <a:t>Word Labs  •  wordlabs.app  •  Root: 'build' = to construct or put together</a:t>
+              <a:t>Word Labs  •  wordlabs.app  •  Root: 'build' = to construct or make</a:t>
             </a:r>
             <a:endParaRPr lang="en-US" sz="800" dirty="0"/>
           </a:p>
@@ -29641,7 +29773,7 @@
                 <a:ea typeface="Trebuchet MS" pitchFamily="34" charset="-122"/>
                 <a:cs typeface="Trebuchet MS" pitchFamily="34" charset="-120"/>
               </a:rPr>
-              <a:t>building</a:t>
+              <a:t>rebuild</a:t>
             </a:r>
             <a:endParaRPr lang="en-US" sz="2800" dirty="0"/>
           </a:p>
@@ -29730,11 +29862,11 @@
             </a:avLst>
           </a:prstGeom>
           <a:solidFill>
-            <a:srgbClr val="CCFBF1"/>
+            <a:srgbClr val="DDD6FE"/>
           </a:solidFill>
           <a:ln w="19050">
             <a:solidFill>
-              <a:srgbClr val="0D9488"/>
+              <a:srgbClr val="7C3AED"/>
             </a:solidFill>
             <a:prstDash val="solid"/>
           </a:ln>
@@ -29774,13 +29906,13 @@
             <a:r>
               <a:rPr lang="en-US" sz="1300" b="1" dirty="0">
                 <a:solidFill>
-                  <a:srgbClr val="0F766E"/>
+                  <a:srgbClr val="4C1D95"/>
                 </a:solidFill>
                 <a:latin typeface="Trebuchet MS" pitchFamily="34" charset="0"/>
                 <a:ea typeface="Trebuchet MS" pitchFamily="34" charset="-122"/>
                 <a:cs typeface="Trebuchet MS" pitchFamily="34" charset="-120"/>
               </a:rPr>
-              <a:t>build</a:t>
+              <a:t>re</a:t>
             </a:r>
             <a:endParaRPr lang="en-US" sz="1300" dirty="0"/>
           </a:p>
@@ -29819,7 +29951,7 @@
                 <a:ea typeface="Calibri" pitchFamily="34" charset="-122"/>
                 <a:cs typeface="Calibri" pitchFamily="34" charset="-120"/>
               </a:rPr>
-              <a:t>to construct</a:t>
+              <a:t>again</a:t>
             </a:r>
             <a:endParaRPr lang="en-US" sz="850" dirty="0"/>
           </a:p>
@@ -29842,11 +29974,11 @@
             </a:avLst>
           </a:prstGeom>
           <a:solidFill>
-            <a:srgbClr val="FCE7F3"/>
+            <a:srgbClr val="CCFBF1"/>
           </a:solidFill>
           <a:ln w="19050">
             <a:solidFill>
-              <a:srgbClr val="DB2777"/>
+              <a:srgbClr val="0D9488"/>
             </a:solidFill>
             <a:prstDash val="solid"/>
           </a:ln>
@@ -29886,13 +30018,13 @@
             <a:r>
               <a:rPr lang="en-US" sz="1300" b="1" dirty="0">
                 <a:solidFill>
-                  <a:srgbClr val="9D174D"/>
+                  <a:srgbClr val="0F766E"/>
                 </a:solidFill>
                 <a:latin typeface="Trebuchet MS" pitchFamily="34" charset="0"/>
                 <a:ea typeface="Trebuchet MS" pitchFamily="34" charset="-122"/>
                 <a:cs typeface="Trebuchet MS" pitchFamily="34" charset="-120"/>
               </a:rPr>
-              <a:t>ing</a:t>
+              <a:t>build</a:t>
             </a:r>
             <a:endParaRPr lang="en-US" sz="1300" dirty="0"/>
           </a:p>
@@ -29931,7 +30063,7 @@
                 <a:ea typeface="Calibri" pitchFamily="34" charset="-122"/>
                 <a:cs typeface="Calibri" pitchFamily="34" charset="-120"/>
               </a:rPr>
-              <a:t>action in progress or a result of an action</a:t>
+              <a:t>to construct or make</a:t>
             </a:r>
             <a:endParaRPr lang="en-US" sz="850" dirty="0"/>
           </a:p>
@@ -30487,7 +30619,7 @@
                 <a:ea typeface="Calibri" pitchFamily="34" charset="-122"/>
                 <a:cs typeface="Calibri" pitchFamily="34" charset="-120"/>
               </a:rPr>
-              <a:t>Word Labs  •  wordlabs.app  •  Root: 'build' = to construct or put together</a:t>
+              <a:t>Word Labs  •  wordlabs.app  •  Root: 'build' = to construct or make</a:t>
             </a:r>
             <a:endParaRPr lang="en-US" sz="800" dirty="0"/>
           </a:p>
@@ -30626,7 +30758,7 @@
                 <a:ea typeface="Trebuchet MS" pitchFamily="34" charset="-122"/>
                 <a:cs typeface="Trebuchet MS" pitchFamily="34" charset="-120"/>
               </a:rPr>
-              <a:t>building</a:t>
+              <a:t>rebuild</a:t>
             </a:r>
             <a:endParaRPr lang="en-US" sz="2800" dirty="0"/>
           </a:p>
@@ -30715,11 +30847,11 @@
             </a:avLst>
           </a:prstGeom>
           <a:solidFill>
-            <a:srgbClr val="CCFBF1"/>
+            <a:srgbClr val="DDD6FE"/>
           </a:solidFill>
           <a:ln w="19050">
             <a:solidFill>
-              <a:srgbClr val="0D9488"/>
+              <a:srgbClr val="7C3AED"/>
             </a:solidFill>
             <a:prstDash val="solid"/>
           </a:ln>
@@ -30759,13 +30891,13 @@
             <a:r>
               <a:rPr lang="en-US" sz="1300" b="1" dirty="0">
                 <a:solidFill>
-                  <a:srgbClr val="0F766E"/>
+                  <a:srgbClr val="4C1D95"/>
                 </a:solidFill>
                 <a:latin typeface="Trebuchet MS" pitchFamily="34" charset="0"/>
                 <a:ea typeface="Trebuchet MS" pitchFamily="34" charset="-122"/>
                 <a:cs typeface="Trebuchet MS" pitchFamily="34" charset="-120"/>
               </a:rPr>
-              <a:t>build</a:t>
+              <a:t>re</a:t>
             </a:r>
             <a:endParaRPr lang="en-US" sz="1300" dirty="0"/>
           </a:p>
@@ -30804,7 +30936,7 @@
                 <a:ea typeface="Calibri" pitchFamily="34" charset="-122"/>
                 <a:cs typeface="Calibri" pitchFamily="34" charset="-120"/>
               </a:rPr>
-              <a:t>to construct</a:t>
+              <a:t>again</a:t>
             </a:r>
             <a:endParaRPr lang="en-US" sz="850" dirty="0"/>
           </a:p>
@@ -30827,11 +30959,11 @@
             </a:avLst>
           </a:prstGeom>
           <a:solidFill>
-            <a:srgbClr val="FCE7F3"/>
+            <a:srgbClr val="CCFBF1"/>
           </a:solidFill>
           <a:ln w="19050">
             <a:solidFill>
-              <a:srgbClr val="DB2777"/>
+              <a:srgbClr val="0D9488"/>
             </a:solidFill>
             <a:prstDash val="solid"/>
           </a:ln>
@@ -30871,13 +31003,13 @@
             <a:r>
               <a:rPr lang="en-US" sz="1300" b="1" dirty="0">
                 <a:solidFill>
-                  <a:srgbClr val="9D174D"/>
+                  <a:srgbClr val="0F766E"/>
                 </a:solidFill>
                 <a:latin typeface="Trebuchet MS" pitchFamily="34" charset="0"/>
                 <a:ea typeface="Trebuchet MS" pitchFamily="34" charset="-122"/>
                 <a:cs typeface="Trebuchet MS" pitchFamily="34" charset="-120"/>
               </a:rPr>
-              <a:t>ing</a:t>
+              <a:t>build</a:t>
             </a:r>
             <a:endParaRPr lang="en-US" sz="1300" dirty="0"/>
           </a:p>
@@ -30916,7 +31048,7 @@
                 <a:ea typeface="Calibri" pitchFamily="34" charset="-122"/>
                 <a:cs typeface="Calibri" pitchFamily="34" charset="-120"/>
               </a:rPr>
-              <a:t>action in progress or a result of an action</a:t>
+              <a:t>to construct or make</a:t>
             </a:r>
             <a:endParaRPr lang="en-US" sz="850" dirty="0"/>
           </a:p>
@@ -31075,7 +31207,7 @@
                 <a:ea typeface="Trebuchet MS" pitchFamily="34" charset="-122"/>
                 <a:cs typeface="Trebuchet MS" pitchFamily="34" charset="-120"/>
               </a:rPr>
-              <a:t>buil</a:t>
+              <a:t>re</a:t>
             </a:r>
             <a:endParaRPr lang="en-US" sz="1400" dirty="0"/>
           </a:p>
@@ -31180,7 +31312,7 @@
                 <a:ea typeface="Trebuchet MS" pitchFamily="34" charset="-122"/>
                 <a:cs typeface="Trebuchet MS" pitchFamily="34" charset="-120"/>
               </a:rPr>
-              <a:t>ding</a:t>
+              <a:t>build</a:t>
             </a:r>
             <a:endParaRPr lang="en-US" sz="1400" dirty="0"/>
           </a:p>
@@ -31604,7 +31736,7 @@
                 <a:ea typeface="Calibri" pitchFamily="34" charset="-122"/>
                 <a:cs typeface="Calibri" pitchFamily="34" charset="-120"/>
               </a:rPr>
-              <a:t>Word Labs  •  wordlabs.app  •  Root: 'build' = to construct or put together</a:t>
+              <a:t>Word Labs  •  wordlabs.app  •  Root: 'build' = to construct or make</a:t>
             </a:r>
             <a:endParaRPr lang="en-US" sz="800" dirty="0"/>
           </a:p>
@@ -31743,7 +31875,7 @@
                 <a:ea typeface="Trebuchet MS" pitchFamily="34" charset="-122"/>
                 <a:cs typeface="Trebuchet MS" pitchFamily="34" charset="-120"/>
               </a:rPr>
-              <a:t>building</a:t>
+              <a:t>rebuild</a:t>
             </a:r>
             <a:endParaRPr lang="en-US" sz="2800" dirty="0"/>
           </a:p>
@@ -31832,11 +31964,11 @@
             </a:avLst>
           </a:prstGeom>
           <a:solidFill>
-            <a:srgbClr val="CCFBF1"/>
+            <a:srgbClr val="DDD6FE"/>
           </a:solidFill>
           <a:ln w="19050">
             <a:solidFill>
-              <a:srgbClr val="0D9488"/>
+              <a:srgbClr val="7C3AED"/>
             </a:solidFill>
             <a:prstDash val="solid"/>
           </a:ln>
@@ -31876,13 +32008,13 @@
             <a:r>
               <a:rPr lang="en-US" sz="1300" b="1" dirty="0">
                 <a:solidFill>
-                  <a:srgbClr val="0F766E"/>
+                  <a:srgbClr val="4C1D95"/>
                 </a:solidFill>
                 <a:latin typeface="Trebuchet MS" pitchFamily="34" charset="0"/>
                 <a:ea typeface="Trebuchet MS" pitchFamily="34" charset="-122"/>
                 <a:cs typeface="Trebuchet MS" pitchFamily="34" charset="-120"/>
               </a:rPr>
-              <a:t>build</a:t>
+              <a:t>re</a:t>
             </a:r>
             <a:endParaRPr lang="en-US" sz="1300" dirty="0"/>
           </a:p>
@@ -31921,7 +32053,7 @@
                 <a:ea typeface="Calibri" pitchFamily="34" charset="-122"/>
                 <a:cs typeface="Calibri" pitchFamily="34" charset="-120"/>
               </a:rPr>
-              <a:t>to construct</a:t>
+              <a:t>again</a:t>
             </a:r>
             <a:endParaRPr lang="en-US" sz="850" dirty="0"/>
           </a:p>
@@ -31944,11 +32076,11 @@
             </a:avLst>
           </a:prstGeom>
           <a:solidFill>
-            <a:srgbClr val="FCE7F3"/>
+            <a:srgbClr val="CCFBF1"/>
           </a:solidFill>
           <a:ln w="19050">
             <a:solidFill>
-              <a:srgbClr val="DB2777"/>
+              <a:srgbClr val="0D9488"/>
             </a:solidFill>
             <a:prstDash val="solid"/>
           </a:ln>
@@ -31988,13 +32120,13 @@
             <a:r>
               <a:rPr lang="en-US" sz="1300" b="1" dirty="0">
                 <a:solidFill>
-                  <a:srgbClr val="9D174D"/>
+                  <a:srgbClr val="0F766E"/>
                 </a:solidFill>
                 <a:latin typeface="Trebuchet MS" pitchFamily="34" charset="0"/>
                 <a:ea typeface="Trebuchet MS" pitchFamily="34" charset="-122"/>
                 <a:cs typeface="Trebuchet MS" pitchFamily="34" charset="-120"/>
               </a:rPr>
-              <a:t>ing</a:t>
+              <a:t>build</a:t>
             </a:r>
             <a:endParaRPr lang="en-US" sz="1300" dirty="0"/>
           </a:p>
@@ -32033,7 +32165,7 @@
                 <a:ea typeface="Calibri" pitchFamily="34" charset="-122"/>
                 <a:cs typeface="Calibri" pitchFamily="34" charset="-120"/>
               </a:rPr>
-              <a:t>action in progress or a result of an action</a:t>
+              <a:t>to construct or make</a:t>
             </a:r>
             <a:endParaRPr lang="en-US" sz="850" dirty="0"/>
           </a:p>
@@ -32192,7 +32324,7 @@
                 <a:ea typeface="Trebuchet MS" pitchFamily="34" charset="-122"/>
                 <a:cs typeface="Trebuchet MS" pitchFamily="34" charset="-120"/>
               </a:rPr>
-              <a:t>buil</a:t>
+              <a:t>re</a:t>
             </a:r>
             <a:endParaRPr lang="en-US" sz="1400" dirty="0"/>
           </a:p>
@@ -32297,7 +32429,7 @@
                 <a:ea typeface="Trebuchet MS" pitchFamily="34" charset="-122"/>
                 <a:cs typeface="Trebuchet MS" pitchFamily="34" charset="-120"/>
               </a:rPr>
-              <a:t>ding</a:t>
+              <a:t>build</a:t>
             </a:r>
             <a:endParaRPr lang="en-US" sz="1400" dirty="0"/>
           </a:p>
@@ -32404,7 +32536,7 @@
         </p:nvSpPr>
         <p:spPr>
           <a:xfrm>
-            <a:off x="2427732" y="4169664"/>
+            <a:off x="2254649" y="4169664"/>
             <a:ext cx="685800" cy="475488"/>
           </a:xfrm>
           <a:prstGeom prst="rect">
@@ -32431,7 +32563,7 @@
         </p:nvSpPr>
         <p:spPr>
           <a:xfrm>
-            <a:off x="2427732" y="4169664"/>
+            <a:off x="2254649" y="4169664"/>
             <a:ext cx="685800" cy="475488"/>
           </a:xfrm>
           <a:prstGeom prst="rect">
@@ -32456,7 +32588,7 @@
                 <a:ea typeface="Trebuchet MS" pitchFamily="34" charset="-122"/>
                 <a:cs typeface="Trebuchet MS" pitchFamily="34" charset="-120"/>
               </a:rPr>
-              <a:t>b</a:t>
+              <a:t>r</a:t>
             </a:r>
             <a:endParaRPr lang="en-US" sz="900" dirty="0"/>
           </a:p>
@@ -32470,7 +32602,7 @@
         </p:nvSpPr>
         <p:spPr>
           <a:xfrm>
-            <a:off x="3639312" y="4169664"/>
+            <a:off x="3293146" y="4169664"/>
             <a:ext cx="685800" cy="475488"/>
           </a:xfrm>
           <a:prstGeom prst="rect">
@@ -32497,7 +32629,7 @@
         </p:nvSpPr>
         <p:spPr>
           <a:xfrm>
-            <a:off x="3639312" y="4169664"/>
+            <a:off x="3293146" y="4169664"/>
             <a:ext cx="685800" cy="475488"/>
           </a:xfrm>
           <a:prstGeom prst="rect">
@@ -32522,7 +32654,7 @@
                 <a:ea typeface="Trebuchet MS" pitchFamily="34" charset="-122"/>
                 <a:cs typeface="Trebuchet MS" pitchFamily="34" charset="-120"/>
               </a:rPr>
-              <a:t>ui</a:t>
+              <a:t>e</a:t>
             </a:r>
             <a:endParaRPr lang="en-US" sz="900" dirty="0"/>
           </a:p>
@@ -32536,7 +32668,7 @@
         </p:nvSpPr>
         <p:spPr>
           <a:xfrm>
-            <a:off x="4850892" y="4169664"/>
+            <a:off x="4331643" y="4169664"/>
             <a:ext cx="685800" cy="475488"/>
           </a:xfrm>
           <a:prstGeom prst="rect">
@@ -32563,7 +32695,7 @@
         </p:nvSpPr>
         <p:spPr>
           <a:xfrm>
-            <a:off x="4850892" y="4169664"/>
+            <a:off x="4331643" y="4169664"/>
             <a:ext cx="685800" cy="475488"/>
           </a:xfrm>
           <a:prstGeom prst="rect">
@@ -32588,7 +32720,7 @@
                 <a:ea typeface="Trebuchet MS" pitchFamily="34" charset="-122"/>
                 <a:cs typeface="Trebuchet MS" pitchFamily="34" charset="-120"/>
               </a:rPr>
-              <a:t>l</a:t>
+              <a:t>b</a:t>
             </a:r>
             <a:endParaRPr lang="en-US" sz="900" dirty="0"/>
           </a:p>
@@ -32602,7 +32734,7 @@
         </p:nvSpPr>
         <p:spPr>
           <a:xfrm>
-            <a:off x="6062472" y="4169664"/>
+            <a:off x="5370141" y="4169664"/>
             <a:ext cx="685800" cy="475488"/>
           </a:xfrm>
           <a:prstGeom prst="rect">
@@ -32629,7 +32761,7 @@
         </p:nvSpPr>
         <p:spPr>
           <a:xfrm>
-            <a:off x="6062472" y="4169664"/>
+            <a:off x="5370141" y="4169664"/>
             <a:ext cx="685800" cy="475488"/>
           </a:xfrm>
           <a:prstGeom prst="rect">
@@ -32654,7 +32786,7 @@
                 <a:ea typeface="Trebuchet MS" pitchFamily="34" charset="-122"/>
                 <a:cs typeface="Trebuchet MS" pitchFamily="34" charset="-120"/>
               </a:rPr>
-              <a:t>d</a:t>
+              <a:t>ui</a:t>
             </a:r>
             <a:endParaRPr lang="en-US" sz="900" dirty="0"/>
           </a:p>
@@ -32668,7 +32800,7 @@
         </p:nvSpPr>
         <p:spPr>
           <a:xfrm>
-            <a:off x="7274052" y="4169664"/>
+            <a:off x="6408638" y="4169664"/>
             <a:ext cx="685800" cy="475488"/>
           </a:xfrm>
           <a:prstGeom prst="rect">
@@ -32695,7 +32827,7 @@
         </p:nvSpPr>
         <p:spPr>
           <a:xfrm>
-            <a:off x="7274052" y="4169664"/>
+            <a:off x="6408638" y="4169664"/>
             <a:ext cx="685800" cy="475488"/>
           </a:xfrm>
           <a:prstGeom prst="rect">
@@ -32720,7 +32852,73 @@
                 <a:ea typeface="Trebuchet MS" pitchFamily="34" charset="-122"/>
                 <a:cs typeface="Trebuchet MS" pitchFamily="34" charset="-120"/>
               </a:rPr>
-              <a:t>ing</a:t>
+              <a:t>l</a:t>
+            </a:r>
+            <a:endParaRPr lang="en-US" sz="900" dirty="0"/>
+          </a:p>
+        </p:txBody>
+      </p:sp>
+      <p:sp>
+        <p:nvSpPr>
+          <p:cNvPr id="43" name="Shape 41"/>
+          <p:cNvSpPr/>
+          <p:nvPr/>
+        </p:nvSpPr>
+        <p:spPr>
+          <a:xfrm>
+            <a:off x="7447135" y="4169664"/>
+            <a:ext cx="685800" cy="475488"/>
+          </a:xfrm>
+          <a:prstGeom prst="rect">
+            <a:avLst>
+              <a:gd name="adj" fmla="val 7692"/>
+            </a:avLst>
+          </a:prstGeom>
+          <a:solidFill>
+            <a:srgbClr val="FFFFFF"/>
+          </a:solidFill>
+          <a:ln w="12700">
+            <a:solidFill>
+              <a:srgbClr val="DB2777"/>
+            </a:solidFill>
+            <a:prstDash val="solid"/>
+          </a:ln>
+        </p:spPr>
+      </p:sp>
+      <p:sp>
+        <p:nvSpPr>
+          <p:cNvPr id="44" name="Text 42"/>
+          <p:cNvSpPr/>
+          <p:nvPr/>
+        </p:nvSpPr>
+        <p:spPr>
+          <a:xfrm>
+            <a:off x="7447135" y="4169664"/>
+            <a:ext cx="685800" cy="475488"/>
+          </a:xfrm>
+          <a:prstGeom prst="rect">
+            <a:avLst/>
+          </a:prstGeom>
+          <a:noFill/>
+          <a:ln/>
+        </p:spPr>
+        <p:txBody>
+          <a:bodyPr wrap="square" lIns="0" tIns="0" rIns="0" bIns="0" rtlCol="0" anchor="ctr"/>
+          <a:lstStyle/>
+          <a:p>
+            <a:pPr algn="ctr" indent="0" marL="0">
+              <a:buNone/>
+            </a:pPr>
+            <a:r>
+              <a:rPr lang="en-US" sz="900" b="1" dirty="0">
+                <a:solidFill>
+                  <a:srgbClr val="9D174D"/>
+                </a:solidFill>
+                <a:latin typeface="Trebuchet MS" pitchFamily="34" charset="0"/>
+                <a:ea typeface="Trebuchet MS" pitchFamily="34" charset="-122"/>
+                <a:cs typeface="Trebuchet MS" pitchFamily="34" charset="-120"/>
+              </a:rPr>
+              <a:t>d</a:t>
             </a:r>
             <a:endParaRPr lang="en-US" sz="900" dirty="0"/>
           </a:p>
@@ -33012,7 +33210,7 @@
                 <a:ea typeface="Calibri" pitchFamily="34" charset="-122"/>
                 <a:cs typeface="Calibri" pitchFamily="34" charset="-120"/>
               </a:rPr>
-              <a:t>Word Labs  •  wordlabs.app  •  Root: 'build' = to construct or put together</a:t>
+              <a:t>Word Labs  •  wordlabs.app  •  Root: 'build' = to construct or make</a:t>
             </a:r>
             <a:endParaRPr lang="en-US" sz="800" dirty="0"/>
           </a:p>
@@ -34181,7 +34379,7 @@
                 <a:ea typeface="Calibri" pitchFamily="34" charset="-122"/>
                 <a:cs typeface="Calibri" pitchFamily="34" charset="-120"/>
               </a:rPr>
-              <a:t>Word Labs  •  wordlabs.app  •  Root: 'build' = to construct or put together</a:t>
+              <a:t>Word Labs  •  wordlabs.app  •  Root: 'build' = to construct or make</a:t>
             </a:r>
             <a:endParaRPr lang="en-US" sz="800" dirty="0"/>
           </a:p>
@@ -34674,7 +34872,7 @@
                 <a:ea typeface="Trebuchet MS" pitchFamily="34" charset="-122"/>
                 <a:cs typeface="Trebuchet MS" pitchFamily="34" charset="-120"/>
               </a:rPr>
-              <a:t>un-</a:t>
+              <a:t>up-</a:t>
             </a:r>
             <a:endParaRPr lang="en-US" sz="1300" dirty="0"/>
           </a:p>
@@ -35133,7 +35331,7 @@
                 <a:ea typeface="Trebuchet MS" pitchFamily="34" charset="-122"/>
                 <a:cs typeface="Trebuchet MS" pitchFamily="34" charset="-120"/>
               </a:rPr>
-              <a:t>up-</a:t>
+              <a:t>un-</a:t>
             </a:r>
             <a:endParaRPr lang="en-US" sz="1300" dirty="0"/>
           </a:p>
@@ -35525,7 +35723,7 @@
                 <a:ea typeface="Trebuchet MS" pitchFamily="34" charset="-122"/>
                 <a:cs typeface="Trebuchet MS" pitchFamily="34" charset="-120"/>
               </a:rPr>
-              <a:t>builders</a:t>
+              <a:t>upbuilding</a:t>
             </a:r>
             <a:endParaRPr lang="en-US" sz="1200" dirty="0"/>
           </a:p>
@@ -35591,7 +35789,7 @@
                 <a:ea typeface="Trebuchet MS" pitchFamily="34" charset="-122"/>
                 <a:cs typeface="Trebuchet MS" pitchFamily="34" charset="-120"/>
               </a:rPr>
-              <a:t>outbuild</a:t>
+              <a:t>builders</a:t>
             </a:r>
             <a:endParaRPr lang="en-US" sz="1200" dirty="0"/>
           </a:p>
@@ -35657,7 +35855,7 @@
                 <a:ea typeface="Trebuchet MS" pitchFamily="34" charset="-122"/>
                 <a:cs typeface="Trebuchet MS" pitchFamily="34" charset="-120"/>
               </a:rPr>
-              <a:t>upbuilding</a:t>
+              <a:t>outbuilding</a:t>
             </a:r>
             <a:endParaRPr lang="en-US" sz="1200" dirty="0"/>
           </a:p>
@@ -35789,7 +35987,7 @@
                 <a:ea typeface="Trebuchet MS" pitchFamily="34" charset="-122"/>
                 <a:cs typeface="Trebuchet MS" pitchFamily="34" charset="-120"/>
               </a:rPr>
-              <a:t>overbuild</a:t>
+              <a:t>buildable</a:t>
             </a:r>
             <a:endParaRPr lang="en-US" sz="1200" dirty="0"/>
           </a:p>
@@ -36081,7 +36279,7 @@
                 <a:ea typeface="Calibri" pitchFamily="34" charset="-122"/>
                 <a:cs typeface="Calibri" pitchFamily="34" charset="-120"/>
               </a:rPr>
-              <a:t>Word Labs  •  wordlabs.app  •  Root: 'build' = to construct or put together</a:t>
+              <a:t>Word Labs  •  wordlabs.app  •  Root: 'build' = to construct or make</a:t>
             </a:r>
             <a:endParaRPr lang="en-US" sz="800" dirty="0"/>
           </a:p>
@@ -36245,7 +36443,7 @@
                 <a:ea typeface="Calibri" pitchFamily="34" charset="-122"/>
                 <a:cs typeface="Calibri" pitchFamily="34" charset="-120"/>
               </a:rPr>
-              <a:t>The core part of a word carrying its basic meaning. For example, 'build' means 'to construct or put together'.</a:t>
+              <a:t>The core part of a word carrying its basic meaning. For example, 'build' means 'to construct or make'.</a:t>
             </a:r>
             <a:endParaRPr lang="en-US" sz="1350" dirty="0"/>
           </a:p>
@@ -36865,7 +37063,7 @@
                 <a:ea typeface="Calibri" pitchFamily="34" charset="-122"/>
                 <a:cs typeface="Calibri" pitchFamily="34" charset="-120"/>
               </a:rPr>
-              <a:t>Word Labs  •  wordlabs.app  •  Root: 'build' = to construct or put together</a:t>
+              <a:t>Word Labs  •  wordlabs.app  •  Root: 'build' = to construct or make</a:t>
             </a:r>
             <a:endParaRPr lang="en-US" sz="800" dirty="0"/>
           </a:p>
@@ -36977,7 +37175,7 @@
                 <a:ea typeface="Calibri" pitchFamily="34" charset="-122"/>
                 <a:cs typeface="Calibri" pitchFamily="34" charset="-120"/>
               </a:rPr>
-              <a:t>1.  A 'builder' is a person who constructs things.</a:t>
+              <a:t>1.  A 'builder' is a person who constructs or makes structures.</a:t>
             </a:r>
             <a:endParaRPr lang="en-US" sz="1300" dirty="0"/>
           </a:p>
@@ -37116,7 +37314,7 @@
                 <a:ea typeface="Calibri" pitchFamily="34" charset="-122"/>
                 <a:cs typeface="Calibri" pitchFamily="34" charset="-120"/>
               </a:rPr>
-              <a:t>2.  The word 'rebuild' means to destroy something permanently.</a:t>
+              <a:t>2.  Adding '-ing' to 'build' gives you the word 'building'.</a:t>
             </a:r>
             <a:endParaRPr lang="en-US" sz="1300" dirty="0"/>
           </a:p>
@@ -37139,11 +37337,11 @@
             </a:avLst>
           </a:prstGeom>
           <a:solidFill>
-            <a:srgbClr val="FEE2E2"/>
-          </a:solidFill>
-          <a:ln w="12700">
-            <a:solidFill>
-              <a:srgbClr val="DC2626"/>
+            <a:srgbClr val="DCFCE7"/>
+          </a:solidFill>
+          <a:ln w="12700">
+            <a:solidFill>
+              <a:srgbClr val="16A34A"/>
             </a:solidFill>
             <a:prstDash val="solid"/>
           </a:ln>
@@ -37176,13 +37374,13 @@
             <a:r>
               <a:rPr lang="en-US" sz="1100" b="1" dirty="0">
                 <a:solidFill>
-                  <a:srgbClr val="DC2626"/>
+                  <a:srgbClr val="16A34A"/>
                 </a:solidFill>
                 <a:latin typeface="Trebuchet MS" pitchFamily="34" charset="0"/>
                 <a:ea typeface="Trebuchet MS" pitchFamily="34" charset="-122"/>
                 <a:cs typeface="Trebuchet MS" pitchFamily="34" charset="-120"/>
               </a:rPr>
-              <a:t>FALSE</a:t>
+              <a:t>TRUE</a:t>
             </a:r>
             <a:endParaRPr lang="en-US" sz="1100" dirty="0"/>
           </a:p>
@@ -37255,7 +37453,7 @@
                 <a:ea typeface="Calibri" pitchFamily="34" charset="-122"/>
                 <a:cs typeface="Calibri" pitchFamily="34" charset="-120"/>
               </a:rPr>
-              <a:t>3.  The suffix '-ing' can be added to 'build' to make 'building'.</a:t>
+              <a:t>3.  The root 'build' comes from the ancient Greek language.</a:t>
             </a:r>
             <a:endParaRPr lang="en-US" sz="1300" dirty="0"/>
           </a:p>
@@ -37278,11 +37476,11 @@
             </a:avLst>
           </a:prstGeom>
           <a:solidFill>
-            <a:srgbClr val="DCFCE7"/>
-          </a:solidFill>
-          <a:ln w="12700">
-            <a:solidFill>
-              <a:srgbClr val="16A34A"/>
+            <a:srgbClr val="FEE2E2"/>
+          </a:solidFill>
+          <a:ln w="12700">
+            <a:solidFill>
+              <a:srgbClr val="DC2626"/>
             </a:solidFill>
             <a:prstDash val="solid"/>
           </a:ln>
@@ -37315,13 +37513,13 @@
             <a:r>
               <a:rPr lang="en-US" sz="1100" b="1" dirty="0">
                 <a:solidFill>
-                  <a:srgbClr val="16A34A"/>
+                  <a:srgbClr val="DC2626"/>
                 </a:solidFill>
                 <a:latin typeface="Trebuchet MS" pitchFamily="34" charset="0"/>
                 <a:ea typeface="Trebuchet MS" pitchFamily="34" charset="-122"/>
                 <a:cs typeface="Trebuchet MS" pitchFamily="34" charset="-120"/>
               </a:rPr>
-              <a:t>TRUE</a:t>
+              <a:t>FALSE</a:t>
             </a:r>
             <a:endParaRPr lang="en-US" sz="1100" dirty="0"/>
           </a:p>
@@ -37394,7 +37592,7 @@
                 <a:ea typeface="Calibri" pitchFamily="34" charset="-122"/>
                 <a:cs typeface="Calibri" pitchFamily="34" charset="-120"/>
               </a:rPr>
-              <a:t>4.  A building is a structure you can enter and use for shelter or work.</a:t>
+              <a:t>4.  The prefix 'out' in 'outbuilding' means 'before' or 'earlier'.</a:t>
             </a:r>
             <a:endParaRPr lang="en-US" sz="1300" dirty="0"/>
           </a:p>
@@ -37417,11 +37615,11 @@
             </a:avLst>
           </a:prstGeom>
           <a:solidFill>
-            <a:srgbClr val="DCFCE7"/>
-          </a:solidFill>
-          <a:ln w="12700">
-            <a:solidFill>
-              <a:srgbClr val="16A34A"/>
+            <a:srgbClr val="FEE2E2"/>
+          </a:solidFill>
+          <a:ln w="12700">
+            <a:solidFill>
+              <a:srgbClr val="DC2626"/>
             </a:solidFill>
             <a:prstDash val="solid"/>
           </a:ln>
@@ -37454,13 +37652,13 @@
             <a:r>
               <a:rPr lang="en-US" sz="1100" b="1" dirty="0">
                 <a:solidFill>
-                  <a:srgbClr val="16A34A"/>
+                  <a:srgbClr val="DC2626"/>
                 </a:solidFill>
                 <a:latin typeface="Trebuchet MS" pitchFamily="34" charset="0"/>
                 <a:ea typeface="Trebuchet MS" pitchFamily="34" charset="-122"/>
                 <a:cs typeface="Trebuchet MS" pitchFamily="34" charset="-120"/>
               </a:rPr>
-              <a:t>TRUE</a:t>
+              <a:t>FALSE</a:t>
             </a:r>
             <a:endParaRPr lang="en-US" sz="1100" dirty="0"/>
           </a:p>
@@ -37533,7 +37731,7 @@
                 <a:ea typeface="Calibri" pitchFamily="34" charset="-122"/>
                 <a:cs typeface="Calibri" pitchFamily="34" charset="-120"/>
               </a:rPr>
-              <a:t>5.  The prefix 're-' in 'rebuild' means to do something for the very first time.</a:t>
+              <a:t>5.  The word 'rebuild' contains the root 'build' with a prefix added to the front.</a:t>
             </a:r>
             <a:endParaRPr lang="en-US" sz="1300" dirty="0"/>
           </a:p>
@@ -37556,11 +37754,11 @@
             </a:avLst>
           </a:prstGeom>
           <a:solidFill>
-            <a:srgbClr val="FEE2E2"/>
-          </a:solidFill>
-          <a:ln w="12700">
-            <a:solidFill>
-              <a:srgbClr val="DC2626"/>
+            <a:srgbClr val="DCFCE7"/>
+          </a:solidFill>
+          <a:ln w="12700">
+            <a:solidFill>
+              <a:srgbClr val="16A34A"/>
             </a:solidFill>
             <a:prstDash val="solid"/>
           </a:ln>
@@ -37593,13 +37791,13 @@
             <a:r>
               <a:rPr lang="en-US" sz="1100" b="1" dirty="0">
                 <a:solidFill>
-                  <a:srgbClr val="DC2626"/>
+                  <a:srgbClr val="16A34A"/>
                 </a:solidFill>
                 <a:latin typeface="Trebuchet MS" pitchFamily="34" charset="0"/>
                 <a:ea typeface="Trebuchet MS" pitchFamily="34" charset="-122"/>
                 <a:cs typeface="Trebuchet MS" pitchFamily="34" charset="-120"/>
               </a:rPr>
-              <a:t>FALSE</a:t>
+              <a:t>TRUE</a:t>
             </a:r>
             <a:endParaRPr lang="en-US" sz="1100" dirty="0"/>
           </a:p>
@@ -37891,7 +38089,7 @@
                 <a:ea typeface="Calibri" pitchFamily="34" charset="-122"/>
                 <a:cs typeface="Calibri" pitchFamily="34" charset="-120"/>
               </a:rPr>
-              <a:t>Word Labs  •  wordlabs.app  •  Root: 'build' = to construct or put together</a:t>
+              <a:t>Word Labs  •  wordlabs.app  •  Root: 'build' = to construct or make</a:t>
             </a:r>
             <a:endParaRPr lang="en-US" sz="800" dirty="0"/>
           </a:p>
@@ -38028,7 +38226,7 @@
                 <a:ea typeface="Trebuchet MS" pitchFamily="34" charset="-122"/>
                 <a:cs typeface="Trebuchet MS" pitchFamily="34" charset="-120"/>
               </a:rPr>
-              <a:t>to construct or put together</a:t>
+              <a:t>to construct or make</a:t>
             </a:r>
             <a:endParaRPr lang="en-US" sz="2000" dirty="0"/>
           </a:p>
@@ -38067,7 +38265,7 @@
                 <a:ea typeface="Calibri" pitchFamily="34" charset="-122"/>
                 <a:cs typeface="Calibri" pitchFamily="34" charset="-120"/>
               </a:rPr>
-              <a:t>Origin: Latin: byldan</a:t>
+              <a:t>Origin: Latin: buildjan</a:t>
             </a:r>
             <a:endParaRPr lang="en-US" sz="1100" dirty="0"/>
           </a:p>
@@ -38370,7 +38568,7 @@
                 <a:ea typeface="Trebuchet MS" pitchFamily="34" charset="-122"/>
                 <a:cs typeface="Trebuchet MS" pitchFamily="34" charset="-120"/>
               </a:rPr>
-              <a:t>builders</a:t>
+              <a:t>upbuilding</a:t>
             </a:r>
             <a:endParaRPr lang="en-US" sz="1300" dirty="0"/>
           </a:p>
@@ -38436,7 +38634,7 @@
                 <a:ea typeface="Trebuchet MS" pitchFamily="34" charset="-122"/>
                 <a:cs typeface="Trebuchet MS" pitchFamily="34" charset="-120"/>
               </a:rPr>
-              <a:t>outbuild</a:t>
+              <a:t>builders</a:t>
             </a:r>
             <a:endParaRPr lang="en-US" sz="1300" dirty="0"/>
           </a:p>
@@ -38502,7 +38700,7 @@
                 <a:ea typeface="Trebuchet MS" pitchFamily="34" charset="-122"/>
                 <a:cs typeface="Trebuchet MS" pitchFamily="34" charset="-120"/>
               </a:rPr>
-              <a:t>upbuilding</a:t>
+              <a:t>outbuilding</a:t>
             </a:r>
             <a:endParaRPr lang="en-US" sz="1300" dirty="0"/>
           </a:p>
@@ -38860,7 +39058,7 @@
                 <a:ea typeface="Calibri" pitchFamily="34" charset="-122"/>
                 <a:cs typeface="Calibri" pitchFamily="34" charset="-120"/>
               </a:rPr>
-              <a:t>Word Labs  •  wordlabs.app  •  Root: 'build' = to construct or put together</a:t>
+              <a:t>Word Labs  •  wordlabs.app  •  Root: 'build' = to construct or make</a:t>
             </a:r>
             <a:endParaRPr lang="en-US" sz="800" dirty="0"/>
           </a:p>
@@ -39353,7 +39551,7 @@
                 <a:ea typeface="Trebuchet MS" pitchFamily="34" charset="-122"/>
                 <a:cs typeface="Trebuchet MS" pitchFamily="34" charset="-120"/>
               </a:rPr>
-              <a:t>un-</a:t>
+              <a:t>up-</a:t>
             </a:r>
             <a:endParaRPr lang="en-US" sz="1300" dirty="0"/>
           </a:p>
@@ -39812,7 +40010,7 @@
                 <a:ea typeface="Trebuchet MS" pitchFamily="34" charset="-122"/>
                 <a:cs typeface="Trebuchet MS" pitchFamily="34" charset="-120"/>
               </a:rPr>
-              <a:t>up-</a:t>
+              <a:t>un-</a:t>
             </a:r>
             <a:endParaRPr lang="en-US" sz="1300" dirty="0"/>
           </a:p>
@@ -40634,7 +40832,7 @@
                 <a:ea typeface="Calibri" pitchFamily="34" charset="-122"/>
                 <a:cs typeface="Calibri" pitchFamily="34" charset="-120"/>
               </a:rPr>
-              <a:t>Word Labs  •  wordlabs.app  •  Root: 'build' = to construct or put together</a:t>
+              <a:t>Word Labs  •  wordlabs.app  •  Root: 'build' = to construct or make</a:t>
             </a:r>
             <a:endParaRPr lang="en-US" sz="800" dirty="0"/>
           </a:p>
@@ -40812,7 +41010,7 @@
                 <a:ea typeface="Calibri" pitchFamily="34" charset="-122"/>
                 <a:cs typeface="Calibri" pitchFamily="34" charset="-120"/>
               </a:rPr>
-              <a:t>A person who constructs buildings and other structures.</a:t>
+              <a:t>A person who constructs houses or other structures.</a:t>
             </a:r>
             <a:endParaRPr lang="en-US" sz="1200" dirty="0"/>
           </a:p>
@@ -41090,7 +41288,7 @@
                 <a:ea typeface="Calibri" pitchFamily="34" charset="-122"/>
                 <a:cs typeface="Calibri" pitchFamily="34" charset="-120"/>
               </a:rPr>
-              <a:t>To build more or better than someone else.</a:t>
+              <a:t>More than one person whose job is to construct buildings.</a:t>
             </a:r>
             <a:endParaRPr lang="en-US" sz="1200" dirty="0"/>
           </a:p>
@@ -41163,7 +41361,7 @@
                 <a:ea typeface="Trebuchet MS" pitchFamily="34" charset="-122"/>
                 <a:cs typeface="Trebuchet MS" pitchFamily="34" charset="-120"/>
               </a:rPr>
-              <a:t>builders</a:t>
+              <a:t>upbuilding</a:t>
             </a:r>
             <a:endParaRPr lang="en-US" sz="1200" dirty="0"/>
           </a:p>
@@ -41229,7 +41427,7 @@
                 <a:ea typeface="Calibri" pitchFamily="34" charset="-122"/>
                 <a:cs typeface="Calibri" pitchFamily="34" charset="-120"/>
               </a:rPr>
-              <a:t>The act of developing or improving something over time.</a:t>
+              <a:t>A smaller building separate from the main one, like a shed or barn.</a:t>
             </a:r>
             <a:endParaRPr lang="en-US" sz="1200" dirty="0"/>
           </a:p>
@@ -41302,7 +41500,7 @@
                 <a:ea typeface="Trebuchet MS" pitchFamily="34" charset="-122"/>
                 <a:cs typeface="Trebuchet MS" pitchFamily="34" charset="-120"/>
               </a:rPr>
-              <a:t>outbuild</a:t>
+              <a:t>builders</a:t>
             </a:r>
             <a:endParaRPr lang="en-US" sz="1200" dirty="0"/>
           </a:p>
@@ -41368,7 +41566,7 @@
                 <a:ea typeface="Calibri" pitchFamily="34" charset="-122"/>
                 <a:cs typeface="Calibri" pitchFamily="34" charset="-120"/>
               </a:rPr>
-              <a:t>More than one person whose job is to construct buildings.</a:t>
+              <a:t>The process of developing or strengthening something over time.</a:t>
             </a:r>
             <a:endParaRPr lang="en-US" sz="1200" dirty="0"/>
           </a:p>
@@ -41441,7 +41639,7 @@
                 <a:ea typeface="Trebuchet MS" pitchFamily="34" charset="-122"/>
                 <a:cs typeface="Trebuchet MS" pitchFamily="34" charset="-120"/>
               </a:rPr>
-              <a:t>upbuilding</a:t>
+              <a:t>outbuilding</a:t>
             </a:r>
             <a:endParaRPr lang="en-US" sz="1200" dirty="0"/>
           </a:p>
@@ -41507,7 +41705,7 @@
                 <a:ea typeface="Calibri" pitchFamily="34" charset="-122"/>
                 <a:cs typeface="Calibri" pitchFamily="34" charset="-120"/>
               </a:rPr>
-              <a:t>The process of constructing something again from scratch.</a:t>
+              <a:t>The act of constructing something again that was broken or destroyed.</a:t>
             </a:r>
             <a:endParaRPr lang="en-US" sz="1200" dirty="0"/>
           </a:p>
@@ -41646,7 +41844,7 @@
                 <a:ea typeface="Calibri" pitchFamily="34" charset="-122"/>
                 <a:cs typeface="Calibri" pitchFamily="34" charset="-120"/>
               </a:rPr>
-              <a:t>A structure with walls and a roof, like a house or school.</a:t>
+              <a:t>A structure with walls and a roof, like a school or house.</a:t>
             </a:r>
             <a:endParaRPr lang="en-US" sz="1200" dirty="0"/>
           </a:p>
@@ -41938,7 +42136,7 @@
                 <a:ea typeface="Calibri" pitchFamily="34" charset="-122"/>
                 <a:cs typeface="Calibri" pitchFamily="34" charset="-120"/>
               </a:rPr>
-              <a:t>Word Labs  •  wordlabs.app  •  Root: 'build' = to construct or put together</a:t>
+              <a:t>Word Labs  •  wordlabs.app  •  Root: 'build' = to construct or make</a:t>
             </a:r>
             <a:endParaRPr lang="en-US" sz="800" dirty="0"/>
           </a:p>
@@ -42141,7 +42339,7 @@
                 <a:ea typeface="Calibri" pitchFamily="34" charset="-122"/>
                 <a:cs typeface="Calibri" pitchFamily="34" charset="-120"/>
               </a:rPr>
-              <a:t>The builder carefully measured each wall before nailing the timber in place.</a:t>
+              <a:t>The builder used strong bricks and steel beams to construct the new school hall.</a:t>
             </a:r>
             <a:endParaRPr lang="en-US" sz="1500" dirty="0"/>
           </a:p>
@@ -42305,7 +42503,7 @@
                 <a:ea typeface="Calibri" pitchFamily="34" charset="-122"/>
                 <a:cs typeface="Calibri" pitchFamily="34" charset="-120"/>
               </a:rPr>
-              <a:t>After the storm, the community worked together on rebuilding the damaged hall.</a:t>
+              <a:t>After the storm, the community worked together to start rebuilding the damaged bridge.</a:t>
             </a:r>
             <a:endParaRPr lang="en-US" sz="1500" dirty="0"/>
           </a:p>
@@ -42469,7 +42667,7 @@
                 <a:ea typeface="Calibri" pitchFamily="34" charset="-122"/>
                 <a:cs typeface="Calibri" pitchFamily="34" charset="-120"/>
               </a:rPr>
-              <a:t>We watched the construction team as they started building the new school library.</a:t>
+              <a:t>The old outbuilding at the back of the farm was used to store tools and hay.</a:t>
             </a:r>
             <a:endParaRPr lang="en-US" sz="1500" dirty="0"/>
           </a:p>

--- a/output/wordlabs-build-3day.pptx
+++ b/output/wordlabs-build-3day.pptx
@@ -4240,7 +4240,7 @@
                 <a:ea typeface="Calibri" pitchFamily="34" charset="-122"/>
                 <a:cs typeface="Calibri" pitchFamily="34" charset="-120"/>
               </a:rPr>
-              <a:t>"to construct or make"</a:t>
+              <a:t>"make by putting parts together"</a:t>
             </a:r>
             <a:endParaRPr lang="en-US" sz="2200" dirty="0"/>
           </a:p>
@@ -4279,7 +4279,7 @@
                 <a:ea typeface="Calibri" pitchFamily="34" charset="-122"/>
                 <a:cs typeface="Calibri" pitchFamily="34" charset="-120"/>
               </a:rPr>
-              <a:t>Origin: Latin: buildjan</a:t>
+              <a:t>Origin: Core English root</a:t>
             </a:r>
             <a:endParaRPr lang="en-US" sz="1300" dirty="0"/>
           </a:p>
@@ -5288,7 +5288,7 @@
                 <a:ea typeface="Calibri" pitchFamily="34" charset="-122"/>
                 <a:cs typeface="Calibri" pitchFamily="34" charset="-120"/>
               </a:rPr>
-              <a:t>Word Labs  •  wordlabs.app  •  Root: 'build' = to construct or make</a:t>
+              <a:t>Word Labs  •  wordlabs.app  •  Root: 'build' = make by putting parts together</a:t>
             </a:r>
             <a:endParaRPr lang="en-US" sz="800" dirty="0"/>
           </a:p>
@@ -5928,7 +5928,7 @@
                 <a:ea typeface="Calibri" pitchFamily="34" charset="-122"/>
                 <a:cs typeface="Calibri" pitchFamily="34" charset="-120"/>
               </a:rPr>
-              <a:t>Word Labs  •  wordlabs.app  •  Root: 'build' = to construct or make</a:t>
+              <a:t>Word Labs  •  wordlabs.app  •  Root: 'build' = make by putting parts together</a:t>
             </a:r>
             <a:endParaRPr lang="en-US" sz="800" dirty="0"/>
           </a:p>
@@ -6040,7 +6040,7 @@
                 <a:ea typeface="Calibri" pitchFamily="34" charset="-122"/>
                 <a:cs typeface="Calibri" pitchFamily="34" charset="-120"/>
               </a:rPr>
-              <a:t>The </a:t>
+              <a:t>The library is a tall </a:t>
             </a:r>
             <a:pPr algn="l" indent="0" marL="0">
               <a:buNone/>
@@ -6057,7 +6057,7 @@
                 <a:ea typeface="Calibri" pitchFamily="34" charset="-122"/>
                 <a:cs typeface="Calibri" pitchFamily="34" charset="-120"/>
               </a:rPr>
-              <a:t>builder</a:t>
+              <a:t>building</a:t>
             </a:r>
             <a:pPr algn="l" indent="0" marL="0">
               <a:buNone/>
@@ -6071,7 +6071,7 @@
                 <a:ea typeface="Calibri" pitchFamily="34" charset="-122"/>
                 <a:cs typeface="Calibri" pitchFamily="34" charset="-120"/>
               </a:rPr>
-              <a:t> carefully planned the </a:t>
+              <a:t> in the centre of town. The city council </a:t>
             </a:r>
             <a:pPr algn="l" indent="0" marL="0">
               <a:buNone/>
@@ -6088,7 +6088,7 @@
                 <a:ea typeface="Calibri" pitchFamily="34" charset="-122"/>
                 <a:cs typeface="Calibri" pitchFamily="34" charset="-120"/>
               </a:rPr>
-              <a:t>rebuilding</a:t>
+              <a:t>rebuilds</a:t>
             </a:r>
             <a:pPr algn="l" indent="0" marL="0">
               <a:buNone/>
@@ -6102,7 +6102,7 @@
                 <a:ea typeface="Calibri" pitchFamily="34" charset="-122"/>
                 <a:cs typeface="Calibri" pitchFamily="34" charset="-120"/>
               </a:rPr>
-              <a:t> of the old library.</a:t>
+              <a:t> the playground every time it is vandalised.</a:t>
             </a:r>
             <a:endParaRPr lang="en-US" sz="1800" dirty="0"/>
           </a:p>
@@ -6257,7 +6257,7 @@
                 <a:ea typeface="Trebuchet MS" pitchFamily="34" charset="-122"/>
                 <a:cs typeface="Trebuchet MS" pitchFamily="34" charset="-120"/>
               </a:rPr>
-              <a:t>builder</a:t>
+              <a:t>building</a:t>
             </a:r>
             <a:endParaRPr lang="en-US" sz="1400" dirty="0"/>
           </a:p>
@@ -6385,7 +6385,7 @@
                 <a:ea typeface="Trebuchet MS" pitchFamily="34" charset="-122"/>
                 <a:cs typeface="Trebuchet MS" pitchFamily="34" charset="-120"/>
               </a:rPr>
-              <a:t>rebuilding</a:t>
+              <a:t>rebuilds</a:t>
             </a:r>
             <a:endParaRPr lang="en-US" sz="1400" dirty="0"/>
           </a:p>
@@ -6716,7 +6716,7 @@
                 <a:ea typeface="Calibri" pitchFamily="34" charset="-122"/>
                 <a:cs typeface="Calibri" pitchFamily="34" charset="-120"/>
               </a:rPr>
-              <a:t>Word Labs  •  wordlabs.app  •  Root: 'build' = to construct or make</a:t>
+              <a:t>Word Labs  •  wordlabs.app  •  Root: 'build' = make by putting parts together</a:t>
             </a:r>
             <a:endParaRPr lang="en-US" sz="800" dirty="0"/>
           </a:p>
@@ -6855,7 +6855,7 @@
                 <a:ea typeface="Trebuchet MS" pitchFamily="34" charset="-122"/>
                 <a:cs typeface="Trebuchet MS" pitchFamily="34" charset="-120"/>
               </a:rPr>
-              <a:t>builder</a:t>
+              <a:t>building</a:t>
             </a:r>
             <a:endParaRPr lang="en-US" sz="2800" dirty="0"/>
           </a:p>
@@ -7543,7 +7543,7 @@
                 <a:ea typeface="Calibri" pitchFamily="34" charset="-122"/>
                 <a:cs typeface="Calibri" pitchFamily="34" charset="-120"/>
               </a:rPr>
-              <a:t>Word Labs  •  wordlabs.app  •  Root: 'build' = to construct or make</a:t>
+              <a:t>Word Labs  •  wordlabs.app  •  Root: 'build' = make by putting parts together</a:t>
             </a:r>
             <a:endParaRPr lang="en-US" sz="800" dirty="0"/>
           </a:p>
@@ -7682,7 +7682,7 @@
                 <a:ea typeface="Trebuchet MS" pitchFamily="34" charset="-122"/>
                 <a:cs typeface="Trebuchet MS" pitchFamily="34" charset="-120"/>
               </a:rPr>
-              <a:t>builder</a:t>
+              <a:t>building</a:t>
             </a:r>
             <a:endParaRPr lang="en-US" sz="2800" dirty="0"/>
           </a:p>
@@ -7860,7 +7860,7 @@
                 <a:ea typeface="Calibri" pitchFamily="34" charset="-122"/>
                 <a:cs typeface="Calibri" pitchFamily="34" charset="-120"/>
               </a:rPr>
-              <a:t>to construct or make</a:t>
+              <a:t>make by putting parts together</a:t>
             </a:r>
             <a:endParaRPr lang="en-US" sz="850" dirty="0"/>
           </a:p>
@@ -7933,7 +7933,7 @@
                 <a:ea typeface="Trebuchet MS" pitchFamily="34" charset="-122"/>
                 <a:cs typeface="Trebuchet MS" pitchFamily="34" charset="-120"/>
               </a:rPr>
-              <a:t>er</a:t>
+              <a:t>ing</a:t>
             </a:r>
             <a:endParaRPr lang="en-US" sz="1300" dirty="0"/>
           </a:p>
@@ -7972,7 +7972,7 @@
                 <a:ea typeface="Calibri" pitchFamily="34" charset="-122"/>
                 <a:cs typeface="Calibri" pitchFamily="34" charset="-120"/>
               </a:rPr>
-              <a:t>a person who does something</a:t>
+              <a:t>happening now</a:t>
             </a:r>
             <a:endParaRPr lang="en-US" sz="850" dirty="0"/>
           </a:p>
@@ -8528,7 +8528,7 @@
                 <a:ea typeface="Calibri" pitchFamily="34" charset="-122"/>
                 <a:cs typeface="Calibri" pitchFamily="34" charset="-120"/>
               </a:rPr>
-              <a:t>Word Labs  •  wordlabs.app  •  Root: 'build' = to construct or make</a:t>
+              <a:t>Word Labs  •  wordlabs.app  •  Root: 'build' = make by putting parts together</a:t>
             </a:r>
             <a:endParaRPr lang="en-US" sz="800" dirty="0"/>
           </a:p>
@@ -8667,7 +8667,7 @@
                 <a:ea typeface="Trebuchet MS" pitchFamily="34" charset="-122"/>
                 <a:cs typeface="Trebuchet MS" pitchFamily="34" charset="-120"/>
               </a:rPr>
-              <a:t>builder</a:t>
+              <a:t>building</a:t>
             </a:r>
             <a:endParaRPr lang="en-US" sz="2800" dirty="0"/>
           </a:p>
@@ -8845,7 +8845,7 @@
                 <a:ea typeface="Calibri" pitchFamily="34" charset="-122"/>
                 <a:cs typeface="Calibri" pitchFamily="34" charset="-120"/>
               </a:rPr>
-              <a:t>to construct or make</a:t>
+              <a:t>make by putting parts together</a:t>
             </a:r>
             <a:endParaRPr lang="en-US" sz="850" dirty="0"/>
           </a:p>
@@ -8918,7 +8918,7 @@
                 <a:ea typeface="Trebuchet MS" pitchFamily="34" charset="-122"/>
                 <a:cs typeface="Trebuchet MS" pitchFamily="34" charset="-120"/>
               </a:rPr>
-              <a:t>er</a:t>
+              <a:t>ing</a:t>
             </a:r>
             <a:endParaRPr lang="en-US" sz="1300" dirty="0"/>
           </a:p>
@@ -8957,7 +8957,7 @@
                 <a:ea typeface="Calibri" pitchFamily="34" charset="-122"/>
                 <a:cs typeface="Calibri" pitchFamily="34" charset="-120"/>
               </a:rPr>
-              <a:t>a person who does something</a:t>
+              <a:t>happening now</a:t>
             </a:r>
             <a:endParaRPr lang="en-US" sz="850" dirty="0"/>
           </a:p>
@@ -9116,7 +9116,7 @@
                 <a:ea typeface="Trebuchet MS" pitchFamily="34" charset="-122"/>
                 <a:cs typeface="Trebuchet MS" pitchFamily="34" charset="-120"/>
               </a:rPr>
-              <a:t>buil</a:t>
+              <a:t>build</a:t>
             </a:r>
             <a:endParaRPr lang="en-US" sz="1400" dirty="0"/>
           </a:p>
@@ -9221,7 +9221,7 @@
                 <a:ea typeface="Trebuchet MS" pitchFamily="34" charset="-122"/>
                 <a:cs typeface="Trebuchet MS" pitchFamily="34" charset="-120"/>
               </a:rPr>
-              <a:t>der</a:t>
+              <a:t>ing</a:t>
             </a:r>
             <a:endParaRPr lang="en-US" sz="1400" dirty="0"/>
           </a:p>
@@ -9645,7 +9645,7 @@
                 <a:ea typeface="Calibri" pitchFamily="34" charset="-122"/>
                 <a:cs typeface="Calibri" pitchFamily="34" charset="-120"/>
               </a:rPr>
-              <a:t>Word Labs  •  wordlabs.app  •  Root: 'build' = to construct or make</a:t>
+              <a:t>Word Labs  •  wordlabs.app  •  Root: 'build' = make by putting parts together</a:t>
             </a:r>
             <a:endParaRPr lang="en-US" sz="800" dirty="0"/>
           </a:p>
@@ -9784,7 +9784,7 @@
                 <a:ea typeface="Trebuchet MS" pitchFamily="34" charset="-122"/>
                 <a:cs typeface="Trebuchet MS" pitchFamily="34" charset="-120"/>
               </a:rPr>
-              <a:t>builder</a:t>
+              <a:t>building</a:t>
             </a:r>
             <a:endParaRPr lang="en-US" sz="2800" dirty="0"/>
           </a:p>
@@ -9962,7 +9962,7 @@
                 <a:ea typeface="Calibri" pitchFamily="34" charset="-122"/>
                 <a:cs typeface="Calibri" pitchFamily="34" charset="-120"/>
               </a:rPr>
-              <a:t>to construct or make</a:t>
+              <a:t>make by putting parts together</a:t>
             </a:r>
             <a:endParaRPr lang="en-US" sz="850" dirty="0"/>
           </a:p>
@@ -10035,7 +10035,7 @@
                 <a:ea typeface="Trebuchet MS" pitchFamily="34" charset="-122"/>
                 <a:cs typeface="Trebuchet MS" pitchFamily="34" charset="-120"/>
               </a:rPr>
-              <a:t>er</a:t>
+              <a:t>ing</a:t>
             </a:r>
             <a:endParaRPr lang="en-US" sz="1300" dirty="0"/>
           </a:p>
@@ -10074,7 +10074,7 @@
                 <a:ea typeface="Calibri" pitchFamily="34" charset="-122"/>
                 <a:cs typeface="Calibri" pitchFamily="34" charset="-120"/>
               </a:rPr>
-              <a:t>a person who does something</a:t>
+              <a:t>happening now</a:t>
             </a:r>
             <a:endParaRPr lang="en-US" sz="850" dirty="0"/>
           </a:p>
@@ -10233,7 +10233,7 @@
                 <a:ea typeface="Trebuchet MS" pitchFamily="34" charset="-122"/>
                 <a:cs typeface="Trebuchet MS" pitchFamily="34" charset="-120"/>
               </a:rPr>
-              <a:t>buil</a:t>
+              <a:t>build</a:t>
             </a:r>
             <a:endParaRPr lang="en-US" sz="1400" dirty="0"/>
           </a:p>
@@ -10338,7 +10338,7 @@
                 <a:ea typeface="Trebuchet MS" pitchFamily="34" charset="-122"/>
                 <a:cs typeface="Trebuchet MS" pitchFamily="34" charset="-120"/>
               </a:rPr>
-              <a:t>der</a:t>
+              <a:t>ing</a:t>
             </a:r>
             <a:endParaRPr lang="en-US" sz="1400" dirty="0"/>
           </a:p>
@@ -10445,7 +10445,7 @@
         </p:nvSpPr>
         <p:spPr>
           <a:xfrm>
-            <a:off x="2427732" y="4169664"/>
+            <a:off x="2254649" y="4169664"/>
             <a:ext cx="685800" cy="475488"/>
           </a:xfrm>
           <a:prstGeom prst="rect">
@@ -10472,7 +10472,7 @@
         </p:nvSpPr>
         <p:spPr>
           <a:xfrm>
-            <a:off x="2427732" y="4169664"/>
+            <a:off x="2254649" y="4169664"/>
             <a:ext cx="685800" cy="475488"/>
           </a:xfrm>
           <a:prstGeom prst="rect">
@@ -10511,7 +10511,7 @@
         </p:nvSpPr>
         <p:spPr>
           <a:xfrm>
-            <a:off x="3639312" y="4169664"/>
+            <a:off x="3293146" y="4169664"/>
             <a:ext cx="685800" cy="475488"/>
           </a:xfrm>
           <a:prstGeom prst="rect">
@@ -10538,7 +10538,7 @@
         </p:nvSpPr>
         <p:spPr>
           <a:xfrm>
-            <a:off x="3639312" y="4169664"/>
+            <a:off x="3293146" y="4169664"/>
             <a:ext cx="685800" cy="475488"/>
           </a:xfrm>
           <a:prstGeom prst="rect">
@@ -10577,7 +10577,7 @@
         </p:nvSpPr>
         <p:spPr>
           <a:xfrm>
-            <a:off x="4850892" y="4169664"/>
+            <a:off x="4331643" y="4169664"/>
             <a:ext cx="685800" cy="475488"/>
           </a:xfrm>
           <a:prstGeom prst="rect">
@@ -10604,7 +10604,7 @@
         </p:nvSpPr>
         <p:spPr>
           <a:xfrm>
-            <a:off x="4850892" y="4169664"/>
+            <a:off x="4331643" y="4169664"/>
             <a:ext cx="685800" cy="475488"/>
           </a:xfrm>
           <a:prstGeom prst="rect">
@@ -10643,7 +10643,7 @@
         </p:nvSpPr>
         <p:spPr>
           <a:xfrm>
-            <a:off x="6062472" y="4169664"/>
+            <a:off x="5370141" y="4169664"/>
             <a:ext cx="685800" cy="475488"/>
           </a:xfrm>
           <a:prstGeom prst="rect">
@@ -10670,7 +10670,7 @@
         </p:nvSpPr>
         <p:spPr>
           <a:xfrm>
-            <a:off x="6062472" y="4169664"/>
+            <a:off x="5370141" y="4169664"/>
             <a:ext cx="685800" cy="475488"/>
           </a:xfrm>
           <a:prstGeom prst="rect">
@@ -10709,7 +10709,7 @@
         </p:nvSpPr>
         <p:spPr>
           <a:xfrm>
-            <a:off x="7274052" y="4169664"/>
+            <a:off x="6408638" y="4169664"/>
             <a:ext cx="685800" cy="475488"/>
           </a:xfrm>
           <a:prstGeom prst="rect">
@@ -10736,7 +10736,7 @@
         </p:nvSpPr>
         <p:spPr>
           <a:xfrm>
-            <a:off x="7274052" y="4169664"/>
+            <a:off x="6408638" y="4169664"/>
             <a:ext cx="685800" cy="475488"/>
           </a:xfrm>
           <a:prstGeom prst="rect">
@@ -10761,7 +10761,73 @@
                 <a:ea typeface="Trebuchet MS" pitchFamily="34" charset="-122"/>
                 <a:cs typeface="Trebuchet MS" pitchFamily="34" charset="-120"/>
               </a:rPr>
-              <a:t>er</a:t>
+              <a:t>i</a:t>
+            </a:r>
+            <a:endParaRPr lang="en-US" sz="900" dirty="0"/>
+          </a:p>
+        </p:txBody>
+      </p:sp>
+      <p:sp>
+        <p:nvSpPr>
+          <p:cNvPr id="43" name="Shape 41"/>
+          <p:cNvSpPr/>
+          <p:nvPr/>
+        </p:nvSpPr>
+        <p:spPr>
+          <a:xfrm>
+            <a:off x="7447135" y="4169664"/>
+            <a:ext cx="685800" cy="475488"/>
+          </a:xfrm>
+          <a:prstGeom prst="rect">
+            <a:avLst>
+              <a:gd name="adj" fmla="val 7692"/>
+            </a:avLst>
+          </a:prstGeom>
+          <a:solidFill>
+            <a:srgbClr val="FFFFFF"/>
+          </a:solidFill>
+          <a:ln w="12700">
+            <a:solidFill>
+              <a:srgbClr val="DB2777"/>
+            </a:solidFill>
+            <a:prstDash val="solid"/>
+          </a:ln>
+        </p:spPr>
+      </p:sp>
+      <p:sp>
+        <p:nvSpPr>
+          <p:cNvPr id="44" name="Text 42"/>
+          <p:cNvSpPr/>
+          <p:nvPr/>
+        </p:nvSpPr>
+        <p:spPr>
+          <a:xfrm>
+            <a:off x="7447135" y="4169664"/>
+            <a:ext cx="685800" cy="475488"/>
+          </a:xfrm>
+          <a:prstGeom prst="rect">
+            <a:avLst/>
+          </a:prstGeom>
+          <a:noFill/>
+          <a:ln/>
+        </p:spPr>
+        <p:txBody>
+          <a:bodyPr wrap="square" lIns="0" tIns="0" rIns="0" bIns="0" rtlCol="0" anchor="ctr"/>
+          <a:lstStyle/>
+          <a:p>
+            <a:pPr algn="ctr" indent="0" marL="0">
+              <a:buNone/>
+            </a:pPr>
+            <a:r>
+              <a:rPr lang="en-US" sz="900" b="1" dirty="0">
+                <a:solidFill>
+                  <a:srgbClr val="9D174D"/>
+                </a:solidFill>
+                <a:latin typeface="Trebuchet MS" pitchFamily="34" charset="0"/>
+                <a:ea typeface="Trebuchet MS" pitchFamily="34" charset="-122"/>
+                <a:cs typeface="Trebuchet MS" pitchFamily="34" charset="-120"/>
+              </a:rPr>
+              <a:t>ng</a:t>
             </a:r>
             <a:endParaRPr lang="en-US" sz="900" dirty="0"/>
           </a:p>
@@ -11053,7 +11119,7 @@
                 <a:ea typeface="Calibri" pitchFamily="34" charset="-122"/>
                 <a:cs typeface="Calibri" pitchFamily="34" charset="-120"/>
               </a:rPr>
-              <a:t>Word Labs  •  wordlabs.app  •  Root: 'build' = to construct or make</a:t>
+              <a:t>Word Labs  •  wordlabs.app  •  Root: 'build' = make by putting parts together</a:t>
             </a:r>
             <a:endParaRPr lang="en-US" sz="800" dirty="0"/>
           </a:p>
@@ -11192,7 +11258,7 @@
                 <a:ea typeface="Trebuchet MS" pitchFamily="34" charset="-122"/>
                 <a:cs typeface="Trebuchet MS" pitchFamily="34" charset="-120"/>
               </a:rPr>
-              <a:t>rebuilding</a:t>
+              <a:t>rebuilds</a:t>
             </a:r>
             <a:endParaRPr lang="en-US" sz="2800" dirty="0"/>
           </a:p>
@@ -11880,7 +11946,7 @@
                 <a:ea typeface="Calibri" pitchFamily="34" charset="-122"/>
                 <a:cs typeface="Calibri" pitchFamily="34" charset="-120"/>
               </a:rPr>
-              <a:t>Word Labs  •  wordlabs.app  •  Root: 'build' = to construct or make</a:t>
+              <a:t>Word Labs  •  wordlabs.app  •  Root: 'build' = make by putting parts together</a:t>
             </a:r>
             <a:endParaRPr lang="en-US" sz="800" dirty="0"/>
           </a:p>
@@ -12019,7 +12085,7 @@
                 <a:ea typeface="Trebuchet MS" pitchFamily="34" charset="-122"/>
                 <a:cs typeface="Trebuchet MS" pitchFamily="34" charset="-120"/>
               </a:rPr>
-              <a:t>rebuilding</a:t>
+              <a:t>rebuilds</a:t>
             </a:r>
             <a:endParaRPr lang="en-US" sz="2800" dirty="0"/>
           </a:p>
@@ -12309,7 +12375,7 @@
                 <a:ea typeface="Calibri" pitchFamily="34" charset="-122"/>
                 <a:cs typeface="Calibri" pitchFamily="34" charset="-120"/>
               </a:rPr>
-              <a:t>to construct or make</a:t>
+              <a:t>make by putting parts together</a:t>
             </a:r>
             <a:endParaRPr lang="en-US" sz="850" dirty="0"/>
           </a:p>
@@ -12382,7 +12448,7 @@
                 <a:ea typeface="Trebuchet MS" pitchFamily="34" charset="-122"/>
                 <a:cs typeface="Trebuchet MS" pitchFamily="34" charset="-120"/>
               </a:rPr>
-              <a:t>ing</a:t>
+              <a:t>s</a:t>
             </a:r>
             <a:endParaRPr lang="en-US" sz="1300" dirty="0"/>
           </a:p>
@@ -12421,7 +12487,7 @@
                 <a:ea typeface="Calibri" pitchFamily="34" charset="-122"/>
                 <a:cs typeface="Calibri" pitchFamily="34" charset="-120"/>
               </a:rPr>
-              <a:t>action in progress</a:t>
+              <a:t>plural or present tense</a:t>
             </a:r>
             <a:endParaRPr lang="en-US" sz="850" dirty="0"/>
           </a:p>
@@ -12977,7 +13043,7 @@
                 <a:ea typeface="Calibri" pitchFamily="34" charset="-122"/>
                 <a:cs typeface="Calibri" pitchFamily="34" charset="-120"/>
               </a:rPr>
-              <a:t>Word Labs  •  wordlabs.app  •  Root: 'build' = to construct or make</a:t>
+              <a:t>Word Labs  •  wordlabs.app  •  Root: 'build' = make by putting parts together</a:t>
             </a:r>
             <a:endParaRPr lang="en-US" sz="800" dirty="0"/>
           </a:p>
@@ -13116,7 +13182,7 @@
                 <a:ea typeface="Trebuchet MS" pitchFamily="34" charset="-122"/>
                 <a:cs typeface="Trebuchet MS" pitchFamily="34" charset="-120"/>
               </a:rPr>
-              <a:t>rebuilding</a:t>
+              <a:t>rebuilds</a:t>
             </a:r>
             <a:endParaRPr lang="en-US" sz="2800" dirty="0"/>
           </a:p>
@@ -13406,7 +13472,7 @@
                 <a:ea typeface="Calibri" pitchFamily="34" charset="-122"/>
                 <a:cs typeface="Calibri" pitchFamily="34" charset="-120"/>
               </a:rPr>
-              <a:t>to construct or make</a:t>
+              <a:t>make by putting parts together</a:t>
             </a:r>
             <a:endParaRPr lang="en-US" sz="850" dirty="0"/>
           </a:p>
@@ -13479,7 +13545,7 @@
                 <a:ea typeface="Trebuchet MS" pitchFamily="34" charset="-122"/>
                 <a:cs typeface="Trebuchet MS" pitchFamily="34" charset="-120"/>
               </a:rPr>
-              <a:t>ing</a:t>
+              <a:t>s</a:t>
             </a:r>
             <a:endParaRPr lang="en-US" sz="1300" dirty="0"/>
           </a:p>
@@ -13518,7 +13584,7 @@
                 <a:ea typeface="Calibri" pitchFamily="34" charset="-122"/>
                 <a:cs typeface="Calibri" pitchFamily="34" charset="-120"/>
               </a:rPr>
-              <a:t>action in progress</a:t>
+              <a:t>plural or present tense</a:t>
             </a:r>
             <a:endParaRPr lang="en-US" sz="850" dirty="0"/>
           </a:p>
@@ -13625,7 +13691,7 @@
         </p:nvSpPr>
         <p:spPr>
           <a:xfrm>
-            <a:off x="2313432" y="3364992"/>
+            <a:off x="2999232" y="3364992"/>
             <a:ext cx="1645920" cy="475488"/>
           </a:xfrm>
           <a:prstGeom prst="rect">
@@ -13652,7 +13718,7 @@
         </p:nvSpPr>
         <p:spPr>
           <a:xfrm>
-            <a:off x="2313432" y="3364992"/>
+            <a:off x="2999232" y="3364992"/>
             <a:ext cx="1645920" cy="475488"/>
           </a:xfrm>
           <a:prstGeom prst="rect">
@@ -13691,8 +13757,8 @@
         </p:nvSpPr>
         <p:spPr>
           <a:xfrm>
-            <a:off x="3959352" y="3364992"/>
-            <a:ext cx="411480" cy="475488"/>
+            <a:off x="4645152" y="3364992"/>
+            <a:ext cx="1097280" cy="475488"/>
           </a:xfrm>
           <a:prstGeom prst="rect">
             <a:avLst/>
@@ -13730,7 +13796,7 @@
         </p:nvSpPr>
         <p:spPr>
           <a:xfrm>
-            <a:off x="4370832" y="3364992"/>
+            <a:off x="5742432" y="3364992"/>
             <a:ext cx="1645920" cy="475488"/>
           </a:xfrm>
           <a:prstGeom prst="rect">
@@ -13757,7 +13823,7 @@
         </p:nvSpPr>
         <p:spPr>
           <a:xfrm>
-            <a:off x="4370832" y="3364992"/>
+            <a:off x="5742432" y="3364992"/>
             <a:ext cx="1645920" cy="475488"/>
           </a:xfrm>
           <a:prstGeom prst="rect">
@@ -13782,7 +13848,7 @@
                 <a:ea typeface="Trebuchet MS" pitchFamily="34" charset="-122"/>
                 <a:cs typeface="Trebuchet MS" pitchFamily="34" charset="-120"/>
               </a:rPr>
-              <a:t>buil</a:t>
+              <a:t>builds</a:t>
             </a:r>
             <a:endParaRPr lang="en-US" sz="1400" dirty="0"/>
           </a:p>
@@ -13790,14 +13856,41 @@
       </p:sp>
       <p:sp>
         <p:nvSpPr>
-          <p:cNvPr id="33" name="Text 31"/>
-          <p:cNvSpPr/>
-          <p:nvPr/>
-        </p:nvSpPr>
-        <p:spPr>
-          <a:xfrm>
-            <a:off x="6016752" y="3364992"/>
-            <a:ext cx="411480" cy="475488"/>
+          <p:cNvPr id="33" name="Shape 31"/>
+          <p:cNvSpPr/>
+          <p:nvPr/>
+        </p:nvSpPr>
+        <p:spPr>
+          <a:xfrm>
+            <a:off x="365760" y="4096512"/>
+            <a:ext cx="1371600" cy="804672"/>
+          </a:xfrm>
+          <a:prstGeom prst="rect">
+            <a:avLst>
+              <a:gd name="adj" fmla="val 6818"/>
+            </a:avLst>
+          </a:prstGeom>
+          <a:solidFill>
+            <a:srgbClr val="E2E8F0"/>
+          </a:solidFill>
+          <a:ln w="12700">
+            <a:solidFill>
+              <a:srgbClr val="E2E8F0"/>
+            </a:solidFill>
+            <a:prstDash val="solid"/>
+          </a:ln>
+        </p:spPr>
+      </p:sp>
+      <p:sp>
+        <p:nvSpPr>
+          <p:cNvPr id="34" name="Text 32"/>
+          <p:cNvSpPr/>
+          <p:nvPr/>
+        </p:nvSpPr>
+        <p:spPr>
+          <a:xfrm>
+            <a:off x="365760" y="4096512"/>
+            <a:ext cx="1371600" cy="804672"/>
           </a:xfrm>
           <a:prstGeom prst="rect">
             <a:avLst/>
@@ -13813,96 +13906,30 @@
               <a:buNone/>
             </a:pPr>
             <a:r>
-              <a:rPr lang="en-US" sz="1600" b="1" dirty="0">
-                <a:solidFill>
-                  <a:srgbClr val="0D9488"/>
+              <a:rPr lang="en-US" sz="1100" b="1" dirty="0">
+                <a:solidFill>
+                  <a:srgbClr val="475569"/>
                 </a:solidFill>
                 <a:latin typeface="Trebuchet MS" pitchFamily="34" charset="0"/>
                 <a:ea typeface="Trebuchet MS" pitchFamily="34" charset="-122"/>
                 <a:cs typeface="Trebuchet MS" pitchFamily="34" charset="-120"/>
               </a:rPr>
-              <a:t>·</a:t>
-            </a:r>
-            <a:endParaRPr lang="en-US" sz="1600" dirty="0"/>
-          </a:p>
-        </p:txBody>
-      </p:sp>
-      <p:sp>
-        <p:nvSpPr>
-          <p:cNvPr id="34" name="Shape 32"/>
-          <p:cNvSpPr/>
-          <p:nvPr/>
-        </p:nvSpPr>
-        <p:spPr>
-          <a:xfrm>
-            <a:off x="6428232" y="3364992"/>
-            <a:ext cx="1645920" cy="475488"/>
-          </a:xfrm>
-          <a:prstGeom prst="rect">
-            <a:avLst>
-              <a:gd name="adj" fmla="val 9615"/>
-            </a:avLst>
-          </a:prstGeom>
-          <a:solidFill>
-            <a:srgbClr val="FFFFFF"/>
-          </a:solidFill>
-          <a:ln w="12700">
-            <a:solidFill>
-              <a:srgbClr val="0D9488"/>
-            </a:solidFill>
-            <a:prstDash val="solid"/>
-          </a:ln>
-        </p:spPr>
-      </p:sp>
-      <p:sp>
-        <p:nvSpPr>
-          <p:cNvPr id="35" name="Text 33"/>
-          <p:cNvSpPr/>
-          <p:nvPr/>
-        </p:nvSpPr>
-        <p:spPr>
-          <a:xfrm>
-            <a:off x="6428232" y="3364992"/>
-            <a:ext cx="1645920" cy="475488"/>
-          </a:xfrm>
-          <a:prstGeom prst="rect">
-            <a:avLst/>
-          </a:prstGeom>
-          <a:noFill/>
-          <a:ln/>
-        </p:spPr>
-        <p:txBody>
-          <a:bodyPr wrap="square" lIns="0" tIns="0" rIns="0" bIns="0" rtlCol="0" anchor="ctr"/>
-          <a:lstStyle/>
-          <a:p>
-            <a:pPr algn="ctr" indent="0" marL="0">
-              <a:buNone/>
-            </a:pPr>
-            <a:r>
-              <a:rPr lang="en-US" sz="1400" b="1" dirty="0">
-                <a:solidFill>
-                  <a:srgbClr val="0D9488"/>
-                </a:solidFill>
-                <a:latin typeface="Trebuchet MS" pitchFamily="34" charset="0"/>
-                <a:ea typeface="Trebuchet MS" pitchFamily="34" charset="-122"/>
-                <a:cs typeface="Trebuchet MS" pitchFamily="34" charset="-120"/>
-              </a:rPr>
-              <a:t>ding</a:t>
-            </a:r>
-            <a:endParaRPr lang="en-US" sz="1400" dirty="0"/>
-          </a:p>
-        </p:txBody>
-      </p:sp>
-      <p:sp>
-        <p:nvSpPr>
-          <p:cNvPr id="36" name="Shape 34"/>
-          <p:cNvSpPr/>
-          <p:nvPr/>
-        </p:nvSpPr>
-        <p:spPr>
-          <a:xfrm>
-            <a:off x="365760" y="4096512"/>
-            <a:ext cx="1371600" cy="804672"/>
+              <a:t>Phonemes</a:t>
+            </a:r>
+            <a:endParaRPr lang="en-US" sz="1100" dirty="0"/>
+          </a:p>
+        </p:txBody>
+      </p:sp>
+      <p:sp>
+        <p:nvSpPr>
+          <p:cNvPr id="35" name="Shape 33"/>
+          <p:cNvSpPr/>
+          <p:nvPr/>
+        </p:nvSpPr>
+        <p:spPr>
+          <a:xfrm>
+            <a:off x="1874520" y="4096512"/>
+            <a:ext cx="6903720" cy="804672"/>
           </a:xfrm>
           <a:prstGeom prst="rect">
             <a:avLst>
@@ -13910,85 +13937,19 @@
             </a:avLst>
           </a:prstGeom>
           <a:solidFill>
-            <a:srgbClr val="E2E8F0"/>
+            <a:srgbClr val="F8FAFC"/>
           </a:solidFill>
           <a:ln w="12700">
             <a:solidFill>
               <a:srgbClr val="E2E8F0"/>
             </a:solidFill>
-            <a:prstDash val="solid"/>
-          </a:ln>
-        </p:spPr>
-      </p:sp>
-      <p:sp>
-        <p:nvSpPr>
-          <p:cNvPr id="37" name="Text 35"/>
-          <p:cNvSpPr/>
-          <p:nvPr/>
-        </p:nvSpPr>
-        <p:spPr>
-          <a:xfrm>
-            <a:off x="365760" y="4096512"/>
-            <a:ext cx="1371600" cy="804672"/>
-          </a:xfrm>
-          <a:prstGeom prst="rect">
-            <a:avLst/>
-          </a:prstGeom>
-          <a:noFill/>
-          <a:ln/>
-        </p:spPr>
-        <p:txBody>
-          <a:bodyPr wrap="square" lIns="0" tIns="0" rIns="0" bIns="0" rtlCol="0" anchor="ctr"/>
-          <a:lstStyle/>
-          <a:p>
-            <a:pPr algn="ctr" indent="0" marL="0">
-              <a:buNone/>
-            </a:pPr>
-            <a:r>
-              <a:rPr lang="en-US" sz="1100" b="1" dirty="0">
-                <a:solidFill>
-                  <a:srgbClr val="475569"/>
-                </a:solidFill>
-                <a:latin typeface="Trebuchet MS" pitchFamily="34" charset="0"/>
-                <a:ea typeface="Trebuchet MS" pitchFamily="34" charset="-122"/>
-                <a:cs typeface="Trebuchet MS" pitchFamily="34" charset="-120"/>
-              </a:rPr>
-              <a:t>Phonemes</a:t>
-            </a:r>
-            <a:endParaRPr lang="en-US" sz="1100" dirty="0"/>
-          </a:p>
-        </p:txBody>
-      </p:sp>
-      <p:sp>
-        <p:nvSpPr>
-          <p:cNvPr id="38" name="Shape 36"/>
-          <p:cNvSpPr/>
-          <p:nvPr/>
-        </p:nvSpPr>
-        <p:spPr>
-          <a:xfrm>
-            <a:off x="1874520" y="4096512"/>
-            <a:ext cx="6903720" cy="804672"/>
-          </a:xfrm>
-          <a:prstGeom prst="rect">
-            <a:avLst>
-              <a:gd name="adj" fmla="val 6818"/>
-            </a:avLst>
-          </a:prstGeom>
-          <a:solidFill>
-            <a:srgbClr val="F8FAFC"/>
-          </a:solidFill>
-          <a:ln w="12700">
-            <a:solidFill>
-              <a:srgbClr val="E2E8F0"/>
-            </a:solidFill>
             <a:prstDash val="dash"/>
           </a:ln>
         </p:spPr>
       </p:sp>
       <p:sp>
         <p:nvSpPr>
-          <p:cNvPr id="39" name="Text 37"/>
+          <p:cNvPr id="36" name="Text 34"/>
           <p:cNvSpPr/>
           <p:nvPr/>
         </p:nvSpPr>
@@ -14220,7 +14181,7 @@
                 <a:ea typeface="Calibri" pitchFamily="34" charset="-122"/>
                 <a:cs typeface="Calibri" pitchFamily="34" charset="-120"/>
               </a:rPr>
-              <a:t>Root 'build' — to construct or make</a:t>
+              <a:t>Root 'build' — make by putting parts together</a:t>
             </a:r>
             <a:endParaRPr lang="en-US" sz="1600" dirty="0"/>
           </a:p>
@@ -14576,7 +14537,7 @@
                 <a:ea typeface="Calibri" pitchFamily="34" charset="-122"/>
                 <a:cs typeface="Calibri" pitchFamily="34" charset="-120"/>
               </a:rPr>
-              <a:t>Word Labs  •  wordlabs.app  •  Root: 'build' = to construct or make</a:t>
+              <a:t>Word Labs  •  wordlabs.app  •  Root: 'build' = make by putting parts together</a:t>
             </a:r>
             <a:endParaRPr lang="en-US" sz="800" dirty="0"/>
           </a:p>
@@ -14715,7 +14676,7 @@
                 <a:ea typeface="Trebuchet MS" pitchFamily="34" charset="-122"/>
                 <a:cs typeface="Trebuchet MS" pitchFamily="34" charset="-120"/>
               </a:rPr>
-              <a:t>rebuilding</a:t>
+              <a:t>rebuilds</a:t>
             </a:r>
             <a:endParaRPr lang="en-US" sz="2800" dirty="0"/>
           </a:p>
@@ -15005,7 +14966,7 @@
                 <a:ea typeface="Calibri" pitchFamily="34" charset="-122"/>
                 <a:cs typeface="Calibri" pitchFamily="34" charset="-120"/>
               </a:rPr>
-              <a:t>to construct or make</a:t>
+              <a:t>make by putting parts together</a:t>
             </a:r>
             <a:endParaRPr lang="en-US" sz="850" dirty="0"/>
           </a:p>
@@ -15078,7 +15039,7 @@
                 <a:ea typeface="Trebuchet MS" pitchFamily="34" charset="-122"/>
                 <a:cs typeface="Trebuchet MS" pitchFamily="34" charset="-120"/>
               </a:rPr>
-              <a:t>ing</a:t>
+              <a:t>s</a:t>
             </a:r>
             <a:endParaRPr lang="en-US" sz="1300" dirty="0"/>
           </a:p>
@@ -15117,7 +15078,7 @@
                 <a:ea typeface="Calibri" pitchFamily="34" charset="-122"/>
                 <a:cs typeface="Calibri" pitchFamily="34" charset="-120"/>
               </a:rPr>
-              <a:t>action in progress</a:t>
+              <a:t>plural or present tense</a:t>
             </a:r>
             <a:endParaRPr lang="en-US" sz="850" dirty="0"/>
           </a:p>
@@ -15224,7 +15185,7 @@
         </p:nvSpPr>
         <p:spPr>
           <a:xfrm>
-            <a:off x="2313432" y="3364992"/>
+            <a:off x="2999232" y="3364992"/>
             <a:ext cx="1645920" cy="475488"/>
           </a:xfrm>
           <a:prstGeom prst="rect">
@@ -15251,7 +15212,7 @@
         </p:nvSpPr>
         <p:spPr>
           <a:xfrm>
-            <a:off x="2313432" y="3364992"/>
+            <a:off x="2999232" y="3364992"/>
             <a:ext cx="1645920" cy="475488"/>
           </a:xfrm>
           <a:prstGeom prst="rect">
@@ -15290,8 +15251,8 @@
         </p:nvSpPr>
         <p:spPr>
           <a:xfrm>
-            <a:off x="3959352" y="3364992"/>
-            <a:ext cx="411480" cy="475488"/>
+            <a:off x="4645152" y="3364992"/>
+            <a:ext cx="1097280" cy="475488"/>
           </a:xfrm>
           <a:prstGeom prst="rect">
             <a:avLst/>
@@ -15329,7 +15290,7 @@
         </p:nvSpPr>
         <p:spPr>
           <a:xfrm>
-            <a:off x="4370832" y="3364992"/>
+            <a:off x="5742432" y="3364992"/>
             <a:ext cx="1645920" cy="475488"/>
           </a:xfrm>
           <a:prstGeom prst="rect">
@@ -15356,7 +15317,7 @@
         </p:nvSpPr>
         <p:spPr>
           <a:xfrm>
-            <a:off x="4370832" y="3364992"/>
+            <a:off x="5742432" y="3364992"/>
             <a:ext cx="1645920" cy="475488"/>
           </a:xfrm>
           <a:prstGeom prst="rect">
@@ -15381,7 +15342,7 @@
                 <a:ea typeface="Trebuchet MS" pitchFamily="34" charset="-122"/>
                 <a:cs typeface="Trebuchet MS" pitchFamily="34" charset="-120"/>
               </a:rPr>
-              <a:t>buil</a:t>
+              <a:t>builds</a:t>
             </a:r>
             <a:endParaRPr lang="en-US" sz="1400" dirty="0"/>
           </a:p>
@@ -15389,14 +15350,41 @@
       </p:sp>
       <p:sp>
         <p:nvSpPr>
-          <p:cNvPr id="33" name="Text 31"/>
-          <p:cNvSpPr/>
-          <p:nvPr/>
-        </p:nvSpPr>
-        <p:spPr>
-          <a:xfrm>
-            <a:off x="6016752" y="3364992"/>
-            <a:ext cx="411480" cy="475488"/>
+          <p:cNvPr id="33" name="Shape 31"/>
+          <p:cNvSpPr/>
+          <p:nvPr/>
+        </p:nvSpPr>
+        <p:spPr>
+          <a:xfrm>
+            <a:off x="365760" y="4096512"/>
+            <a:ext cx="1371600" cy="804672"/>
+          </a:xfrm>
+          <a:prstGeom prst="rect">
+            <a:avLst>
+              <a:gd name="adj" fmla="val 6818"/>
+            </a:avLst>
+          </a:prstGeom>
+          <a:solidFill>
+            <a:srgbClr val="E2E8F0"/>
+          </a:solidFill>
+          <a:ln w="12700">
+            <a:solidFill>
+              <a:srgbClr val="E2E8F0"/>
+            </a:solidFill>
+            <a:prstDash val="solid"/>
+          </a:ln>
+        </p:spPr>
+      </p:sp>
+      <p:sp>
+        <p:nvSpPr>
+          <p:cNvPr id="34" name="Text 32"/>
+          <p:cNvSpPr/>
+          <p:nvPr/>
+        </p:nvSpPr>
+        <p:spPr>
+          <a:xfrm>
+            <a:off x="365760" y="4096512"/>
+            <a:ext cx="1371600" cy="804672"/>
           </a:xfrm>
           <a:prstGeom prst="rect">
             <a:avLst/>
@@ -15412,57 +15400,84 @@
               <a:buNone/>
             </a:pPr>
             <a:r>
-              <a:rPr lang="en-US" sz="1600" b="1" dirty="0">
-                <a:solidFill>
-                  <a:srgbClr val="0D9488"/>
+              <a:rPr lang="en-US" sz="1100" b="1" dirty="0">
+                <a:solidFill>
+                  <a:srgbClr val="475569"/>
                 </a:solidFill>
                 <a:latin typeface="Trebuchet MS" pitchFamily="34" charset="0"/>
                 <a:ea typeface="Trebuchet MS" pitchFamily="34" charset="-122"/>
                 <a:cs typeface="Trebuchet MS" pitchFamily="34" charset="-120"/>
               </a:rPr>
-              <a:t>·</a:t>
-            </a:r>
-            <a:endParaRPr lang="en-US" sz="1600" dirty="0"/>
-          </a:p>
-        </p:txBody>
-      </p:sp>
-      <p:sp>
-        <p:nvSpPr>
-          <p:cNvPr id="34" name="Shape 32"/>
-          <p:cNvSpPr/>
-          <p:nvPr/>
-        </p:nvSpPr>
-        <p:spPr>
-          <a:xfrm>
-            <a:off x="6428232" y="3364992"/>
-            <a:ext cx="1645920" cy="475488"/>
+              <a:t>Phonemes</a:t>
+            </a:r>
+            <a:endParaRPr lang="en-US" sz="1100" dirty="0"/>
+          </a:p>
+        </p:txBody>
+      </p:sp>
+      <p:sp>
+        <p:nvSpPr>
+          <p:cNvPr id="35" name="Shape 33"/>
+          <p:cNvSpPr/>
+          <p:nvPr/>
+        </p:nvSpPr>
+        <p:spPr>
+          <a:xfrm>
+            <a:off x="1874520" y="4096512"/>
+            <a:ext cx="6903720" cy="658368"/>
           </a:xfrm>
           <a:prstGeom prst="rect">
             <a:avLst>
-              <a:gd name="adj" fmla="val 9615"/>
+              <a:gd name="adj" fmla="val 8333"/>
             </a:avLst>
           </a:prstGeom>
           <a:solidFill>
+            <a:srgbClr val="FCE7F3"/>
+          </a:solidFill>
+          <a:ln w="12700">
+            <a:solidFill>
+              <a:srgbClr val="DB2777"/>
+            </a:solidFill>
+            <a:prstDash val="solid"/>
+          </a:ln>
+        </p:spPr>
+      </p:sp>
+      <p:sp>
+        <p:nvSpPr>
+          <p:cNvPr id="36" name="Shape 34"/>
+          <p:cNvSpPr/>
+          <p:nvPr/>
+        </p:nvSpPr>
+        <p:spPr>
+          <a:xfrm>
+            <a:off x="2124837" y="4169664"/>
+            <a:ext cx="685800" cy="475488"/>
+          </a:xfrm>
+          <a:prstGeom prst="rect">
+            <a:avLst>
+              <a:gd name="adj" fmla="val 7692"/>
+            </a:avLst>
+          </a:prstGeom>
+          <a:solidFill>
             <a:srgbClr val="FFFFFF"/>
           </a:solidFill>
           <a:ln w="12700">
             <a:solidFill>
-              <a:srgbClr val="0D9488"/>
-            </a:solidFill>
-            <a:prstDash val="solid"/>
-          </a:ln>
-        </p:spPr>
-      </p:sp>
-      <p:sp>
-        <p:nvSpPr>
-          <p:cNvPr id="35" name="Text 33"/>
-          <p:cNvSpPr/>
-          <p:nvPr/>
-        </p:nvSpPr>
-        <p:spPr>
-          <a:xfrm>
-            <a:off x="6428232" y="3364992"/>
-            <a:ext cx="1645920" cy="475488"/>
+              <a:srgbClr val="DB2777"/>
+            </a:solidFill>
+            <a:prstDash val="solid"/>
+          </a:ln>
+        </p:spPr>
+      </p:sp>
+      <p:sp>
+        <p:nvSpPr>
+          <p:cNvPr id="37" name="Text 35"/>
+          <p:cNvSpPr/>
+          <p:nvPr/>
+        </p:nvSpPr>
+        <p:spPr>
+          <a:xfrm>
+            <a:off x="2124837" y="4169664"/>
+            <a:ext cx="685800" cy="475488"/>
           </a:xfrm>
           <a:prstGeom prst="rect">
             <a:avLst/>
@@ -15478,57 +15493,57 @@
               <a:buNone/>
             </a:pPr>
             <a:r>
-              <a:rPr lang="en-US" sz="1400" b="1" dirty="0">
-                <a:solidFill>
-                  <a:srgbClr val="0D9488"/>
+              <a:rPr lang="en-US" sz="900" b="1" dirty="0">
+                <a:solidFill>
+                  <a:srgbClr val="9D174D"/>
                 </a:solidFill>
                 <a:latin typeface="Trebuchet MS" pitchFamily="34" charset="0"/>
                 <a:ea typeface="Trebuchet MS" pitchFamily="34" charset="-122"/>
                 <a:cs typeface="Trebuchet MS" pitchFamily="34" charset="-120"/>
               </a:rPr>
-              <a:t>ding</a:t>
-            </a:r>
-            <a:endParaRPr lang="en-US" sz="1400" dirty="0"/>
-          </a:p>
-        </p:txBody>
-      </p:sp>
-      <p:sp>
-        <p:nvSpPr>
-          <p:cNvPr id="36" name="Shape 34"/>
-          <p:cNvSpPr/>
-          <p:nvPr/>
-        </p:nvSpPr>
-        <p:spPr>
-          <a:xfrm>
-            <a:off x="365760" y="4096512"/>
-            <a:ext cx="1371600" cy="804672"/>
+              <a:t>r</a:t>
+            </a:r>
+            <a:endParaRPr lang="en-US" sz="900" dirty="0"/>
+          </a:p>
+        </p:txBody>
+      </p:sp>
+      <p:sp>
+        <p:nvSpPr>
+          <p:cNvPr id="38" name="Shape 36"/>
+          <p:cNvSpPr/>
+          <p:nvPr/>
+        </p:nvSpPr>
+        <p:spPr>
+          <a:xfrm>
+            <a:off x="3033522" y="4169664"/>
+            <a:ext cx="685800" cy="475488"/>
           </a:xfrm>
           <a:prstGeom prst="rect">
             <a:avLst>
-              <a:gd name="adj" fmla="val 6818"/>
+              <a:gd name="adj" fmla="val 7692"/>
             </a:avLst>
           </a:prstGeom>
           <a:solidFill>
-            <a:srgbClr val="E2E8F0"/>
-          </a:solidFill>
-          <a:ln w="12700">
-            <a:solidFill>
-              <a:srgbClr val="E2E8F0"/>
-            </a:solidFill>
-            <a:prstDash val="solid"/>
-          </a:ln>
-        </p:spPr>
-      </p:sp>
-      <p:sp>
-        <p:nvSpPr>
-          <p:cNvPr id="37" name="Text 35"/>
-          <p:cNvSpPr/>
-          <p:nvPr/>
-        </p:nvSpPr>
-        <p:spPr>
-          <a:xfrm>
-            <a:off x="365760" y="4096512"/>
-            <a:ext cx="1371600" cy="804672"/>
+            <a:srgbClr val="FFFFFF"/>
+          </a:solidFill>
+          <a:ln w="12700">
+            <a:solidFill>
+              <a:srgbClr val="DB2777"/>
+            </a:solidFill>
+            <a:prstDash val="solid"/>
+          </a:ln>
+        </p:spPr>
+      </p:sp>
+      <p:sp>
+        <p:nvSpPr>
+          <p:cNvPr id="39" name="Text 37"/>
+          <p:cNvSpPr/>
+          <p:nvPr/>
+        </p:nvSpPr>
+        <p:spPr>
+          <a:xfrm>
+            <a:off x="3033522" y="4169664"/>
+            <a:ext cx="685800" cy="475488"/>
           </a:xfrm>
           <a:prstGeom prst="rect">
             <a:avLst/>
@@ -15544,56 +15559,29 @@
               <a:buNone/>
             </a:pPr>
             <a:r>
-              <a:rPr lang="en-US" sz="1100" b="1" dirty="0">
-                <a:solidFill>
-                  <a:srgbClr val="475569"/>
+              <a:rPr lang="en-US" sz="900" b="1" dirty="0">
+                <a:solidFill>
+                  <a:srgbClr val="9D174D"/>
                 </a:solidFill>
                 <a:latin typeface="Trebuchet MS" pitchFamily="34" charset="0"/>
                 <a:ea typeface="Trebuchet MS" pitchFamily="34" charset="-122"/>
                 <a:cs typeface="Trebuchet MS" pitchFamily="34" charset="-120"/>
               </a:rPr>
-              <a:t>Phonemes</a:t>
-            </a:r>
-            <a:endParaRPr lang="en-US" sz="1100" dirty="0"/>
-          </a:p>
-        </p:txBody>
-      </p:sp>
-      <p:sp>
-        <p:nvSpPr>
-          <p:cNvPr id="38" name="Shape 36"/>
-          <p:cNvSpPr/>
-          <p:nvPr/>
-        </p:nvSpPr>
-        <p:spPr>
-          <a:xfrm>
-            <a:off x="1874520" y="4096512"/>
-            <a:ext cx="6903720" cy="658368"/>
-          </a:xfrm>
-          <a:prstGeom prst="rect">
-            <a:avLst>
-              <a:gd name="adj" fmla="val 8333"/>
-            </a:avLst>
-          </a:prstGeom>
-          <a:solidFill>
-            <a:srgbClr val="FCE7F3"/>
-          </a:solidFill>
-          <a:ln w="12700">
-            <a:solidFill>
-              <a:srgbClr val="DB2777"/>
-            </a:solidFill>
-            <a:prstDash val="solid"/>
-          </a:ln>
-        </p:spPr>
-      </p:sp>
-      <p:sp>
-        <p:nvSpPr>
-          <p:cNvPr id="39" name="Shape 37"/>
-          <p:cNvSpPr/>
-          <p:nvPr/>
-        </p:nvSpPr>
-        <p:spPr>
-          <a:xfrm>
-            <a:off x="2023872" y="4169664"/>
+              <a:t>e</a:t>
+            </a:r>
+            <a:endParaRPr lang="en-US" sz="900" dirty="0"/>
+          </a:p>
+        </p:txBody>
+      </p:sp>
+      <p:sp>
+        <p:nvSpPr>
+          <p:cNvPr id="40" name="Shape 38"/>
+          <p:cNvSpPr/>
+          <p:nvPr/>
+        </p:nvSpPr>
+        <p:spPr>
+          <a:xfrm>
+            <a:off x="3942207" y="4169664"/>
             <a:ext cx="685800" cy="475488"/>
           </a:xfrm>
           <a:prstGeom prst="rect">
@@ -15614,13 +15602,13 @@
       </p:sp>
       <p:sp>
         <p:nvSpPr>
-          <p:cNvPr id="40" name="Text 38"/>
-          <p:cNvSpPr/>
-          <p:nvPr/>
-        </p:nvSpPr>
-        <p:spPr>
-          <a:xfrm>
-            <a:off x="2023872" y="4169664"/>
+          <p:cNvPr id="41" name="Text 39"/>
+          <p:cNvSpPr/>
+          <p:nvPr/>
+        </p:nvSpPr>
+        <p:spPr>
+          <a:xfrm>
+            <a:off x="3942207" y="4169664"/>
             <a:ext cx="685800" cy="475488"/>
           </a:xfrm>
           <a:prstGeom prst="rect">
@@ -15645,7 +15633,7 @@
                 <a:ea typeface="Trebuchet MS" pitchFamily="34" charset="-122"/>
                 <a:cs typeface="Trebuchet MS" pitchFamily="34" charset="-120"/>
               </a:rPr>
-              <a:t>r</a:t>
+              <a:t>b</a:t>
             </a:r>
             <a:endParaRPr lang="en-US" sz="900" dirty="0"/>
           </a:p>
@@ -15653,13 +15641,13 @@
       </p:sp>
       <p:sp>
         <p:nvSpPr>
-          <p:cNvPr id="41" name="Shape 39"/>
-          <p:cNvSpPr/>
-          <p:nvPr/>
-        </p:nvSpPr>
-        <p:spPr>
-          <a:xfrm>
-            <a:off x="2831592" y="4169664"/>
+          <p:cNvPr id="42" name="Shape 40"/>
+          <p:cNvSpPr/>
+          <p:nvPr/>
+        </p:nvSpPr>
+        <p:spPr>
+          <a:xfrm>
+            <a:off x="4850892" y="4169664"/>
             <a:ext cx="685800" cy="475488"/>
           </a:xfrm>
           <a:prstGeom prst="rect">
@@ -15680,13 +15668,13 @@
       </p:sp>
       <p:sp>
         <p:nvSpPr>
-          <p:cNvPr id="42" name="Text 40"/>
-          <p:cNvSpPr/>
-          <p:nvPr/>
-        </p:nvSpPr>
-        <p:spPr>
-          <a:xfrm>
-            <a:off x="2831592" y="4169664"/>
+          <p:cNvPr id="43" name="Text 41"/>
+          <p:cNvSpPr/>
+          <p:nvPr/>
+        </p:nvSpPr>
+        <p:spPr>
+          <a:xfrm>
+            <a:off x="4850892" y="4169664"/>
             <a:ext cx="685800" cy="475488"/>
           </a:xfrm>
           <a:prstGeom prst="rect">
@@ -15711,7 +15699,7 @@
                 <a:ea typeface="Trebuchet MS" pitchFamily="34" charset="-122"/>
                 <a:cs typeface="Trebuchet MS" pitchFamily="34" charset="-120"/>
               </a:rPr>
-              <a:t>e</a:t>
+              <a:t>ui</a:t>
             </a:r>
             <a:endParaRPr lang="en-US" sz="900" dirty="0"/>
           </a:p>
@@ -15719,13 +15707,13 @@
       </p:sp>
       <p:sp>
         <p:nvSpPr>
-          <p:cNvPr id="43" name="Shape 41"/>
-          <p:cNvSpPr/>
-          <p:nvPr/>
-        </p:nvSpPr>
-        <p:spPr>
-          <a:xfrm>
-            <a:off x="3639312" y="4169664"/>
+          <p:cNvPr id="44" name="Shape 42"/>
+          <p:cNvSpPr/>
+          <p:nvPr/>
+        </p:nvSpPr>
+        <p:spPr>
+          <a:xfrm>
+            <a:off x="5759577" y="4169664"/>
             <a:ext cx="685800" cy="475488"/>
           </a:xfrm>
           <a:prstGeom prst="rect">
@@ -15746,13 +15734,13 @@
       </p:sp>
       <p:sp>
         <p:nvSpPr>
-          <p:cNvPr id="44" name="Text 42"/>
-          <p:cNvSpPr/>
-          <p:nvPr/>
-        </p:nvSpPr>
-        <p:spPr>
-          <a:xfrm>
-            <a:off x="3639312" y="4169664"/>
+          <p:cNvPr id="45" name="Text 43"/>
+          <p:cNvSpPr/>
+          <p:nvPr/>
+        </p:nvSpPr>
+        <p:spPr>
+          <a:xfrm>
+            <a:off x="5759577" y="4169664"/>
             <a:ext cx="685800" cy="475488"/>
           </a:xfrm>
           <a:prstGeom prst="rect">
@@ -15777,7 +15765,7 @@
                 <a:ea typeface="Trebuchet MS" pitchFamily="34" charset="-122"/>
                 <a:cs typeface="Trebuchet MS" pitchFamily="34" charset="-120"/>
               </a:rPr>
-              <a:t>b</a:t>
+              <a:t>l</a:t>
             </a:r>
             <a:endParaRPr lang="en-US" sz="900" dirty="0"/>
           </a:p>
@@ -15785,13 +15773,13 @@
       </p:sp>
       <p:sp>
         <p:nvSpPr>
-          <p:cNvPr id="45" name="Shape 43"/>
-          <p:cNvSpPr/>
-          <p:nvPr/>
-        </p:nvSpPr>
-        <p:spPr>
-          <a:xfrm>
-            <a:off x="4447032" y="4169664"/>
+          <p:cNvPr id="46" name="Shape 44"/>
+          <p:cNvSpPr/>
+          <p:nvPr/>
+        </p:nvSpPr>
+        <p:spPr>
+          <a:xfrm>
+            <a:off x="6668262" y="4169664"/>
             <a:ext cx="685800" cy="475488"/>
           </a:xfrm>
           <a:prstGeom prst="rect">
@@ -15812,13 +15800,13 @@
       </p:sp>
       <p:sp>
         <p:nvSpPr>
-          <p:cNvPr id="46" name="Text 44"/>
-          <p:cNvSpPr/>
-          <p:nvPr/>
-        </p:nvSpPr>
-        <p:spPr>
-          <a:xfrm>
-            <a:off x="4447032" y="4169664"/>
+          <p:cNvPr id="47" name="Text 45"/>
+          <p:cNvSpPr/>
+          <p:nvPr/>
+        </p:nvSpPr>
+        <p:spPr>
+          <a:xfrm>
+            <a:off x="6668262" y="4169664"/>
             <a:ext cx="685800" cy="475488"/>
           </a:xfrm>
           <a:prstGeom prst="rect">
@@ -15843,7 +15831,7 @@
                 <a:ea typeface="Trebuchet MS" pitchFamily="34" charset="-122"/>
                 <a:cs typeface="Trebuchet MS" pitchFamily="34" charset="-120"/>
               </a:rPr>
-              <a:t>ui</a:t>
+              <a:t>d</a:t>
             </a:r>
             <a:endParaRPr lang="en-US" sz="900" dirty="0"/>
           </a:p>
@@ -15851,13 +15839,13 @@
       </p:sp>
       <p:sp>
         <p:nvSpPr>
-          <p:cNvPr id="47" name="Shape 45"/>
-          <p:cNvSpPr/>
-          <p:nvPr/>
-        </p:nvSpPr>
-        <p:spPr>
-          <a:xfrm>
-            <a:off x="5254752" y="4169664"/>
+          <p:cNvPr id="48" name="Shape 46"/>
+          <p:cNvSpPr/>
+          <p:nvPr/>
+        </p:nvSpPr>
+        <p:spPr>
+          <a:xfrm>
+            <a:off x="7576947" y="4169664"/>
             <a:ext cx="685800" cy="475488"/>
           </a:xfrm>
           <a:prstGeom prst="rect">
@@ -15878,13 +15866,13 @@
       </p:sp>
       <p:sp>
         <p:nvSpPr>
-          <p:cNvPr id="48" name="Text 46"/>
-          <p:cNvSpPr/>
-          <p:nvPr/>
-        </p:nvSpPr>
-        <p:spPr>
-          <a:xfrm>
-            <a:off x="5254752" y="4169664"/>
+          <p:cNvPr id="49" name="Text 47"/>
+          <p:cNvSpPr/>
+          <p:nvPr/>
+        </p:nvSpPr>
+        <p:spPr>
+          <a:xfrm>
+            <a:off x="7576947" y="4169664"/>
             <a:ext cx="685800" cy="475488"/>
           </a:xfrm>
           <a:prstGeom prst="rect">
@@ -15909,205 +15897,7 @@
                 <a:ea typeface="Trebuchet MS" pitchFamily="34" charset="-122"/>
                 <a:cs typeface="Trebuchet MS" pitchFamily="34" charset="-120"/>
               </a:rPr>
-              <a:t>l</a:t>
-            </a:r>
-            <a:endParaRPr lang="en-US" sz="900" dirty="0"/>
-          </a:p>
-        </p:txBody>
-      </p:sp>
-      <p:sp>
-        <p:nvSpPr>
-          <p:cNvPr id="49" name="Shape 47"/>
-          <p:cNvSpPr/>
-          <p:nvPr/>
-        </p:nvSpPr>
-        <p:spPr>
-          <a:xfrm>
-            <a:off x="6062472" y="4169664"/>
-            <a:ext cx="685800" cy="475488"/>
-          </a:xfrm>
-          <a:prstGeom prst="rect">
-            <a:avLst>
-              <a:gd name="adj" fmla="val 7692"/>
-            </a:avLst>
-          </a:prstGeom>
-          <a:solidFill>
-            <a:srgbClr val="FFFFFF"/>
-          </a:solidFill>
-          <a:ln w="12700">
-            <a:solidFill>
-              <a:srgbClr val="DB2777"/>
-            </a:solidFill>
-            <a:prstDash val="solid"/>
-          </a:ln>
-        </p:spPr>
-      </p:sp>
-      <p:sp>
-        <p:nvSpPr>
-          <p:cNvPr id="50" name="Text 48"/>
-          <p:cNvSpPr/>
-          <p:nvPr/>
-        </p:nvSpPr>
-        <p:spPr>
-          <a:xfrm>
-            <a:off x="6062472" y="4169664"/>
-            <a:ext cx="685800" cy="475488"/>
-          </a:xfrm>
-          <a:prstGeom prst="rect">
-            <a:avLst/>
-          </a:prstGeom>
-          <a:noFill/>
-          <a:ln/>
-        </p:spPr>
-        <p:txBody>
-          <a:bodyPr wrap="square" lIns="0" tIns="0" rIns="0" bIns="0" rtlCol="0" anchor="ctr"/>
-          <a:lstStyle/>
-          <a:p>
-            <a:pPr algn="ctr" indent="0" marL="0">
-              <a:buNone/>
-            </a:pPr>
-            <a:r>
-              <a:rPr lang="en-US" sz="900" b="1" dirty="0">
-                <a:solidFill>
-                  <a:srgbClr val="9D174D"/>
-                </a:solidFill>
-                <a:latin typeface="Trebuchet MS" pitchFamily="34" charset="0"/>
-                <a:ea typeface="Trebuchet MS" pitchFamily="34" charset="-122"/>
-                <a:cs typeface="Trebuchet MS" pitchFamily="34" charset="-120"/>
-              </a:rPr>
-              <a:t>d</a:t>
-            </a:r>
-            <a:endParaRPr lang="en-US" sz="900" dirty="0"/>
-          </a:p>
-        </p:txBody>
-      </p:sp>
-      <p:sp>
-        <p:nvSpPr>
-          <p:cNvPr id="51" name="Shape 49"/>
-          <p:cNvSpPr/>
-          <p:nvPr/>
-        </p:nvSpPr>
-        <p:spPr>
-          <a:xfrm>
-            <a:off x="6870192" y="4169664"/>
-            <a:ext cx="685800" cy="475488"/>
-          </a:xfrm>
-          <a:prstGeom prst="rect">
-            <a:avLst>
-              <a:gd name="adj" fmla="val 7692"/>
-            </a:avLst>
-          </a:prstGeom>
-          <a:solidFill>
-            <a:srgbClr val="FFFFFF"/>
-          </a:solidFill>
-          <a:ln w="12700">
-            <a:solidFill>
-              <a:srgbClr val="DB2777"/>
-            </a:solidFill>
-            <a:prstDash val="solid"/>
-          </a:ln>
-        </p:spPr>
-      </p:sp>
-      <p:sp>
-        <p:nvSpPr>
-          <p:cNvPr id="52" name="Text 50"/>
-          <p:cNvSpPr/>
-          <p:nvPr/>
-        </p:nvSpPr>
-        <p:spPr>
-          <a:xfrm>
-            <a:off x="6870192" y="4169664"/>
-            <a:ext cx="685800" cy="475488"/>
-          </a:xfrm>
-          <a:prstGeom prst="rect">
-            <a:avLst/>
-          </a:prstGeom>
-          <a:noFill/>
-          <a:ln/>
-        </p:spPr>
-        <p:txBody>
-          <a:bodyPr wrap="square" lIns="0" tIns="0" rIns="0" bIns="0" rtlCol="0" anchor="ctr"/>
-          <a:lstStyle/>
-          <a:p>
-            <a:pPr algn="ctr" indent="0" marL="0">
-              <a:buNone/>
-            </a:pPr>
-            <a:r>
-              <a:rPr lang="en-US" sz="900" b="1" dirty="0">
-                <a:solidFill>
-                  <a:srgbClr val="9D174D"/>
-                </a:solidFill>
-                <a:latin typeface="Trebuchet MS" pitchFamily="34" charset="0"/>
-                <a:ea typeface="Trebuchet MS" pitchFamily="34" charset="-122"/>
-                <a:cs typeface="Trebuchet MS" pitchFamily="34" charset="-120"/>
-              </a:rPr>
-              <a:t>i</a:t>
-            </a:r>
-            <a:endParaRPr lang="en-US" sz="900" dirty="0"/>
-          </a:p>
-        </p:txBody>
-      </p:sp>
-      <p:sp>
-        <p:nvSpPr>
-          <p:cNvPr id="53" name="Shape 51"/>
-          <p:cNvSpPr/>
-          <p:nvPr/>
-        </p:nvSpPr>
-        <p:spPr>
-          <a:xfrm>
-            <a:off x="7677912" y="4169664"/>
-            <a:ext cx="685800" cy="475488"/>
-          </a:xfrm>
-          <a:prstGeom prst="rect">
-            <a:avLst>
-              <a:gd name="adj" fmla="val 7692"/>
-            </a:avLst>
-          </a:prstGeom>
-          <a:solidFill>
-            <a:srgbClr val="FFFFFF"/>
-          </a:solidFill>
-          <a:ln w="12700">
-            <a:solidFill>
-              <a:srgbClr val="DB2777"/>
-            </a:solidFill>
-            <a:prstDash val="solid"/>
-          </a:ln>
-        </p:spPr>
-      </p:sp>
-      <p:sp>
-        <p:nvSpPr>
-          <p:cNvPr id="54" name="Text 52"/>
-          <p:cNvSpPr/>
-          <p:nvPr/>
-        </p:nvSpPr>
-        <p:spPr>
-          <a:xfrm>
-            <a:off x="7677912" y="4169664"/>
-            <a:ext cx="685800" cy="475488"/>
-          </a:xfrm>
-          <a:prstGeom prst="rect">
-            <a:avLst/>
-          </a:prstGeom>
-          <a:noFill/>
-          <a:ln/>
-        </p:spPr>
-        <p:txBody>
-          <a:bodyPr wrap="square" lIns="0" tIns="0" rIns="0" bIns="0" rtlCol="0" anchor="ctr"/>
-          <a:lstStyle/>
-          <a:p>
-            <a:pPr algn="ctr" indent="0" marL="0">
-              <a:buNone/>
-            </a:pPr>
-            <a:r>
-              <a:rPr lang="en-US" sz="900" b="1" dirty="0">
-                <a:solidFill>
-                  <a:srgbClr val="9D174D"/>
-                </a:solidFill>
-                <a:latin typeface="Trebuchet MS" pitchFamily="34" charset="0"/>
-                <a:ea typeface="Trebuchet MS" pitchFamily="34" charset="-122"/>
-                <a:cs typeface="Trebuchet MS" pitchFamily="34" charset="-120"/>
-              </a:rPr>
-              <a:t>ng</a:t>
+              <a:t>s</a:t>
             </a:r>
             <a:endParaRPr lang="en-US" sz="900" dirty="0"/>
           </a:p>
@@ -16681,7 +16471,7 @@
                 <a:ea typeface="Calibri" pitchFamily="34" charset="-122"/>
                 <a:cs typeface="Calibri" pitchFamily="34" charset="-120"/>
               </a:rPr>
-              <a:t>Word Labs  •  wordlabs.app  •  Root: 'build' = to construct or make</a:t>
+              <a:t>Word Labs  •  wordlabs.app  •  Root: 'build' = make by putting parts together</a:t>
             </a:r>
             <a:endParaRPr lang="en-US" sz="800" dirty="0"/>
           </a:p>
@@ -17015,7 +16805,7 @@
                 <a:ea typeface="Trebuchet MS" pitchFamily="34" charset="-122"/>
                 <a:cs typeface="Trebuchet MS" pitchFamily="34" charset="-120"/>
               </a:rPr>
-              <a:t>1</a:t>
+              <a:t>0</a:t>
             </a:r>
             <a:pPr algn="ctr" indent="0" marL="0">
               <a:buNone/>
@@ -17321,7 +17111,7 @@
                 <a:ea typeface="Calibri" pitchFamily="34" charset="-122"/>
                 <a:cs typeface="Calibri" pitchFamily="34" charset="-120"/>
               </a:rPr>
-              <a:t>Word Labs  •  wordlabs.app  •  Root: 'build' = to construct or make</a:t>
+              <a:t>Word Labs  •  wordlabs.app  •  Root: 'build' = make by putting parts together</a:t>
             </a:r>
             <a:endParaRPr lang="en-US" sz="800" dirty="0"/>
           </a:p>
@@ -17433,7 +17223,7 @@
                 <a:ea typeface="Calibri" pitchFamily="34" charset="-122"/>
                 <a:cs typeface="Calibri" pitchFamily="34" charset="-120"/>
               </a:rPr>
-              <a:t>The skilled </a:t>
+              <a:t>The city skyline was full of tall glass </a:t>
             </a:r>
             <a:pPr algn="l" indent="0" marL="0">
               <a:buNone/>
@@ -17450,7 +17240,7 @@
                 <a:ea typeface="Calibri" pitchFamily="34" charset="-122"/>
                 <a:cs typeface="Calibri" pitchFamily="34" charset="-120"/>
               </a:rPr>
-              <a:t>builders</a:t>
+              <a:t>buildings</a:t>
             </a:r>
             <a:pPr algn="l" indent="0" marL="0">
               <a:buNone/>
@@ -17464,7 +17254,7 @@
                 <a:ea typeface="Calibri" pitchFamily="34" charset="-122"/>
                 <a:cs typeface="Calibri" pitchFamily="34" charset="-120"/>
               </a:rPr>
-              <a:t> finished the </a:t>
+              <a:t>. Workers spent months </a:t>
             </a:r>
             <a:pPr algn="l" indent="0" marL="0">
               <a:buNone/>
@@ -17481,7 +17271,7 @@
                 <a:ea typeface="Calibri" pitchFamily="34" charset="-122"/>
                 <a:cs typeface="Calibri" pitchFamily="34" charset="-120"/>
               </a:rPr>
-              <a:t>outbuilding</a:t>
+              <a:t>rebuilding</a:t>
             </a:r>
             <a:pPr algn="l" indent="0" marL="0">
               <a:buNone/>
@@ -17495,7 +17285,7 @@
                 <a:ea typeface="Calibri" pitchFamily="34" charset="-122"/>
                 <a:cs typeface="Calibri" pitchFamily="34" charset="-120"/>
               </a:rPr>
-              <a:t> quickly, but they still needed to </a:t>
+              <a:t> the bridge after the flood. The council worried developers would </a:t>
             </a:r>
             <a:pPr algn="l" indent="0" marL="0">
               <a:buNone/>
@@ -17512,7 +17302,7 @@
                 <a:ea typeface="Calibri" pitchFamily="34" charset="-122"/>
                 <a:cs typeface="Calibri" pitchFamily="34" charset="-120"/>
               </a:rPr>
-              <a:t>rebuild</a:t>
+              <a:t>overbuild</a:t>
             </a:r>
             <a:pPr algn="l" indent="0" marL="0">
               <a:buNone/>
@@ -17526,7 +17316,7 @@
                 <a:ea typeface="Calibri" pitchFamily="34" charset="-122"/>
                 <a:cs typeface="Calibri" pitchFamily="34" charset="-120"/>
               </a:rPr>
-              <a:t> the collapsed fence.</a:t>
+              <a:t> the small town with too many new flats.</a:t>
             </a:r>
             <a:endParaRPr lang="en-US" sz="1800" dirty="0"/>
           </a:p>
@@ -17681,7 +17471,7 @@
                 <a:ea typeface="Trebuchet MS" pitchFamily="34" charset="-122"/>
                 <a:cs typeface="Trebuchet MS" pitchFamily="34" charset="-120"/>
               </a:rPr>
-              <a:t>builders</a:t>
+              <a:t>buildings</a:t>
             </a:r>
             <a:endParaRPr lang="en-US" sz="1400" dirty="0"/>
           </a:p>
@@ -17809,7 +17599,7 @@
                 <a:ea typeface="Trebuchet MS" pitchFamily="34" charset="-122"/>
                 <a:cs typeface="Trebuchet MS" pitchFamily="34" charset="-120"/>
               </a:rPr>
-              <a:t>outbuilding</a:t>
+              <a:t>rebuilding</a:t>
             </a:r>
             <a:endParaRPr lang="en-US" sz="1400" dirty="0"/>
           </a:p>
@@ -17937,7 +17727,7 @@
                 <a:ea typeface="Trebuchet MS" pitchFamily="34" charset="-122"/>
                 <a:cs typeface="Trebuchet MS" pitchFamily="34" charset="-120"/>
               </a:rPr>
-              <a:t>rebuild</a:t>
+              <a:t>overbuild</a:t>
             </a:r>
             <a:endParaRPr lang="en-US" sz="1400" dirty="0"/>
           </a:p>
@@ -18268,7 +18058,7 @@
                 <a:ea typeface="Calibri" pitchFamily="34" charset="-122"/>
                 <a:cs typeface="Calibri" pitchFamily="34" charset="-120"/>
               </a:rPr>
-              <a:t>Word Labs  •  wordlabs.app  •  Root: 'build' = to construct or make</a:t>
+              <a:t>Word Labs  •  wordlabs.app  •  Root: 'build' = make by putting parts together</a:t>
             </a:r>
             <a:endParaRPr lang="en-US" sz="800" dirty="0"/>
           </a:p>
@@ -18407,7 +18197,7 @@
                 <a:ea typeface="Trebuchet MS" pitchFamily="34" charset="-122"/>
                 <a:cs typeface="Trebuchet MS" pitchFamily="34" charset="-120"/>
               </a:rPr>
-              <a:t>builders</a:t>
+              <a:t>buildings</a:t>
             </a:r>
             <a:endParaRPr lang="en-US" sz="2800" dirty="0"/>
           </a:p>
@@ -19095,7 +18885,7 @@
                 <a:ea typeface="Calibri" pitchFamily="34" charset="-122"/>
                 <a:cs typeface="Calibri" pitchFamily="34" charset="-120"/>
               </a:rPr>
-              <a:t>Word Labs  •  wordlabs.app  •  Root: 'build' = to construct or make</a:t>
+              <a:t>Word Labs  •  wordlabs.app  •  Root: 'build' = make by putting parts together</a:t>
             </a:r>
             <a:endParaRPr lang="en-US" sz="800" dirty="0"/>
           </a:p>
@@ -19234,7 +19024,7 @@
                 <a:ea typeface="Trebuchet MS" pitchFamily="34" charset="-122"/>
                 <a:cs typeface="Trebuchet MS" pitchFamily="34" charset="-120"/>
               </a:rPr>
-              <a:t>builders</a:t>
+              <a:t>buildings</a:t>
             </a:r>
             <a:endParaRPr lang="en-US" sz="2800" dirty="0"/>
           </a:p>
@@ -19412,7 +19202,7 @@
                 <a:ea typeface="Calibri" pitchFamily="34" charset="-122"/>
                 <a:cs typeface="Calibri" pitchFamily="34" charset="-120"/>
               </a:rPr>
-              <a:t>to construct or make</a:t>
+              <a:t>make by putting parts together</a:t>
             </a:r>
             <a:endParaRPr lang="en-US" sz="850" dirty="0"/>
           </a:p>
@@ -19485,7 +19275,7 @@
                 <a:ea typeface="Trebuchet MS" pitchFamily="34" charset="-122"/>
                 <a:cs typeface="Trebuchet MS" pitchFamily="34" charset="-120"/>
               </a:rPr>
-              <a:t>er</a:t>
+              <a:t>ing</a:t>
             </a:r>
             <a:endParaRPr lang="en-US" sz="1300" dirty="0"/>
           </a:p>
@@ -19524,7 +19314,7 @@
                 <a:ea typeface="Calibri" pitchFamily="34" charset="-122"/>
                 <a:cs typeface="Calibri" pitchFamily="34" charset="-120"/>
               </a:rPr>
-              <a:t>a person who does something</a:t>
+              <a:t>happening now</a:t>
             </a:r>
             <a:endParaRPr lang="en-US" sz="850" dirty="0"/>
           </a:p>
@@ -19636,7 +19426,7 @@
                 <a:ea typeface="Calibri" pitchFamily="34" charset="-122"/>
                 <a:cs typeface="Calibri" pitchFamily="34" charset="-120"/>
               </a:rPr>
-              <a:t>more than one</a:t>
+              <a:t>plural or present tense</a:t>
             </a:r>
             <a:endParaRPr lang="en-US" sz="850" dirty="0"/>
           </a:p>
@@ -20192,7 +19982,7 @@
                 <a:ea typeface="Calibri" pitchFamily="34" charset="-122"/>
                 <a:cs typeface="Calibri" pitchFamily="34" charset="-120"/>
               </a:rPr>
-              <a:t>Word Labs  •  wordlabs.app  •  Root: 'build' = to construct or make</a:t>
+              <a:t>Word Labs  •  wordlabs.app  •  Root: 'build' = make by putting parts together</a:t>
             </a:r>
             <a:endParaRPr lang="en-US" sz="800" dirty="0"/>
           </a:p>
@@ -20331,7 +20121,7 @@
                 <a:ea typeface="Trebuchet MS" pitchFamily="34" charset="-122"/>
                 <a:cs typeface="Trebuchet MS" pitchFamily="34" charset="-120"/>
               </a:rPr>
-              <a:t>builders</a:t>
+              <a:t>buildings</a:t>
             </a:r>
             <a:endParaRPr lang="en-US" sz="2800" dirty="0"/>
           </a:p>
@@ -20509,7 +20299,7 @@
                 <a:ea typeface="Calibri" pitchFamily="34" charset="-122"/>
                 <a:cs typeface="Calibri" pitchFamily="34" charset="-120"/>
               </a:rPr>
-              <a:t>to construct or make</a:t>
+              <a:t>make by putting parts together</a:t>
             </a:r>
             <a:endParaRPr lang="en-US" sz="850" dirty="0"/>
           </a:p>
@@ -20582,7 +20372,7 @@
                 <a:ea typeface="Trebuchet MS" pitchFamily="34" charset="-122"/>
                 <a:cs typeface="Trebuchet MS" pitchFamily="34" charset="-120"/>
               </a:rPr>
-              <a:t>er</a:t>
+              <a:t>ing</a:t>
             </a:r>
             <a:endParaRPr lang="en-US" sz="1300" dirty="0"/>
           </a:p>
@@ -20621,7 +20411,7 @@
                 <a:ea typeface="Calibri" pitchFamily="34" charset="-122"/>
                 <a:cs typeface="Calibri" pitchFamily="34" charset="-120"/>
               </a:rPr>
-              <a:t>a person who does something</a:t>
+              <a:t>happening now</a:t>
             </a:r>
             <a:endParaRPr lang="en-US" sz="850" dirty="0"/>
           </a:p>
@@ -20733,7 +20523,7 @@
                 <a:ea typeface="Calibri" pitchFamily="34" charset="-122"/>
                 <a:cs typeface="Calibri" pitchFamily="34" charset="-120"/>
               </a:rPr>
-              <a:t>more than one</a:t>
+              <a:t>plural or present tense</a:t>
             </a:r>
             <a:endParaRPr lang="en-US" sz="850" dirty="0"/>
           </a:p>
@@ -20892,7 +20682,7 @@
                 <a:ea typeface="Trebuchet MS" pitchFamily="34" charset="-122"/>
                 <a:cs typeface="Trebuchet MS" pitchFamily="34" charset="-120"/>
               </a:rPr>
-              <a:t>buil</a:t>
+              <a:t>build</a:t>
             </a:r>
             <a:endParaRPr lang="en-US" sz="1400" dirty="0"/>
           </a:p>
@@ -20997,7 +20787,7 @@
                 <a:ea typeface="Trebuchet MS" pitchFamily="34" charset="-122"/>
                 <a:cs typeface="Trebuchet MS" pitchFamily="34" charset="-120"/>
               </a:rPr>
-              <a:t>ders</a:t>
+              <a:t>ings</a:t>
             </a:r>
             <a:endParaRPr lang="en-US" sz="1400" dirty="0"/>
           </a:p>
@@ -21421,7 +21211,7 @@
                 <a:ea typeface="Calibri" pitchFamily="34" charset="-122"/>
                 <a:cs typeface="Calibri" pitchFamily="34" charset="-120"/>
               </a:rPr>
-              <a:t>Word Labs  •  wordlabs.app  •  Root: 'build' = to construct or make</a:t>
+              <a:t>Word Labs  •  wordlabs.app  •  Root: 'build' = make by putting parts together</a:t>
             </a:r>
             <a:endParaRPr lang="en-US" sz="800" dirty="0"/>
           </a:p>
@@ -21560,7 +21350,7 @@
                 <a:ea typeface="Trebuchet MS" pitchFamily="34" charset="-122"/>
                 <a:cs typeface="Trebuchet MS" pitchFamily="34" charset="-120"/>
               </a:rPr>
-              <a:t>builders</a:t>
+              <a:t>buildings</a:t>
             </a:r>
             <a:endParaRPr lang="en-US" sz="2800" dirty="0"/>
           </a:p>
@@ -21738,7 +21528,7 @@
                 <a:ea typeface="Calibri" pitchFamily="34" charset="-122"/>
                 <a:cs typeface="Calibri" pitchFamily="34" charset="-120"/>
               </a:rPr>
-              <a:t>to construct or make</a:t>
+              <a:t>make by putting parts together</a:t>
             </a:r>
             <a:endParaRPr lang="en-US" sz="850" dirty="0"/>
           </a:p>
@@ -21811,7 +21601,7 @@
                 <a:ea typeface="Trebuchet MS" pitchFamily="34" charset="-122"/>
                 <a:cs typeface="Trebuchet MS" pitchFamily="34" charset="-120"/>
               </a:rPr>
-              <a:t>er</a:t>
+              <a:t>ing</a:t>
             </a:r>
             <a:endParaRPr lang="en-US" sz="1300" dirty="0"/>
           </a:p>
@@ -21850,7 +21640,7 @@
                 <a:ea typeface="Calibri" pitchFamily="34" charset="-122"/>
                 <a:cs typeface="Calibri" pitchFamily="34" charset="-120"/>
               </a:rPr>
-              <a:t>a person who does something</a:t>
+              <a:t>happening now</a:t>
             </a:r>
             <a:endParaRPr lang="en-US" sz="850" dirty="0"/>
           </a:p>
@@ -21962,7 +21752,7 @@
                 <a:ea typeface="Calibri" pitchFamily="34" charset="-122"/>
                 <a:cs typeface="Calibri" pitchFamily="34" charset="-120"/>
               </a:rPr>
-              <a:t>more than one</a:t>
+              <a:t>plural or present tense</a:t>
             </a:r>
             <a:endParaRPr lang="en-US" sz="850" dirty="0"/>
           </a:p>
@@ -22121,7 +21911,7 @@
                 <a:ea typeface="Trebuchet MS" pitchFamily="34" charset="-122"/>
                 <a:cs typeface="Trebuchet MS" pitchFamily="34" charset="-120"/>
               </a:rPr>
-              <a:t>buil</a:t>
+              <a:t>build</a:t>
             </a:r>
             <a:endParaRPr lang="en-US" sz="1400" dirty="0"/>
           </a:p>
@@ -22226,7 +22016,7 @@
                 <a:ea typeface="Trebuchet MS" pitchFamily="34" charset="-122"/>
                 <a:cs typeface="Trebuchet MS" pitchFamily="34" charset="-120"/>
               </a:rPr>
-              <a:t>ders</a:t>
+              <a:t>ings</a:t>
             </a:r>
             <a:endParaRPr lang="en-US" sz="1400" dirty="0"/>
           </a:p>
@@ -22333,7 +22123,7 @@
         </p:nvSpPr>
         <p:spPr>
           <a:xfrm>
-            <a:off x="2254649" y="4169664"/>
+            <a:off x="2124837" y="4169664"/>
             <a:ext cx="685800" cy="475488"/>
           </a:xfrm>
           <a:prstGeom prst="rect">
@@ -22360,7 +22150,7 @@
         </p:nvSpPr>
         <p:spPr>
           <a:xfrm>
-            <a:off x="2254649" y="4169664"/>
+            <a:off x="2124837" y="4169664"/>
             <a:ext cx="685800" cy="475488"/>
           </a:xfrm>
           <a:prstGeom prst="rect">
@@ -22399,7 +22189,7 @@
         </p:nvSpPr>
         <p:spPr>
           <a:xfrm>
-            <a:off x="3293146" y="4169664"/>
+            <a:off x="3033522" y="4169664"/>
             <a:ext cx="685800" cy="475488"/>
           </a:xfrm>
           <a:prstGeom prst="rect">
@@ -22426,7 +22216,7 @@
         </p:nvSpPr>
         <p:spPr>
           <a:xfrm>
-            <a:off x="3293146" y="4169664"/>
+            <a:off x="3033522" y="4169664"/>
             <a:ext cx="685800" cy="475488"/>
           </a:xfrm>
           <a:prstGeom prst="rect">
@@ -22465,7 +22255,7 @@
         </p:nvSpPr>
         <p:spPr>
           <a:xfrm>
-            <a:off x="4331643" y="4169664"/>
+            <a:off x="3942207" y="4169664"/>
             <a:ext cx="685800" cy="475488"/>
           </a:xfrm>
           <a:prstGeom prst="rect">
@@ -22492,7 +22282,7 @@
         </p:nvSpPr>
         <p:spPr>
           <a:xfrm>
-            <a:off x="4331643" y="4169664"/>
+            <a:off x="3942207" y="4169664"/>
             <a:ext cx="685800" cy="475488"/>
           </a:xfrm>
           <a:prstGeom prst="rect">
@@ -22531,7 +22321,7 @@
         </p:nvSpPr>
         <p:spPr>
           <a:xfrm>
-            <a:off x="5370141" y="4169664"/>
+            <a:off x="4850892" y="4169664"/>
             <a:ext cx="685800" cy="475488"/>
           </a:xfrm>
           <a:prstGeom prst="rect">
@@ -22558,7 +22348,7 @@
         </p:nvSpPr>
         <p:spPr>
           <a:xfrm>
-            <a:off x="5370141" y="4169664"/>
+            <a:off x="4850892" y="4169664"/>
             <a:ext cx="685800" cy="475488"/>
           </a:xfrm>
           <a:prstGeom prst="rect">
@@ -22597,7 +22387,7 @@
         </p:nvSpPr>
         <p:spPr>
           <a:xfrm>
-            <a:off x="6408638" y="4169664"/>
+            <a:off x="5759577" y="4169664"/>
             <a:ext cx="685800" cy="475488"/>
           </a:xfrm>
           <a:prstGeom prst="rect">
@@ -22624,7 +22414,7 @@
         </p:nvSpPr>
         <p:spPr>
           <a:xfrm>
-            <a:off x="6408638" y="4169664"/>
+            <a:off x="5759577" y="4169664"/>
             <a:ext cx="685800" cy="475488"/>
           </a:xfrm>
           <a:prstGeom prst="rect">
@@ -22649,7 +22439,7 @@
                 <a:ea typeface="Trebuchet MS" pitchFamily="34" charset="-122"/>
                 <a:cs typeface="Trebuchet MS" pitchFamily="34" charset="-120"/>
               </a:rPr>
-              <a:t>er</a:t>
+              <a:t>i</a:t>
             </a:r>
             <a:endParaRPr lang="en-US" sz="900" dirty="0"/>
           </a:p>
@@ -22663,7 +22453,7 @@
         </p:nvSpPr>
         <p:spPr>
           <a:xfrm>
-            <a:off x="7447135" y="4169664"/>
+            <a:off x="6668262" y="4169664"/>
             <a:ext cx="685800" cy="475488"/>
           </a:xfrm>
           <a:prstGeom prst="rect">
@@ -22690,7 +22480,73 @@
         </p:nvSpPr>
         <p:spPr>
           <a:xfrm>
-            <a:off x="7447135" y="4169664"/>
+            <a:off x="6668262" y="4169664"/>
+            <a:ext cx="685800" cy="475488"/>
+          </a:xfrm>
+          <a:prstGeom prst="rect">
+            <a:avLst/>
+          </a:prstGeom>
+          <a:noFill/>
+          <a:ln/>
+        </p:spPr>
+        <p:txBody>
+          <a:bodyPr wrap="square" lIns="0" tIns="0" rIns="0" bIns="0" rtlCol="0" anchor="ctr"/>
+          <a:lstStyle/>
+          <a:p>
+            <a:pPr algn="ctr" indent="0" marL="0">
+              <a:buNone/>
+            </a:pPr>
+            <a:r>
+              <a:rPr lang="en-US" sz="900" b="1" dirty="0">
+                <a:solidFill>
+                  <a:srgbClr val="9D174D"/>
+                </a:solidFill>
+                <a:latin typeface="Trebuchet MS" pitchFamily="34" charset="0"/>
+                <a:ea typeface="Trebuchet MS" pitchFamily="34" charset="-122"/>
+                <a:cs typeface="Trebuchet MS" pitchFamily="34" charset="-120"/>
+              </a:rPr>
+              <a:t>ng</a:t>
+            </a:r>
+            <a:endParaRPr lang="en-US" sz="900" dirty="0"/>
+          </a:p>
+        </p:txBody>
+      </p:sp>
+      <p:sp>
+        <p:nvSpPr>
+          <p:cNvPr id="48" name="Shape 46"/>
+          <p:cNvSpPr/>
+          <p:nvPr/>
+        </p:nvSpPr>
+        <p:spPr>
+          <a:xfrm>
+            <a:off x="7576947" y="4169664"/>
+            <a:ext cx="685800" cy="475488"/>
+          </a:xfrm>
+          <a:prstGeom prst="rect">
+            <a:avLst>
+              <a:gd name="adj" fmla="val 7692"/>
+            </a:avLst>
+          </a:prstGeom>
+          <a:solidFill>
+            <a:srgbClr val="FFFFFF"/>
+          </a:solidFill>
+          <a:ln w="12700">
+            <a:solidFill>
+              <a:srgbClr val="DB2777"/>
+            </a:solidFill>
+            <a:prstDash val="solid"/>
+          </a:ln>
+        </p:spPr>
+      </p:sp>
+      <p:sp>
+        <p:nvSpPr>
+          <p:cNvPr id="49" name="Text 47"/>
+          <p:cNvSpPr/>
+          <p:nvPr/>
+        </p:nvSpPr>
+        <p:spPr>
+          <a:xfrm>
+            <a:off x="7576947" y="4169664"/>
             <a:ext cx="685800" cy="475488"/>
           </a:xfrm>
           <a:prstGeom prst="rect">
@@ -23007,7 +22863,7 @@
                 <a:ea typeface="Calibri" pitchFamily="34" charset="-122"/>
                 <a:cs typeface="Calibri" pitchFamily="34" charset="-120"/>
               </a:rPr>
-              <a:t>Word Labs  •  wordlabs.app  •  Root: 'build' = to construct or make</a:t>
+              <a:t>Word Labs  •  wordlabs.app  •  Root: 'build' = make by putting parts together</a:t>
             </a:r>
             <a:endParaRPr lang="en-US" sz="800" dirty="0"/>
           </a:p>
@@ -23146,7 +23002,7 @@
                 <a:ea typeface="Trebuchet MS" pitchFamily="34" charset="-122"/>
                 <a:cs typeface="Trebuchet MS" pitchFamily="34" charset="-120"/>
               </a:rPr>
-              <a:t>outbuilding</a:t>
+              <a:t>rebuilding</a:t>
             </a:r>
             <a:endParaRPr lang="en-US" sz="2800" dirty="0"/>
           </a:p>
@@ -23834,7 +23690,7 @@
                 <a:ea typeface="Calibri" pitchFamily="34" charset="-122"/>
                 <a:cs typeface="Calibri" pitchFamily="34" charset="-120"/>
               </a:rPr>
-              <a:t>Word Labs  •  wordlabs.app  •  Root: 'build' = to construct or make</a:t>
+              <a:t>Word Labs  •  wordlabs.app  •  Root: 'build' = make by putting parts together</a:t>
             </a:r>
             <a:endParaRPr lang="en-US" sz="800" dirty="0"/>
           </a:p>
@@ -23973,7 +23829,7 @@
                 <a:ea typeface="Trebuchet MS" pitchFamily="34" charset="-122"/>
                 <a:cs typeface="Trebuchet MS" pitchFamily="34" charset="-120"/>
               </a:rPr>
-              <a:t>outbuilding</a:t>
+              <a:t>rebuilding</a:t>
             </a:r>
             <a:endParaRPr lang="en-US" sz="2800" dirty="0"/>
           </a:p>
@@ -24112,7 +23968,7 @@
                 <a:ea typeface="Trebuchet MS" pitchFamily="34" charset="-122"/>
                 <a:cs typeface="Trebuchet MS" pitchFamily="34" charset="-120"/>
               </a:rPr>
-              <a:t>out</a:t>
+              <a:t>re</a:t>
             </a:r>
             <a:endParaRPr lang="en-US" sz="1300" dirty="0"/>
           </a:p>
@@ -24151,7 +24007,7 @@
                 <a:ea typeface="Calibri" pitchFamily="34" charset="-122"/>
                 <a:cs typeface="Calibri" pitchFamily="34" charset="-120"/>
               </a:rPr>
-              <a:t>outside or separate from</a:t>
+              <a:t>again</a:t>
             </a:r>
             <a:endParaRPr lang="en-US" sz="850" dirty="0"/>
           </a:p>
@@ -24263,7 +24119,7 @@
                 <a:ea typeface="Calibri" pitchFamily="34" charset="-122"/>
                 <a:cs typeface="Calibri" pitchFamily="34" charset="-120"/>
               </a:rPr>
-              <a:t>to construct or make</a:t>
+              <a:t>make by putting parts together</a:t>
             </a:r>
             <a:endParaRPr lang="en-US" sz="850" dirty="0"/>
           </a:p>
@@ -24375,7 +24231,7 @@
                 <a:ea typeface="Calibri" pitchFamily="34" charset="-122"/>
                 <a:cs typeface="Calibri" pitchFamily="34" charset="-120"/>
               </a:rPr>
-              <a:t>a place or result of an action</a:t>
+              <a:t>happening now</a:t>
             </a:r>
             <a:endParaRPr lang="en-US" sz="850" dirty="0"/>
           </a:p>
@@ -24931,7 +24787,7 @@
                 <a:ea typeface="Calibri" pitchFamily="34" charset="-122"/>
                 <a:cs typeface="Calibri" pitchFamily="34" charset="-120"/>
               </a:rPr>
-              <a:t>Word Labs  •  wordlabs.app  •  Root: 'build' = to construct or make</a:t>
+              <a:t>Word Labs  •  wordlabs.app  •  Root: 'build' = make by putting parts together</a:t>
             </a:r>
             <a:endParaRPr lang="en-US" sz="800" dirty="0"/>
           </a:p>
@@ -25004,7 +24860,7 @@
                 <a:ea typeface="Trebuchet MS" pitchFamily="34" charset="-122"/>
                 <a:cs typeface="Trebuchet MS" pitchFamily="34" charset="-120"/>
               </a:rPr>
-              <a:t>We are learning that the root 'build' means 'to construct or make'.</a:t>
+              <a:t>We are learning that the root 'build' means 'make by putting parts together'.</a:t>
             </a:r>
             <a:endParaRPr lang="en-US" sz="2000" dirty="0"/>
           </a:p>
@@ -25650,7 +25506,7 @@
                 <a:ea typeface="Calibri" pitchFamily="34" charset="-122"/>
                 <a:cs typeface="Calibri" pitchFamily="34" charset="-120"/>
               </a:rPr>
-              <a:t>Word Labs  •  wordlabs.app  •  Root: 'build' = to construct or make</a:t>
+              <a:t>Word Labs  •  wordlabs.app  •  Root: 'build' = make by putting parts together</a:t>
             </a:r>
             <a:endParaRPr lang="en-US" sz="800" dirty="0"/>
           </a:p>
@@ -25789,7 +25645,7 @@
                 <a:ea typeface="Trebuchet MS" pitchFamily="34" charset="-122"/>
                 <a:cs typeface="Trebuchet MS" pitchFamily="34" charset="-120"/>
               </a:rPr>
-              <a:t>outbuilding</a:t>
+              <a:t>rebuilding</a:t>
             </a:r>
             <a:endParaRPr lang="en-US" sz="2800" dirty="0"/>
           </a:p>
@@ -25928,7 +25784,7 @@
                 <a:ea typeface="Trebuchet MS" pitchFamily="34" charset="-122"/>
                 <a:cs typeface="Trebuchet MS" pitchFamily="34" charset="-120"/>
               </a:rPr>
-              <a:t>out</a:t>
+              <a:t>re</a:t>
             </a:r>
             <a:endParaRPr lang="en-US" sz="1300" dirty="0"/>
           </a:p>
@@ -25967,7 +25823,7 @@
                 <a:ea typeface="Calibri" pitchFamily="34" charset="-122"/>
                 <a:cs typeface="Calibri" pitchFamily="34" charset="-120"/>
               </a:rPr>
-              <a:t>outside or separate from</a:t>
+              <a:t>again</a:t>
             </a:r>
             <a:endParaRPr lang="en-US" sz="850" dirty="0"/>
           </a:p>
@@ -26079,7 +25935,7 @@
                 <a:ea typeface="Calibri" pitchFamily="34" charset="-122"/>
                 <a:cs typeface="Calibri" pitchFamily="34" charset="-120"/>
               </a:rPr>
-              <a:t>to construct or make</a:t>
+              <a:t>make by putting parts together</a:t>
             </a:r>
             <a:endParaRPr lang="en-US" sz="850" dirty="0"/>
           </a:p>
@@ -26191,7 +26047,7 @@
                 <a:ea typeface="Calibri" pitchFamily="34" charset="-122"/>
                 <a:cs typeface="Calibri" pitchFamily="34" charset="-120"/>
               </a:rPr>
-              <a:t>a place or result of an action</a:t>
+              <a:t>happening now</a:t>
             </a:r>
             <a:endParaRPr lang="en-US" sz="850" dirty="0"/>
           </a:p>
@@ -26350,7 +26206,7 @@
                 <a:ea typeface="Trebuchet MS" pitchFamily="34" charset="-122"/>
                 <a:cs typeface="Trebuchet MS" pitchFamily="34" charset="-120"/>
               </a:rPr>
-              <a:t>out</a:t>
+              <a:t>re</a:t>
             </a:r>
             <a:endParaRPr lang="en-US" sz="1400" dirty="0"/>
           </a:p>
@@ -26455,7 +26311,7 @@
                 <a:ea typeface="Trebuchet MS" pitchFamily="34" charset="-122"/>
                 <a:cs typeface="Trebuchet MS" pitchFamily="34" charset="-120"/>
               </a:rPr>
-              <a:t>buil</a:t>
+              <a:t>build</a:t>
             </a:r>
             <a:endParaRPr lang="en-US" sz="1400" dirty="0"/>
           </a:p>
@@ -26560,7 +26416,7 @@
                 <a:ea typeface="Trebuchet MS" pitchFamily="34" charset="-122"/>
                 <a:cs typeface="Trebuchet MS" pitchFamily="34" charset="-120"/>
               </a:rPr>
-              <a:t>ding</a:t>
+              <a:t>ing</a:t>
             </a:r>
             <a:endParaRPr lang="en-US" sz="1400" dirty="0"/>
           </a:p>
@@ -26984,7 +26840,7 @@
                 <a:ea typeface="Calibri" pitchFamily="34" charset="-122"/>
                 <a:cs typeface="Calibri" pitchFamily="34" charset="-120"/>
               </a:rPr>
-              <a:t>Word Labs  •  wordlabs.app  •  Root: 'build' = to construct or make</a:t>
+              <a:t>Word Labs  •  wordlabs.app  •  Root: 'build' = make by putting parts together</a:t>
             </a:r>
             <a:endParaRPr lang="en-US" sz="800" dirty="0"/>
           </a:p>
@@ -27123,7 +26979,7 @@
                 <a:ea typeface="Trebuchet MS" pitchFamily="34" charset="-122"/>
                 <a:cs typeface="Trebuchet MS" pitchFamily="34" charset="-120"/>
               </a:rPr>
-              <a:t>outbuilding</a:t>
+              <a:t>rebuilding</a:t>
             </a:r>
             <a:endParaRPr lang="en-US" sz="2800" dirty="0"/>
           </a:p>
@@ -27262,7 +27118,7 @@
                 <a:ea typeface="Trebuchet MS" pitchFamily="34" charset="-122"/>
                 <a:cs typeface="Trebuchet MS" pitchFamily="34" charset="-120"/>
               </a:rPr>
-              <a:t>out</a:t>
+              <a:t>re</a:t>
             </a:r>
             <a:endParaRPr lang="en-US" sz="1300" dirty="0"/>
           </a:p>
@@ -27301,7 +27157,7 @@
                 <a:ea typeface="Calibri" pitchFamily="34" charset="-122"/>
                 <a:cs typeface="Calibri" pitchFamily="34" charset="-120"/>
               </a:rPr>
-              <a:t>outside or separate from</a:t>
+              <a:t>again</a:t>
             </a:r>
             <a:endParaRPr lang="en-US" sz="850" dirty="0"/>
           </a:p>
@@ -27413,7 +27269,7 @@
                 <a:ea typeface="Calibri" pitchFamily="34" charset="-122"/>
                 <a:cs typeface="Calibri" pitchFamily="34" charset="-120"/>
               </a:rPr>
-              <a:t>to construct or make</a:t>
+              <a:t>make by putting parts together</a:t>
             </a:r>
             <a:endParaRPr lang="en-US" sz="850" dirty="0"/>
           </a:p>
@@ -27525,7 +27381,7 @@
                 <a:ea typeface="Calibri" pitchFamily="34" charset="-122"/>
                 <a:cs typeface="Calibri" pitchFamily="34" charset="-120"/>
               </a:rPr>
-              <a:t>a place or result of an action</a:t>
+              <a:t>happening now</a:t>
             </a:r>
             <a:endParaRPr lang="en-US" sz="850" dirty="0"/>
           </a:p>
@@ -27684,7 +27540,7 @@
                 <a:ea typeface="Trebuchet MS" pitchFamily="34" charset="-122"/>
                 <a:cs typeface="Trebuchet MS" pitchFamily="34" charset="-120"/>
               </a:rPr>
-              <a:t>out</a:t>
+              <a:t>re</a:t>
             </a:r>
             <a:endParaRPr lang="en-US" sz="1400" dirty="0"/>
           </a:p>
@@ -27789,7 +27645,7 @@
                 <a:ea typeface="Trebuchet MS" pitchFamily="34" charset="-122"/>
                 <a:cs typeface="Trebuchet MS" pitchFamily="34" charset="-120"/>
               </a:rPr>
-              <a:t>buil</a:t>
+              <a:t>build</a:t>
             </a:r>
             <a:endParaRPr lang="en-US" sz="1400" dirty="0"/>
           </a:p>
@@ -27894,7 +27750,7 @@
                 <a:ea typeface="Trebuchet MS" pitchFamily="34" charset="-122"/>
                 <a:cs typeface="Trebuchet MS" pitchFamily="34" charset="-120"/>
               </a:rPr>
-              <a:t>ding</a:t>
+              <a:t>ing</a:t>
             </a:r>
             <a:endParaRPr lang="en-US" sz="1400" dirty="0"/>
           </a:p>
@@ -28053,7 +27909,7 @@
                 <a:ea typeface="Trebuchet MS" pitchFamily="34" charset="-122"/>
                 <a:cs typeface="Trebuchet MS" pitchFamily="34" charset="-120"/>
               </a:rPr>
-              <a:t>ou</a:t>
+              <a:t>r</a:t>
             </a:r>
             <a:endParaRPr lang="en-US" sz="900" dirty="0"/>
           </a:p>
@@ -28119,7 +27975,7 @@
                 <a:ea typeface="Trebuchet MS" pitchFamily="34" charset="-122"/>
                 <a:cs typeface="Trebuchet MS" pitchFamily="34" charset="-120"/>
               </a:rPr>
-              <a:t>t</a:t>
+              <a:t>e</a:t>
             </a:r>
             <a:endParaRPr lang="en-US" sz="900" dirty="0"/>
           </a:p>
@@ -28807,7 +28663,7 @@
                 <a:ea typeface="Calibri" pitchFamily="34" charset="-122"/>
                 <a:cs typeface="Calibri" pitchFamily="34" charset="-120"/>
               </a:rPr>
-              <a:t>Word Labs  •  wordlabs.app  •  Root: 'build' = to construct or make</a:t>
+              <a:t>Word Labs  •  wordlabs.app  •  Root: 'build' = make by putting parts together</a:t>
             </a:r>
             <a:endParaRPr lang="en-US" sz="800" dirty="0"/>
           </a:p>
@@ -28946,7 +28802,7 @@
                 <a:ea typeface="Trebuchet MS" pitchFamily="34" charset="-122"/>
                 <a:cs typeface="Trebuchet MS" pitchFamily="34" charset="-120"/>
               </a:rPr>
-              <a:t>rebuild</a:t>
+              <a:t>overbuild</a:t>
             </a:r>
             <a:endParaRPr lang="en-US" sz="2800" dirty="0"/>
           </a:p>
@@ -29634,7 +29490,7 @@
                 <a:ea typeface="Calibri" pitchFamily="34" charset="-122"/>
                 <a:cs typeface="Calibri" pitchFamily="34" charset="-120"/>
               </a:rPr>
-              <a:t>Word Labs  •  wordlabs.app  •  Root: 'build' = to construct or make</a:t>
+              <a:t>Word Labs  •  wordlabs.app  •  Root: 'build' = make by putting parts together</a:t>
             </a:r>
             <a:endParaRPr lang="en-US" sz="800" dirty="0"/>
           </a:p>
@@ -29773,7 +29629,7 @@
                 <a:ea typeface="Trebuchet MS" pitchFamily="34" charset="-122"/>
                 <a:cs typeface="Trebuchet MS" pitchFamily="34" charset="-120"/>
               </a:rPr>
-              <a:t>rebuild</a:t>
+              <a:t>overbuild</a:t>
             </a:r>
             <a:endParaRPr lang="en-US" sz="2800" dirty="0"/>
           </a:p>
@@ -29912,7 +29768,7 @@
                 <a:ea typeface="Trebuchet MS" pitchFamily="34" charset="-122"/>
                 <a:cs typeface="Trebuchet MS" pitchFamily="34" charset="-120"/>
               </a:rPr>
-              <a:t>re</a:t>
+              <a:t>over</a:t>
             </a:r>
             <a:endParaRPr lang="en-US" sz="1300" dirty="0"/>
           </a:p>
@@ -29951,7 +29807,7 @@
                 <a:ea typeface="Calibri" pitchFamily="34" charset="-122"/>
                 <a:cs typeface="Calibri" pitchFamily="34" charset="-120"/>
               </a:rPr>
-              <a:t>again</a:t>
+              <a:t>too much</a:t>
             </a:r>
             <a:endParaRPr lang="en-US" sz="850" dirty="0"/>
           </a:p>
@@ -30063,7 +29919,7 @@
                 <a:ea typeface="Calibri" pitchFamily="34" charset="-122"/>
                 <a:cs typeface="Calibri" pitchFamily="34" charset="-120"/>
               </a:rPr>
-              <a:t>to construct or make</a:t>
+              <a:t>make by putting parts together</a:t>
             </a:r>
             <a:endParaRPr lang="en-US" sz="850" dirty="0"/>
           </a:p>
@@ -30619,7 +30475,7 @@
                 <a:ea typeface="Calibri" pitchFamily="34" charset="-122"/>
                 <a:cs typeface="Calibri" pitchFamily="34" charset="-120"/>
               </a:rPr>
-              <a:t>Word Labs  •  wordlabs.app  •  Root: 'build' = to construct or make</a:t>
+              <a:t>Word Labs  •  wordlabs.app  •  Root: 'build' = make by putting parts together</a:t>
             </a:r>
             <a:endParaRPr lang="en-US" sz="800" dirty="0"/>
           </a:p>
@@ -30758,7 +30614,7 @@
                 <a:ea typeface="Trebuchet MS" pitchFamily="34" charset="-122"/>
                 <a:cs typeface="Trebuchet MS" pitchFamily="34" charset="-120"/>
               </a:rPr>
-              <a:t>rebuild</a:t>
+              <a:t>overbuild</a:t>
             </a:r>
             <a:endParaRPr lang="en-US" sz="2800" dirty="0"/>
           </a:p>
@@ -30897,7 +30753,7 @@
                 <a:ea typeface="Trebuchet MS" pitchFamily="34" charset="-122"/>
                 <a:cs typeface="Trebuchet MS" pitchFamily="34" charset="-120"/>
               </a:rPr>
-              <a:t>re</a:t>
+              <a:t>over</a:t>
             </a:r>
             <a:endParaRPr lang="en-US" sz="1300" dirty="0"/>
           </a:p>
@@ -30936,7 +30792,7 @@
                 <a:ea typeface="Calibri" pitchFamily="34" charset="-122"/>
                 <a:cs typeface="Calibri" pitchFamily="34" charset="-120"/>
               </a:rPr>
-              <a:t>again</a:t>
+              <a:t>too much</a:t>
             </a:r>
             <a:endParaRPr lang="en-US" sz="850" dirty="0"/>
           </a:p>
@@ -31048,7 +30904,7 @@
                 <a:ea typeface="Calibri" pitchFamily="34" charset="-122"/>
                 <a:cs typeface="Calibri" pitchFamily="34" charset="-120"/>
               </a:rPr>
-              <a:t>to construct or make</a:t>
+              <a:t>make by putting parts together</a:t>
             </a:r>
             <a:endParaRPr lang="en-US" sz="850" dirty="0"/>
           </a:p>
@@ -31155,7 +31011,7 @@
         </p:nvSpPr>
         <p:spPr>
           <a:xfrm>
-            <a:off x="2999232" y="3364992"/>
+            <a:off x="2313432" y="3364992"/>
             <a:ext cx="1645920" cy="475488"/>
           </a:xfrm>
           <a:prstGeom prst="rect">
@@ -31182,7 +31038,7 @@
         </p:nvSpPr>
         <p:spPr>
           <a:xfrm>
-            <a:off x="2999232" y="3364992"/>
+            <a:off x="2313432" y="3364992"/>
             <a:ext cx="1645920" cy="475488"/>
           </a:xfrm>
           <a:prstGeom prst="rect">
@@ -31207,7 +31063,7 @@
                 <a:ea typeface="Trebuchet MS" pitchFamily="34" charset="-122"/>
                 <a:cs typeface="Trebuchet MS" pitchFamily="34" charset="-120"/>
               </a:rPr>
-              <a:t>re</a:t>
+              <a:t>o</a:t>
             </a:r>
             <a:endParaRPr lang="en-US" sz="1400" dirty="0"/>
           </a:p>
@@ -31221,8 +31077,8 @@
         </p:nvSpPr>
         <p:spPr>
           <a:xfrm>
-            <a:off x="4645152" y="3364992"/>
-            <a:ext cx="1097280" cy="475488"/>
+            <a:off x="3959352" y="3364992"/>
+            <a:ext cx="411480" cy="475488"/>
           </a:xfrm>
           <a:prstGeom prst="rect">
             <a:avLst/>
@@ -31260,7 +31116,7 @@
         </p:nvSpPr>
         <p:spPr>
           <a:xfrm>
-            <a:off x="5742432" y="3364992"/>
+            <a:off x="4370832" y="3364992"/>
             <a:ext cx="1645920" cy="475488"/>
           </a:xfrm>
           <a:prstGeom prst="rect">
@@ -31287,7 +31143,7 @@
         </p:nvSpPr>
         <p:spPr>
           <a:xfrm>
-            <a:off x="5742432" y="3364992"/>
+            <a:off x="4370832" y="3364992"/>
             <a:ext cx="1645920" cy="475488"/>
           </a:xfrm>
           <a:prstGeom prst="rect">
@@ -31312,6 +31168,111 @@
                 <a:ea typeface="Trebuchet MS" pitchFamily="34" charset="-122"/>
                 <a:cs typeface="Trebuchet MS" pitchFamily="34" charset="-120"/>
               </a:rPr>
+              <a:t>ver</a:t>
+            </a:r>
+            <a:endParaRPr lang="en-US" sz="1400" dirty="0"/>
+          </a:p>
+        </p:txBody>
+      </p:sp>
+      <p:sp>
+        <p:nvSpPr>
+          <p:cNvPr id="30" name="Text 28"/>
+          <p:cNvSpPr/>
+          <p:nvPr/>
+        </p:nvSpPr>
+        <p:spPr>
+          <a:xfrm>
+            <a:off x="6016752" y="3364992"/>
+            <a:ext cx="411480" cy="475488"/>
+          </a:xfrm>
+          <a:prstGeom prst="rect">
+            <a:avLst/>
+          </a:prstGeom>
+          <a:noFill/>
+          <a:ln/>
+        </p:spPr>
+        <p:txBody>
+          <a:bodyPr wrap="square" lIns="0" tIns="0" rIns="0" bIns="0" rtlCol="0" anchor="ctr"/>
+          <a:lstStyle/>
+          <a:p>
+            <a:pPr algn="ctr" indent="0" marL="0">
+              <a:buNone/>
+            </a:pPr>
+            <a:r>
+              <a:rPr lang="en-US" sz="1600" b="1" dirty="0">
+                <a:solidFill>
+                  <a:srgbClr val="0D9488"/>
+                </a:solidFill>
+                <a:latin typeface="Trebuchet MS" pitchFamily="34" charset="0"/>
+                <a:ea typeface="Trebuchet MS" pitchFamily="34" charset="-122"/>
+                <a:cs typeface="Trebuchet MS" pitchFamily="34" charset="-120"/>
+              </a:rPr>
+              <a:t>·</a:t>
+            </a:r>
+            <a:endParaRPr lang="en-US" sz="1600" dirty="0"/>
+          </a:p>
+        </p:txBody>
+      </p:sp>
+      <p:sp>
+        <p:nvSpPr>
+          <p:cNvPr id="31" name="Shape 29"/>
+          <p:cNvSpPr/>
+          <p:nvPr/>
+        </p:nvSpPr>
+        <p:spPr>
+          <a:xfrm>
+            <a:off x="6428232" y="3364992"/>
+            <a:ext cx="1645920" cy="475488"/>
+          </a:xfrm>
+          <a:prstGeom prst="rect">
+            <a:avLst>
+              <a:gd name="adj" fmla="val 9615"/>
+            </a:avLst>
+          </a:prstGeom>
+          <a:solidFill>
+            <a:srgbClr val="FFFFFF"/>
+          </a:solidFill>
+          <a:ln w="12700">
+            <a:solidFill>
+              <a:srgbClr val="0D9488"/>
+            </a:solidFill>
+            <a:prstDash val="solid"/>
+          </a:ln>
+        </p:spPr>
+      </p:sp>
+      <p:sp>
+        <p:nvSpPr>
+          <p:cNvPr id="32" name="Text 30"/>
+          <p:cNvSpPr/>
+          <p:nvPr/>
+        </p:nvSpPr>
+        <p:spPr>
+          <a:xfrm>
+            <a:off x="6428232" y="3364992"/>
+            <a:ext cx="1645920" cy="475488"/>
+          </a:xfrm>
+          <a:prstGeom prst="rect">
+            <a:avLst/>
+          </a:prstGeom>
+          <a:noFill/>
+          <a:ln/>
+        </p:spPr>
+        <p:txBody>
+          <a:bodyPr wrap="square" lIns="0" tIns="0" rIns="0" bIns="0" rtlCol="0" anchor="ctr"/>
+          <a:lstStyle/>
+          <a:p>
+            <a:pPr algn="ctr" indent="0" marL="0">
+              <a:buNone/>
+            </a:pPr>
+            <a:r>
+              <a:rPr lang="en-US" sz="1400" b="1" dirty="0">
+                <a:solidFill>
+                  <a:srgbClr val="0D9488"/>
+                </a:solidFill>
+                <a:latin typeface="Trebuchet MS" pitchFamily="34" charset="0"/>
+                <a:ea typeface="Trebuchet MS" pitchFamily="34" charset="-122"/>
+                <a:cs typeface="Trebuchet MS" pitchFamily="34" charset="-120"/>
+              </a:rPr>
               <a:t>build</a:t>
             </a:r>
             <a:endParaRPr lang="en-US" sz="1400" dirty="0"/>
@@ -31320,7 +31281,7 @@
       </p:sp>
       <p:sp>
         <p:nvSpPr>
-          <p:cNvPr id="30" name="Shape 28"/>
+          <p:cNvPr id="33" name="Shape 31"/>
           <p:cNvSpPr/>
           <p:nvPr/>
         </p:nvSpPr>
@@ -31347,7 +31308,7 @@
       </p:sp>
       <p:sp>
         <p:nvSpPr>
-          <p:cNvPr id="31" name="Text 29"/>
+          <p:cNvPr id="34" name="Text 32"/>
           <p:cNvSpPr/>
           <p:nvPr/>
         </p:nvSpPr>
@@ -31386,7 +31347,7 @@
       </p:sp>
       <p:sp>
         <p:nvSpPr>
-          <p:cNvPr id="32" name="Shape 30"/>
+          <p:cNvPr id="35" name="Shape 33"/>
           <p:cNvSpPr/>
           <p:nvPr/>
         </p:nvSpPr>
@@ -31413,7 +31374,7 @@
       </p:sp>
       <p:sp>
         <p:nvSpPr>
-          <p:cNvPr id="33" name="Text 31"/>
+          <p:cNvPr id="36" name="Text 34"/>
           <p:cNvSpPr/>
           <p:nvPr/>
         </p:nvSpPr>
@@ -31736,7 +31697,7 @@
                 <a:ea typeface="Calibri" pitchFamily="34" charset="-122"/>
                 <a:cs typeface="Calibri" pitchFamily="34" charset="-120"/>
               </a:rPr>
-              <a:t>Word Labs  •  wordlabs.app  •  Root: 'build' = to construct or make</a:t>
+              <a:t>Word Labs  •  wordlabs.app  •  Root: 'build' = make by putting parts together</a:t>
             </a:r>
             <a:endParaRPr lang="en-US" sz="800" dirty="0"/>
           </a:p>
@@ -31875,7 +31836,7 @@
                 <a:ea typeface="Trebuchet MS" pitchFamily="34" charset="-122"/>
                 <a:cs typeface="Trebuchet MS" pitchFamily="34" charset="-120"/>
               </a:rPr>
-              <a:t>rebuild</a:t>
+              <a:t>overbuild</a:t>
             </a:r>
             <a:endParaRPr lang="en-US" sz="2800" dirty="0"/>
           </a:p>
@@ -32014,7 +31975,7 @@
                 <a:ea typeface="Trebuchet MS" pitchFamily="34" charset="-122"/>
                 <a:cs typeface="Trebuchet MS" pitchFamily="34" charset="-120"/>
               </a:rPr>
-              <a:t>re</a:t>
+              <a:t>over</a:t>
             </a:r>
             <a:endParaRPr lang="en-US" sz="1300" dirty="0"/>
           </a:p>
@@ -32053,7 +32014,7 @@
                 <a:ea typeface="Calibri" pitchFamily="34" charset="-122"/>
                 <a:cs typeface="Calibri" pitchFamily="34" charset="-120"/>
               </a:rPr>
-              <a:t>again</a:t>
+              <a:t>too much</a:t>
             </a:r>
             <a:endParaRPr lang="en-US" sz="850" dirty="0"/>
           </a:p>
@@ -32165,7 +32126,7 @@
                 <a:ea typeface="Calibri" pitchFamily="34" charset="-122"/>
                 <a:cs typeface="Calibri" pitchFamily="34" charset="-120"/>
               </a:rPr>
-              <a:t>to construct or make</a:t>
+              <a:t>make by putting parts together</a:t>
             </a:r>
             <a:endParaRPr lang="en-US" sz="850" dirty="0"/>
           </a:p>
@@ -32272,7 +32233,7 @@
         </p:nvSpPr>
         <p:spPr>
           <a:xfrm>
-            <a:off x="2999232" y="3364992"/>
+            <a:off x="2313432" y="3364992"/>
             <a:ext cx="1645920" cy="475488"/>
           </a:xfrm>
           <a:prstGeom prst="rect">
@@ -32299,7 +32260,7 @@
         </p:nvSpPr>
         <p:spPr>
           <a:xfrm>
-            <a:off x="2999232" y="3364992"/>
+            <a:off x="2313432" y="3364992"/>
             <a:ext cx="1645920" cy="475488"/>
           </a:xfrm>
           <a:prstGeom prst="rect">
@@ -32324,7 +32285,7 @@
                 <a:ea typeface="Trebuchet MS" pitchFamily="34" charset="-122"/>
                 <a:cs typeface="Trebuchet MS" pitchFamily="34" charset="-120"/>
               </a:rPr>
-              <a:t>re</a:t>
+              <a:t>o</a:t>
             </a:r>
             <a:endParaRPr lang="en-US" sz="1400" dirty="0"/>
           </a:p>
@@ -32338,8 +32299,8 @@
         </p:nvSpPr>
         <p:spPr>
           <a:xfrm>
-            <a:off x="4645152" y="3364992"/>
-            <a:ext cx="1097280" cy="475488"/>
+            <a:off x="3959352" y="3364992"/>
+            <a:ext cx="411480" cy="475488"/>
           </a:xfrm>
           <a:prstGeom prst="rect">
             <a:avLst/>
@@ -32377,7 +32338,7 @@
         </p:nvSpPr>
         <p:spPr>
           <a:xfrm>
-            <a:off x="5742432" y="3364992"/>
+            <a:off x="4370832" y="3364992"/>
             <a:ext cx="1645920" cy="475488"/>
           </a:xfrm>
           <a:prstGeom prst="rect">
@@ -32404,7 +32365,7 @@
         </p:nvSpPr>
         <p:spPr>
           <a:xfrm>
-            <a:off x="5742432" y="3364992"/>
+            <a:off x="4370832" y="3364992"/>
             <a:ext cx="1645920" cy="475488"/>
           </a:xfrm>
           <a:prstGeom prst="rect">
@@ -32429,6 +32390,111 @@
                 <a:ea typeface="Trebuchet MS" pitchFamily="34" charset="-122"/>
                 <a:cs typeface="Trebuchet MS" pitchFamily="34" charset="-120"/>
               </a:rPr>
+              <a:t>ver</a:t>
+            </a:r>
+            <a:endParaRPr lang="en-US" sz="1400" dirty="0"/>
+          </a:p>
+        </p:txBody>
+      </p:sp>
+      <p:sp>
+        <p:nvSpPr>
+          <p:cNvPr id="30" name="Text 28"/>
+          <p:cNvSpPr/>
+          <p:nvPr/>
+        </p:nvSpPr>
+        <p:spPr>
+          <a:xfrm>
+            <a:off x="6016752" y="3364992"/>
+            <a:ext cx="411480" cy="475488"/>
+          </a:xfrm>
+          <a:prstGeom prst="rect">
+            <a:avLst/>
+          </a:prstGeom>
+          <a:noFill/>
+          <a:ln/>
+        </p:spPr>
+        <p:txBody>
+          <a:bodyPr wrap="square" lIns="0" tIns="0" rIns="0" bIns="0" rtlCol="0" anchor="ctr"/>
+          <a:lstStyle/>
+          <a:p>
+            <a:pPr algn="ctr" indent="0" marL="0">
+              <a:buNone/>
+            </a:pPr>
+            <a:r>
+              <a:rPr lang="en-US" sz="1600" b="1" dirty="0">
+                <a:solidFill>
+                  <a:srgbClr val="0D9488"/>
+                </a:solidFill>
+                <a:latin typeface="Trebuchet MS" pitchFamily="34" charset="0"/>
+                <a:ea typeface="Trebuchet MS" pitchFamily="34" charset="-122"/>
+                <a:cs typeface="Trebuchet MS" pitchFamily="34" charset="-120"/>
+              </a:rPr>
+              <a:t>·</a:t>
+            </a:r>
+            <a:endParaRPr lang="en-US" sz="1600" dirty="0"/>
+          </a:p>
+        </p:txBody>
+      </p:sp>
+      <p:sp>
+        <p:nvSpPr>
+          <p:cNvPr id="31" name="Shape 29"/>
+          <p:cNvSpPr/>
+          <p:nvPr/>
+        </p:nvSpPr>
+        <p:spPr>
+          <a:xfrm>
+            <a:off x="6428232" y="3364992"/>
+            <a:ext cx="1645920" cy="475488"/>
+          </a:xfrm>
+          <a:prstGeom prst="rect">
+            <a:avLst>
+              <a:gd name="adj" fmla="val 9615"/>
+            </a:avLst>
+          </a:prstGeom>
+          <a:solidFill>
+            <a:srgbClr val="FFFFFF"/>
+          </a:solidFill>
+          <a:ln w="12700">
+            <a:solidFill>
+              <a:srgbClr val="0D9488"/>
+            </a:solidFill>
+            <a:prstDash val="solid"/>
+          </a:ln>
+        </p:spPr>
+      </p:sp>
+      <p:sp>
+        <p:nvSpPr>
+          <p:cNvPr id="32" name="Text 30"/>
+          <p:cNvSpPr/>
+          <p:nvPr/>
+        </p:nvSpPr>
+        <p:spPr>
+          <a:xfrm>
+            <a:off x="6428232" y="3364992"/>
+            <a:ext cx="1645920" cy="475488"/>
+          </a:xfrm>
+          <a:prstGeom prst="rect">
+            <a:avLst/>
+          </a:prstGeom>
+          <a:noFill/>
+          <a:ln/>
+        </p:spPr>
+        <p:txBody>
+          <a:bodyPr wrap="square" lIns="0" tIns="0" rIns="0" bIns="0" rtlCol="0" anchor="ctr"/>
+          <a:lstStyle/>
+          <a:p>
+            <a:pPr algn="ctr" indent="0" marL="0">
+              <a:buNone/>
+            </a:pPr>
+            <a:r>
+              <a:rPr lang="en-US" sz="1400" b="1" dirty="0">
+                <a:solidFill>
+                  <a:srgbClr val="0D9488"/>
+                </a:solidFill>
+                <a:latin typeface="Trebuchet MS" pitchFamily="34" charset="0"/>
+                <a:ea typeface="Trebuchet MS" pitchFamily="34" charset="-122"/>
+                <a:cs typeface="Trebuchet MS" pitchFamily="34" charset="-120"/>
+              </a:rPr>
               <a:t>build</a:t>
             </a:r>
             <a:endParaRPr lang="en-US" sz="1400" dirty="0"/>
@@ -32437,7 +32503,7 @@
       </p:sp>
       <p:sp>
         <p:nvSpPr>
-          <p:cNvPr id="30" name="Shape 28"/>
+          <p:cNvPr id="33" name="Shape 31"/>
           <p:cNvSpPr/>
           <p:nvPr/>
         </p:nvSpPr>
@@ -32464,7 +32530,7 @@
       </p:sp>
       <p:sp>
         <p:nvSpPr>
-          <p:cNvPr id="31" name="Text 29"/>
+          <p:cNvPr id="34" name="Text 32"/>
           <p:cNvSpPr/>
           <p:nvPr/>
         </p:nvSpPr>
@@ -32503,7 +32569,7 @@
       </p:sp>
       <p:sp>
         <p:nvSpPr>
-          <p:cNvPr id="32" name="Shape 30"/>
+          <p:cNvPr id="35" name="Shape 33"/>
           <p:cNvSpPr/>
           <p:nvPr/>
         </p:nvSpPr>
@@ -32530,13 +32596,13 @@
       </p:sp>
       <p:sp>
         <p:nvSpPr>
-          <p:cNvPr id="33" name="Shape 31"/>
-          <p:cNvSpPr/>
-          <p:nvPr/>
-        </p:nvSpPr>
-        <p:spPr>
-          <a:xfrm>
-            <a:off x="2254649" y="4169664"/>
+          <p:cNvPr id="36" name="Shape 34"/>
+          <p:cNvSpPr/>
+          <p:nvPr/>
+        </p:nvSpPr>
+        <p:spPr>
+          <a:xfrm>
+            <a:off x="2124837" y="4169664"/>
             <a:ext cx="685800" cy="475488"/>
           </a:xfrm>
           <a:prstGeom prst="rect">
@@ -32557,13 +32623,13 @@
       </p:sp>
       <p:sp>
         <p:nvSpPr>
-          <p:cNvPr id="34" name="Text 32"/>
-          <p:cNvSpPr/>
-          <p:nvPr/>
-        </p:nvSpPr>
-        <p:spPr>
-          <a:xfrm>
-            <a:off x="2254649" y="4169664"/>
+          <p:cNvPr id="37" name="Text 35"/>
+          <p:cNvSpPr/>
+          <p:nvPr/>
+        </p:nvSpPr>
+        <p:spPr>
+          <a:xfrm>
+            <a:off x="2124837" y="4169664"/>
             <a:ext cx="685800" cy="475488"/>
           </a:xfrm>
           <a:prstGeom prst="rect">
@@ -32588,7 +32654,7 @@
                 <a:ea typeface="Trebuchet MS" pitchFamily="34" charset="-122"/>
                 <a:cs typeface="Trebuchet MS" pitchFamily="34" charset="-120"/>
               </a:rPr>
-              <a:t>r</a:t>
+              <a:t>o</a:t>
             </a:r>
             <a:endParaRPr lang="en-US" sz="900" dirty="0"/>
           </a:p>
@@ -32596,13 +32662,13 @@
       </p:sp>
       <p:sp>
         <p:nvSpPr>
-          <p:cNvPr id="35" name="Shape 33"/>
-          <p:cNvSpPr/>
-          <p:nvPr/>
-        </p:nvSpPr>
-        <p:spPr>
-          <a:xfrm>
-            <a:off x="3293146" y="4169664"/>
+          <p:cNvPr id="38" name="Shape 36"/>
+          <p:cNvSpPr/>
+          <p:nvPr/>
+        </p:nvSpPr>
+        <p:spPr>
+          <a:xfrm>
+            <a:off x="3033522" y="4169664"/>
             <a:ext cx="685800" cy="475488"/>
           </a:xfrm>
           <a:prstGeom prst="rect">
@@ -32623,13 +32689,13 @@
       </p:sp>
       <p:sp>
         <p:nvSpPr>
-          <p:cNvPr id="36" name="Text 34"/>
-          <p:cNvSpPr/>
-          <p:nvPr/>
-        </p:nvSpPr>
-        <p:spPr>
-          <a:xfrm>
-            <a:off x="3293146" y="4169664"/>
+          <p:cNvPr id="39" name="Text 37"/>
+          <p:cNvSpPr/>
+          <p:nvPr/>
+        </p:nvSpPr>
+        <p:spPr>
+          <a:xfrm>
+            <a:off x="3033522" y="4169664"/>
             <a:ext cx="685800" cy="475488"/>
           </a:xfrm>
           <a:prstGeom prst="rect">
@@ -32654,7 +32720,7 @@
                 <a:ea typeface="Trebuchet MS" pitchFamily="34" charset="-122"/>
                 <a:cs typeface="Trebuchet MS" pitchFamily="34" charset="-120"/>
               </a:rPr>
-              <a:t>e</a:t>
+              <a:t>v</a:t>
             </a:r>
             <a:endParaRPr lang="en-US" sz="900" dirty="0"/>
           </a:p>
@@ -32662,13 +32728,13 @@
       </p:sp>
       <p:sp>
         <p:nvSpPr>
-          <p:cNvPr id="37" name="Shape 35"/>
-          <p:cNvSpPr/>
-          <p:nvPr/>
-        </p:nvSpPr>
-        <p:spPr>
-          <a:xfrm>
-            <a:off x="4331643" y="4169664"/>
+          <p:cNvPr id="40" name="Shape 38"/>
+          <p:cNvSpPr/>
+          <p:nvPr/>
+        </p:nvSpPr>
+        <p:spPr>
+          <a:xfrm>
+            <a:off x="3942207" y="4169664"/>
             <a:ext cx="685800" cy="475488"/>
           </a:xfrm>
           <a:prstGeom prst="rect">
@@ -32689,13 +32755,13 @@
       </p:sp>
       <p:sp>
         <p:nvSpPr>
-          <p:cNvPr id="38" name="Text 36"/>
-          <p:cNvSpPr/>
-          <p:nvPr/>
-        </p:nvSpPr>
-        <p:spPr>
-          <a:xfrm>
-            <a:off x="4331643" y="4169664"/>
+          <p:cNvPr id="41" name="Text 39"/>
+          <p:cNvSpPr/>
+          <p:nvPr/>
+        </p:nvSpPr>
+        <p:spPr>
+          <a:xfrm>
+            <a:off x="3942207" y="4169664"/>
             <a:ext cx="685800" cy="475488"/>
           </a:xfrm>
           <a:prstGeom prst="rect">
@@ -32720,7 +32786,7 @@
                 <a:ea typeface="Trebuchet MS" pitchFamily="34" charset="-122"/>
                 <a:cs typeface="Trebuchet MS" pitchFamily="34" charset="-120"/>
               </a:rPr>
-              <a:t>b</a:t>
+              <a:t>er</a:t>
             </a:r>
             <a:endParaRPr lang="en-US" sz="900" dirty="0"/>
           </a:p>
@@ -32728,13 +32794,13 @@
       </p:sp>
       <p:sp>
         <p:nvSpPr>
-          <p:cNvPr id="39" name="Shape 37"/>
-          <p:cNvSpPr/>
-          <p:nvPr/>
-        </p:nvSpPr>
-        <p:spPr>
-          <a:xfrm>
-            <a:off x="5370141" y="4169664"/>
+          <p:cNvPr id="42" name="Shape 40"/>
+          <p:cNvSpPr/>
+          <p:nvPr/>
+        </p:nvSpPr>
+        <p:spPr>
+          <a:xfrm>
+            <a:off x="4850892" y="4169664"/>
             <a:ext cx="685800" cy="475488"/>
           </a:xfrm>
           <a:prstGeom prst="rect">
@@ -32755,13 +32821,13 @@
       </p:sp>
       <p:sp>
         <p:nvSpPr>
-          <p:cNvPr id="40" name="Text 38"/>
-          <p:cNvSpPr/>
-          <p:nvPr/>
-        </p:nvSpPr>
-        <p:spPr>
-          <a:xfrm>
-            <a:off x="5370141" y="4169664"/>
+          <p:cNvPr id="43" name="Text 41"/>
+          <p:cNvSpPr/>
+          <p:nvPr/>
+        </p:nvSpPr>
+        <p:spPr>
+          <a:xfrm>
+            <a:off x="4850892" y="4169664"/>
             <a:ext cx="685800" cy="475488"/>
           </a:xfrm>
           <a:prstGeom prst="rect">
@@ -32786,7 +32852,7 @@
                 <a:ea typeface="Trebuchet MS" pitchFamily="34" charset="-122"/>
                 <a:cs typeface="Trebuchet MS" pitchFamily="34" charset="-120"/>
               </a:rPr>
-              <a:t>ui</a:t>
+              <a:t>b</a:t>
             </a:r>
             <a:endParaRPr lang="en-US" sz="900" dirty="0"/>
           </a:p>
@@ -32794,13 +32860,13 @@
       </p:sp>
       <p:sp>
         <p:nvSpPr>
-          <p:cNvPr id="41" name="Shape 39"/>
-          <p:cNvSpPr/>
-          <p:nvPr/>
-        </p:nvSpPr>
-        <p:spPr>
-          <a:xfrm>
-            <a:off x="6408638" y="4169664"/>
+          <p:cNvPr id="44" name="Shape 42"/>
+          <p:cNvSpPr/>
+          <p:nvPr/>
+        </p:nvSpPr>
+        <p:spPr>
+          <a:xfrm>
+            <a:off x="5759577" y="4169664"/>
             <a:ext cx="685800" cy="475488"/>
           </a:xfrm>
           <a:prstGeom prst="rect">
@@ -32821,13 +32887,13 @@
       </p:sp>
       <p:sp>
         <p:nvSpPr>
-          <p:cNvPr id="42" name="Text 40"/>
-          <p:cNvSpPr/>
-          <p:nvPr/>
-        </p:nvSpPr>
-        <p:spPr>
-          <a:xfrm>
-            <a:off x="6408638" y="4169664"/>
+          <p:cNvPr id="45" name="Text 43"/>
+          <p:cNvSpPr/>
+          <p:nvPr/>
+        </p:nvSpPr>
+        <p:spPr>
+          <a:xfrm>
+            <a:off x="5759577" y="4169664"/>
             <a:ext cx="685800" cy="475488"/>
           </a:xfrm>
           <a:prstGeom prst="rect">
@@ -32852,7 +32918,7 @@
                 <a:ea typeface="Trebuchet MS" pitchFamily="34" charset="-122"/>
                 <a:cs typeface="Trebuchet MS" pitchFamily="34" charset="-120"/>
               </a:rPr>
-              <a:t>l</a:t>
+              <a:t>ui</a:t>
             </a:r>
             <a:endParaRPr lang="en-US" sz="900" dirty="0"/>
           </a:p>
@@ -32860,13 +32926,13 @@
       </p:sp>
       <p:sp>
         <p:nvSpPr>
-          <p:cNvPr id="43" name="Shape 41"/>
-          <p:cNvSpPr/>
-          <p:nvPr/>
-        </p:nvSpPr>
-        <p:spPr>
-          <a:xfrm>
-            <a:off x="7447135" y="4169664"/>
+          <p:cNvPr id="46" name="Shape 44"/>
+          <p:cNvSpPr/>
+          <p:nvPr/>
+        </p:nvSpPr>
+        <p:spPr>
+          <a:xfrm>
+            <a:off x="6668262" y="4169664"/>
             <a:ext cx="685800" cy="475488"/>
           </a:xfrm>
           <a:prstGeom prst="rect">
@@ -32887,13 +32953,79 @@
       </p:sp>
       <p:sp>
         <p:nvSpPr>
-          <p:cNvPr id="44" name="Text 42"/>
-          <p:cNvSpPr/>
-          <p:nvPr/>
-        </p:nvSpPr>
-        <p:spPr>
-          <a:xfrm>
-            <a:off x="7447135" y="4169664"/>
+          <p:cNvPr id="47" name="Text 45"/>
+          <p:cNvSpPr/>
+          <p:nvPr/>
+        </p:nvSpPr>
+        <p:spPr>
+          <a:xfrm>
+            <a:off x="6668262" y="4169664"/>
+            <a:ext cx="685800" cy="475488"/>
+          </a:xfrm>
+          <a:prstGeom prst="rect">
+            <a:avLst/>
+          </a:prstGeom>
+          <a:noFill/>
+          <a:ln/>
+        </p:spPr>
+        <p:txBody>
+          <a:bodyPr wrap="square" lIns="0" tIns="0" rIns="0" bIns="0" rtlCol="0" anchor="ctr"/>
+          <a:lstStyle/>
+          <a:p>
+            <a:pPr algn="ctr" indent="0" marL="0">
+              <a:buNone/>
+            </a:pPr>
+            <a:r>
+              <a:rPr lang="en-US" sz="900" b="1" dirty="0">
+                <a:solidFill>
+                  <a:srgbClr val="9D174D"/>
+                </a:solidFill>
+                <a:latin typeface="Trebuchet MS" pitchFamily="34" charset="0"/>
+                <a:ea typeface="Trebuchet MS" pitchFamily="34" charset="-122"/>
+                <a:cs typeface="Trebuchet MS" pitchFamily="34" charset="-120"/>
+              </a:rPr>
+              <a:t>l</a:t>
+            </a:r>
+            <a:endParaRPr lang="en-US" sz="900" dirty="0"/>
+          </a:p>
+        </p:txBody>
+      </p:sp>
+      <p:sp>
+        <p:nvSpPr>
+          <p:cNvPr id="48" name="Shape 46"/>
+          <p:cNvSpPr/>
+          <p:nvPr/>
+        </p:nvSpPr>
+        <p:spPr>
+          <a:xfrm>
+            <a:off x="7576947" y="4169664"/>
+            <a:ext cx="685800" cy="475488"/>
+          </a:xfrm>
+          <a:prstGeom prst="rect">
+            <a:avLst>
+              <a:gd name="adj" fmla="val 7692"/>
+            </a:avLst>
+          </a:prstGeom>
+          <a:solidFill>
+            <a:srgbClr val="FFFFFF"/>
+          </a:solidFill>
+          <a:ln w="12700">
+            <a:solidFill>
+              <a:srgbClr val="DB2777"/>
+            </a:solidFill>
+            <a:prstDash val="solid"/>
+          </a:ln>
+        </p:spPr>
+      </p:sp>
+      <p:sp>
+        <p:nvSpPr>
+          <p:cNvPr id="49" name="Text 47"/>
+          <p:cNvSpPr/>
+          <p:nvPr/>
+        </p:nvSpPr>
+        <p:spPr>
+          <a:xfrm>
+            <a:off x="7576947" y="4169664"/>
             <a:ext cx="685800" cy="475488"/>
           </a:xfrm>
           <a:prstGeom prst="rect">
@@ -33210,7 +33342,7 @@
                 <a:ea typeface="Calibri" pitchFamily="34" charset="-122"/>
                 <a:cs typeface="Calibri" pitchFamily="34" charset="-120"/>
               </a:rPr>
-              <a:t>Word Labs  •  wordlabs.app  •  Root: 'build' = to construct or make</a:t>
+              <a:t>Word Labs  •  wordlabs.app  •  Root: 'build' = make by putting parts together</a:t>
             </a:r>
             <a:endParaRPr lang="en-US" sz="800" dirty="0"/>
           </a:p>
@@ -34379,7 +34511,7 @@
                 <a:ea typeface="Calibri" pitchFamily="34" charset="-122"/>
                 <a:cs typeface="Calibri" pitchFamily="34" charset="-120"/>
               </a:rPr>
-              <a:t>Word Labs  •  wordlabs.app  •  Root: 'build' = to construct or make</a:t>
+              <a:t>Word Labs  •  wordlabs.app  •  Root: 'build' = make by putting parts together</a:t>
             </a:r>
             <a:endParaRPr lang="en-US" sz="800" dirty="0"/>
           </a:p>
@@ -34680,7 +34812,7 @@
                 <a:ea typeface="Trebuchet MS" pitchFamily="34" charset="-122"/>
                 <a:cs typeface="Trebuchet MS" pitchFamily="34" charset="-120"/>
               </a:rPr>
-              <a:t>re-</a:t>
+              <a:t>over-</a:t>
             </a:r>
             <a:endParaRPr lang="en-US" sz="1300" dirty="0"/>
           </a:p>
@@ -34872,7 +35004,7 @@
                 <a:ea typeface="Trebuchet MS" pitchFamily="34" charset="-122"/>
                 <a:cs typeface="Trebuchet MS" pitchFamily="34" charset="-120"/>
               </a:rPr>
-              <a:t>up-</a:t>
+              <a:t>re-</a:t>
             </a:r>
             <a:endParaRPr lang="en-US" sz="1300" dirty="0"/>
           </a:p>
@@ -34982,7 +35114,7 @@
             <a:avLst/>
           </a:prstGeom>
           <a:solidFill>
-            <a:srgbClr val="DDD6FE"/>
+            <a:srgbClr val="F8FAFC"/>
           </a:solidFill>
           <a:ln w="12700">
             <a:solidFill>
@@ -34994,14 +35126,64 @@
       </p:sp>
       <p:sp>
         <p:nvSpPr>
-          <p:cNvPr id="29" name="Text 27"/>
-          <p:cNvSpPr/>
-          <p:nvPr/>
-        </p:nvSpPr>
-        <p:spPr>
-          <a:xfrm>
-            <a:off x="365760" y="2404872"/>
-            <a:ext cx="2468880" cy="402336"/>
+          <p:cNvPr id="29" name="Shape 27"/>
+          <p:cNvSpPr/>
+          <p:nvPr/>
+        </p:nvSpPr>
+        <p:spPr>
+          <a:xfrm>
+            <a:off x="2971800" y="2404872"/>
+            <a:ext cx="2834640" cy="402336"/>
+          </a:xfrm>
+          <a:prstGeom prst="rect">
+            <a:avLst/>
+          </a:prstGeom>
+          <a:solidFill>
+            <a:srgbClr val="F8FAFC"/>
+          </a:solidFill>
+          <a:ln w="12700">
+            <a:solidFill>
+              <a:srgbClr val="E2E8F0"/>
+            </a:solidFill>
+            <a:prstDash val="solid"/>
+          </a:ln>
+        </p:spPr>
+      </p:sp>
+      <p:sp>
+        <p:nvSpPr>
+          <p:cNvPr id="30" name="Shape 28"/>
+          <p:cNvSpPr/>
+          <p:nvPr/>
+        </p:nvSpPr>
+        <p:spPr>
+          <a:xfrm>
+            <a:off x="5943600" y="2404872"/>
+            <a:ext cx="2834640" cy="402336"/>
+          </a:xfrm>
+          <a:prstGeom prst="rect">
+            <a:avLst/>
+          </a:prstGeom>
+          <a:solidFill>
+            <a:srgbClr val="FCE7F3"/>
+          </a:solidFill>
+          <a:ln w="12700">
+            <a:solidFill>
+              <a:srgbClr val="E2E8F0"/>
+            </a:solidFill>
+            <a:prstDash val="solid"/>
+          </a:ln>
+        </p:spPr>
+      </p:sp>
+      <p:sp>
+        <p:nvSpPr>
+          <p:cNvPr id="31" name="Text 29"/>
+          <p:cNvSpPr/>
+          <p:nvPr/>
+        </p:nvSpPr>
+        <p:spPr>
+          <a:xfrm>
+            <a:off x="5943600" y="2404872"/>
+            <a:ext cx="2834640" cy="402336"/>
           </a:xfrm>
           <a:prstGeom prst="rect">
             <a:avLst/>
@@ -35019,13 +35201,13 @@
             <a:r>
               <a:rPr lang="en-US" sz="1300" b="1" dirty="0">
                 <a:solidFill>
-                  <a:srgbClr val="4C1D95"/>
+                  <a:srgbClr val="9D174D"/>
                 </a:solidFill>
                 <a:latin typeface="Trebuchet MS" pitchFamily="34" charset="0"/>
                 <a:ea typeface="Trebuchet MS" pitchFamily="34" charset="-122"/>
                 <a:cs typeface="Trebuchet MS" pitchFamily="34" charset="-120"/>
               </a:rPr>
-              <a:t>out-</a:t>
+              <a:t>-s</a:t>
             </a:r>
             <a:endParaRPr lang="en-US" sz="1300" dirty="0"/>
           </a:p>
@@ -35033,64 +35215,14 @@
       </p:sp>
       <p:sp>
         <p:nvSpPr>
-          <p:cNvPr id="30" name="Shape 28"/>
-          <p:cNvSpPr/>
-          <p:nvPr/>
-        </p:nvSpPr>
-        <p:spPr>
-          <a:xfrm>
-            <a:off x="2971800" y="2404872"/>
-            <a:ext cx="2834640" cy="402336"/>
-          </a:xfrm>
-          <a:prstGeom prst="rect">
-            <a:avLst/>
-          </a:prstGeom>
-          <a:solidFill>
-            <a:srgbClr val="F8FAFC"/>
-          </a:solidFill>
-          <a:ln w="12700">
-            <a:solidFill>
-              <a:srgbClr val="E2E8F0"/>
-            </a:solidFill>
-            <a:prstDash val="solid"/>
-          </a:ln>
-        </p:spPr>
-      </p:sp>
-      <p:sp>
-        <p:nvSpPr>
-          <p:cNvPr id="31" name="Shape 29"/>
-          <p:cNvSpPr/>
-          <p:nvPr/>
-        </p:nvSpPr>
-        <p:spPr>
-          <a:xfrm>
-            <a:off x="5943600" y="2404872"/>
-            <a:ext cx="2834640" cy="402336"/>
-          </a:xfrm>
-          <a:prstGeom prst="rect">
-            <a:avLst/>
-          </a:prstGeom>
-          <a:solidFill>
-            <a:srgbClr val="FCE7F3"/>
-          </a:solidFill>
-          <a:ln w="12700">
-            <a:solidFill>
-              <a:srgbClr val="E2E8F0"/>
-            </a:solidFill>
-            <a:prstDash val="solid"/>
-          </a:ln>
-        </p:spPr>
-      </p:sp>
-      <p:sp>
-        <p:nvSpPr>
           <p:cNvPr id="32" name="Text 30"/>
           <p:cNvSpPr/>
           <p:nvPr/>
         </p:nvSpPr>
         <p:spPr>
           <a:xfrm>
-            <a:off x="5943600" y="2404872"/>
-            <a:ext cx="2834640" cy="402336"/>
+            <a:off x="365760" y="3611880"/>
+            <a:ext cx="1828800" cy="347472"/>
           </a:xfrm>
           <a:prstGeom prst="rect">
             <a:avLst/>
@@ -35102,21 +35234,21 @@
           <a:bodyPr wrap="square" lIns="0" tIns="0" rIns="0" bIns="0" rtlCol="0" anchor="ctr"/>
           <a:lstStyle/>
           <a:p>
-            <a:pPr algn="ctr" indent="0" marL="0">
-              <a:buNone/>
-            </a:pPr>
-            <a:r>
-              <a:rPr lang="en-US" sz="1300" b="1" dirty="0">
-                <a:solidFill>
-                  <a:srgbClr val="9D174D"/>
+            <a:pPr algn="l" indent="0" marL="0">
+              <a:buNone/>
+            </a:pPr>
+            <a:r>
+              <a:rPr lang="en-US" sz="1200" b="1" dirty="0">
+                <a:solidFill>
+                  <a:srgbClr val="0F172A"/>
                 </a:solidFill>
                 <a:latin typeface="Trebuchet MS" pitchFamily="34" charset="0"/>
                 <a:ea typeface="Trebuchet MS" pitchFamily="34" charset="-122"/>
                 <a:cs typeface="Trebuchet MS" pitchFamily="34" charset="-120"/>
               </a:rPr>
-              <a:t>-ers</a:t>
-            </a:r>
-            <a:endParaRPr lang="en-US" sz="1300" dirty="0"/>
+              <a:t>Sample words:</a:t>
+            </a:r>
+            <a:endParaRPr lang="en-US" sz="1200" dirty="0"/>
           </a:p>
         </p:txBody>
       </p:sp>
@@ -35128,18 +35260,20 @@
         </p:nvSpPr>
         <p:spPr>
           <a:xfrm>
-            <a:off x="365760" y="2825496"/>
-            <a:ext cx="2468880" cy="402336"/>
-          </a:xfrm>
-          <a:prstGeom prst="rect">
-            <a:avLst/>
-          </a:prstGeom>
-          <a:solidFill>
-            <a:srgbClr val="DDD6FE"/>
-          </a:solidFill>
-          <a:ln w="12700">
-            <a:solidFill>
-              <a:srgbClr val="E2E8F0"/>
+            <a:off x="365760" y="4023360"/>
+            <a:ext cx="2011680" cy="402336"/>
+          </a:xfrm>
+          <a:prstGeom prst="rect">
+            <a:avLst>
+              <a:gd name="adj" fmla="val 13636"/>
+            </a:avLst>
+          </a:prstGeom>
+          <a:solidFill>
+            <a:srgbClr val="EEF2FF"/>
+          </a:solidFill>
+          <a:ln w="12700">
+            <a:solidFill>
+              <a:srgbClr val="6366F1"/>
             </a:solidFill>
             <a:prstDash val="solid"/>
           </a:ln>
@@ -35153,8 +35287,8 @@
         </p:nvSpPr>
         <p:spPr>
           <a:xfrm>
-            <a:off x="365760" y="2825496"/>
-            <a:ext cx="2468880" cy="402336"/>
+            <a:off x="365760" y="4023360"/>
+            <a:ext cx="2011680" cy="402336"/>
           </a:xfrm>
           <a:prstGeom prst="rect">
             <a:avLst/>
@@ -35170,17 +35304,17 @@
               <a:buNone/>
             </a:pPr>
             <a:r>
-              <a:rPr lang="en-US" sz="1300" b="1" dirty="0">
-                <a:solidFill>
-                  <a:srgbClr val="4C1D95"/>
+              <a:rPr lang="en-US" sz="1200" b="1" dirty="0">
+                <a:solidFill>
+                  <a:srgbClr val="4338CA"/>
                 </a:solidFill>
                 <a:latin typeface="Trebuchet MS" pitchFamily="34" charset="0"/>
                 <a:ea typeface="Trebuchet MS" pitchFamily="34" charset="-122"/>
                 <a:cs typeface="Trebuchet MS" pitchFamily="34" charset="-120"/>
               </a:rPr>
-              <a:t>over-</a:t>
-            </a:r>
-            <a:endParaRPr lang="en-US" sz="1300" dirty="0"/>
+              <a:t>build</a:t>
+            </a:r>
+            <a:endParaRPr lang="en-US" sz="1200" dirty="0"/>
           </a:p>
         </p:txBody>
       </p:sp>
@@ -35192,58 +35326,35 @@
         </p:nvSpPr>
         <p:spPr>
           <a:xfrm>
-            <a:off x="2971800" y="2825496"/>
-            <a:ext cx="2834640" cy="402336"/>
-          </a:xfrm>
-          <a:prstGeom prst="rect">
-            <a:avLst/>
-          </a:prstGeom>
-          <a:solidFill>
-            <a:srgbClr val="F1F5F9"/>
-          </a:solidFill>
-          <a:ln w="12700">
-            <a:solidFill>
-              <a:srgbClr val="E2E8F0"/>
-            </a:solidFill>
-            <a:prstDash val="solid"/>
-          </a:ln>
-        </p:spPr>
-      </p:sp>
-      <p:sp>
-        <p:nvSpPr>
-          <p:cNvPr id="36" name="Shape 34"/>
-          <p:cNvSpPr/>
-          <p:nvPr/>
-        </p:nvSpPr>
-        <p:spPr>
-          <a:xfrm>
-            <a:off x="5943600" y="2825496"/>
-            <a:ext cx="2834640" cy="402336"/>
-          </a:xfrm>
-          <a:prstGeom prst="rect">
-            <a:avLst/>
-          </a:prstGeom>
-          <a:solidFill>
-            <a:srgbClr val="FCE7F3"/>
-          </a:solidFill>
-          <a:ln w="12700">
-            <a:solidFill>
-              <a:srgbClr val="E2E8F0"/>
-            </a:solidFill>
-            <a:prstDash val="solid"/>
-          </a:ln>
-        </p:spPr>
-      </p:sp>
-      <p:sp>
-        <p:nvSpPr>
-          <p:cNvPr id="37" name="Text 35"/>
-          <p:cNvSpPr/>
-          <p:nvPr/>
-        </p:nvSpPr>
-        <p:spPr>
-          <a:xfrm>
-            <a:off x="5943600" y="2825496"/>
-            <a:ext cx="2834640" cy="402336"/>
+            <a:off x="2542032" y="4023360"/>
+            <a:ext cx="2011680" cy="402336"/>
+          </a:xfrm>
+          <a:prstGeom prst="rect">
+            <a:avLst>
+              <a:gd name="adj" fmla="val 13636"/>
+            </a:avLst>
+          </a:prstGeom>
+          <a:solidFill>
+            <a:srgbClr val="EEF2FF"/>
+          </a:solidFill>
+          <a:ln w="12700">
+            <a:solidFill>
+              <a:srgbClr val="6366F1"/>
+            </a:solidFill>
+            <a:prstDash val="solid"/>
+          </a:ln>
+        </p:spPr>
+      </p:sp>
+      <p:sp>
+        <p:nvSpPr>
+          <p:cNvPr id="36" name="Text 34"/>
+          <p:cNvSpPr/>
+          <p:nvPr/>
+        </p:nvSpPr>
+        <p:spPr>
+          <a:xfrm>
+            <a:off x="2542032" y="4023360"/>
+            <a:ext cx="2011680" cy="402336"/>
           </a:xfrm>
           <a:prstGeom prst="rect">
             <a:avLst/>
@@ -35259,55 +35370,57 @@
               <a:buNone/>
             </a:pPr>
             <a:r>
-              <a:rPr lang="en-US" sz="1300" b="1" dirty="0">
-                <a:solidFill>
-                  <a:srgbClr val="9D174D"/>
+              <a:rPr lang="en-US" sz="1200" b="1" dirty="0">
+                <a:solidFill>
+                  <a:srgbClr val="4338CA"/>
                 </a:solidFill>
                 <a:latin typeface="Trebuchet MS" pitchFamily="34" charset="0"/>
                 <a:ea typeface="Trebuchet MS" pitchFamily="34" charset="-122"/>
                 <a:cs typeface="Trebuchet MS" pitchFamily="34" charset="-120"/>
               </a:rPr>
-              <a:t>-ings</a:t>
-            </a:r>
-            <a:endParaRPr lang="en-US" sz="1300" dirty="0"/>
-          </a:p>
-        </p:txBody>
-      </p:sp>
-      <p:sp>
-        <p:nvSpPr>
-          <p:cNvPr id="38" name="Shape 36"/>
-          <p:cNvSpPr/>
-          <p:nvPr/>
-        </p:nvSpPr>
-        <p:spPr>
-          <a:xfrm>
-            <a:off x="365760" y="3246120"/>
-            <a:ext cx="2468880" cy="402336"/>
-          </a:xfrm>
-          <a:prstGeom prst="rect">
-            <a:avLst/>
-          </a:prstGeom>
-          <a:solidFill>
-            <a:srgbClr val="DDD6FE"/>
-          </a:solidFill>
-          <a:ln w="12700">
-            <a:solidFill>
-              <a:srgbClr val="E2E8F0"/>
-            </a:solidFill>
-            <a:prstDash val="solid"/>
-          </a:ln>
-        </p:spPr>
-      </p:sp>
-      <p:sp>
-        <p:nvSpPr>
-          <p:cNvPr id="39" name="Text 37"/>
-          <p:cNvSpPr/>
-          <p:nvPr/>
-        </p:nvSpPr>
-        <p:spPr>
-          <a:xfrm>
-            <a:off x="365760" y="3246120"/>
-            <a:ext cx="2468880" cy="402336"/>
+              <a:t>builds</a:t>
+            </a:r>
+            <a:endParaRPr lang="en-US" sz="1200" dirty="0"/>
+          </a:p>
+        </p:txBody>
+      </p:sp>
+      <p:sp>
+        <p:nvSpPr>
+          <p:cNvPr id="37" name="Shape 35"/>
+          <p:cNvSpPr/>
+          <p:nvPr/>
+        </p:nvSpPr>
+        <p:spPr>
+          <a:xfrm>
+            <a:off x="4718304" y="4023360"/>
+            <a:ext cx="2011680" cy="402336"/>
+          </a:xfrm>
+          <a:prstGeom prst="rect">
+            <a:avLst>
+              <a:gd name="adj" fmla="val 13636"/>
+            </a:avLst>
+          </a:prstGeom>
+          <a:solidFill>
+            <a:srgbClr val="EEF2FF"/>
+          </a:solidFill>
+          <a:ln w="12700">
+            <a:solidFill>
+              <a:srgbClr val="6366F1"/>
+            </a:solidFill>
+            <a:prstDash val="solid"/>
+          </a:ln>
+        </p:spPr>
+      </p:sp>
+      <p:sp>
+        <p:nvSpPr>
+          <p:cNvPr id="38" name="Text 36"/>
+          <p:cNvSpPr/>
+          <p:nvPr/>
+        </p:nvSpPr>
+        <p:spPr>
+          <a:xfrm>
+            <a:off x="4718304" y="4023360"/>
+            <a:ext cx="2011680" cy="402336"/>
           </a:xfrm>
           <a:prstGeom prst="rect">
             <a:avLst/>
@@ -35323,80 +35436,57 @@
               <a:buNone/>
             </a:pPr>
             <a:r>
-              <a:rPr lang="en-US" sz="1300" b="1" dirty="0">
-                <a:solidFill>
-                  <a:srgbClr val="4C1D95"/>
+              <a:rPr lang="en-US" sz="1200" b="1" dirty="0">
+                <a:solidFill>
+                  <a:srgbClr val="4338CA"/>
                 </a:solidFill>
                 <a:latin typeface="Trebuchet MS" pitchFamily="34" charset="0"/>
                 <a:ea typeface="Trebuchet MS" pitchFamily="34" charset="-122"/>
                 <a:cs typeface="Trebuchet MS" pitchFamily="34" charset="-120"/>
               </a:rPr>
-              <a:t>un-</a:t>
-            </a:r>
-            <a:endParaRPr lang="en-US" sz="1300" dirty="0"/>
-          </a:p>
-        </p:txBody>
-      </p:sp>
-      <p:sp>
-        <p:nvSpPr>
-          <p:cNvPr id="40" name="Shape 38"/>
-          <p:cNvSpPr/>
-          <p:nvPr/>
-        </p:nvSpPr>
-        <p:spPr>
-          <a:xfrm>
-            <a:off x="2971800" y="3246120"/>
-            <a:ext cx="2834640" cy="402336"/>
-          </a:xfrm>
-          <a:prstGeom prst="rect">
-            <a:avLst/>
-          </a:prstGeom>
-          <a:solidFill>
-            <a:srgbClr val="F8FAFC"/>
-          </a:solidFill>
-          <a:ln w="12700">
-            <a:solidFill>
-              <a:srgbClr val="E2E8F0"/>
-            </a:solidFill>
-            <a:prstDash val="solid"/>
-          </a:ln>
-        </p:spPr>
-      </p:sp>
-      <p:sp>
-        <p:nvSpPr>
-          <p:cNvPr id="41" name="Shape 39"/>
-          <p:cNvSpPr/>
-          <p:nvPr/>
-        </p:nvSpPr>
-        <p:spPr>
-          <a:xfrm>
-            <a:off x="5943600" y="3246120"/>
-            <a:ext cx="2834640" cy="402336"/>
-          </a:xfrm>
-          <a:prstGeom prst="rect">
-            <a:avLst/>
-          </a:prstGeom>
-          <a:solidFill>
-            <a:srgbClr val="FCE7F3"/>
-          </a:solidFill>
-          <a:ln w="12700">
-            <a:solidFill>
-              <a:srgbClr val="E2E8F0"/>
-            </a:solidFill>
-            <a:prstDash val="solid"/>
-          </a:ln>
-        </p:spPr>
-      </p:sp>
-      <p:sp>
-        <p:nvSpPr>
-          <p:cNvPr id="42" name="Text 40"/>
-          <p:cNvSpPr/>
-          <p:nvPr/>
-        </p:nvSpPr>
-        <p:spPr>
-          <a:xfrm>
-            <a:off x="5943600" y="3246120"/>
-            <a:ext cx="2834640" cy="402336"/>
+              <a:t>builder</a:t>
+            </a:r>
+            <a:endParaRPr lang="en-US" sz="1200" dirty="0"/>
+          </a:p>
+        </p:txBody>
+      </p:sp>
+      <p:sp>
+        <p:nvSpPr>
+          <p:cNvPr id="39" name="Shape 37"/>
+          <p:cNvSpPr/>
+          <p:nvPr/>
+        </p:nvSpPr>
+        <p:spPr>
+          <a:xfrm>
+            <a:off x="6894576" y="4023360"/>
+            <a:ext cx="2011680" cy="402336"/>
+          </a:xfrm>
+          <a:prstGeom prst="rect">
+            <a:avLst>
+              <a:gd name="adj" fmla="val 13636"/>
+            </a:avLst>
+          </a:prstGeom>
+          <a:solidFill>
+            <a:srgbClr val="EEF2FF"/>
+          </a:solidFill>
+          <a:ln w="12700">
+            <a:solidFill>
+              <a:srgbClr val="6366F1"/>
+            </a:solidFill>
+            <a:prstDash val="solid"/>
+          </a:ln>
+        </p:spPr>
+      </p:sp>
+      <p:sp>
+        <p:nvSpPr>
+          <p:cNvPr id="40" name="Text 38"/>
+          <p:cNvSpPr/>
+          <p:nvPr/>
+        </p:nvSpPr>
+        <p:spPr>
+          <a:xfrm>
+            <a:off x="6894576" y="4023360"/>
+            <a:ext cx="2011680" cy="402336"/>
           </a:xfrm>
           <a:prstGeom prst="rect">
             <a:avLst/>
@@ -35412,30 +35502,57 @@
               <a:buNone/>
             </a:pPr>
             <a:r>
-              <a:rPr lang="en-US" sz="1300" b="1" dirty="0">
-                <a:solidFill>
-                  <a:srgbClr val="9D174D"/>
+              <a:rPr lang="en-US" sz="1200" b="1" dirty="0">
+                <a:solidFill>
+                  <a:srgbClr val="4338CA"/>
                 </a:solidFill>
                 <a:latin typeface="Trebuchet MS" pitchFamily="34" charset="0"/>
                 <a:ea typeface="Trebuchet MS" pitchFamily="34" charset="-122"/>
                 <a:cs typeface="Trebuchet MS" pitchFamily="34" charset="-120"/>
               </a:rPr>
-              <a:t>-able</a:t>
-            </a:r>
-            <a:endParaRPr lang="en-US" sz="1300" dirty="0"/>
-          </a:p>
-        </p:txBody>
-      </p:sp>
-      <p:sp>
-        <p:nvSpPr>
-          <p:cNvPr id="43" name="Text 41"/>
-          <p:cNvSpPr/>
-          <p:nvPr/>
-        </p:nvSpPr>
-        <p:spPr>
-          <a:xfrm>
-            <a:off x="365760" y="3611880"/>
-            <a:ext cx="1828800" cy="347472"/>
+              <a:t>rebuild</a:t>
+            </a:r>
+            <a:endParaRPr lang="en-US" sz="1200" dirty="0"/>
+          </a:p>
+        </p:txBody>
+      </p:sp>
+      <p:sp>
+        <p:nvSpPr>
+          <p:cNvPr id="41" name="Shape 39"/>
+          <p:cNvSpPr/>
+          <p:nvPr/>
+        </p:nvSpPr>
+        <p:spPr>
+          <a:xfrm>
+            <a:off x="365760" y="4498848"/>
+            <a:ext cx="2011680" cy="402336"/>
+          </a:xfrm>
+          <a:prstGeom prst="rect">
+            <a:avLst>
+              <a:gd name="adj" fmla="val 13636"/>
+            </a:avLst>
+          </a:prstGeom>
+          <a:solidFill>
+            <a:srgbClr val="EEF2FF"/>
+          </a:solidFill>
+          <a:ln w="12700">
+            <a:solidFill>
+              <a:srgbClr val="6366F1"/>
+            </a:solidFill>
+            <a:prstDash val="solid"/>
+          </a:ln>
+        </p:spPr>
+      </p:sp>
+      <p:sp>
+        <p:nvSpPr>
+          <p:cNvPr id="42" name="Text 40"/>
+          <p:cNvSpPr/>
+          <p:nvPr/>
+        </p:nvSpPr>
+        <p:spPr>
+          <a:xfrm>
+            <a:off x="365760" y="4498848"/>
+            <a:ext cx="2011680" cy="402336"/>
           </a:xfrm>
           <a:prstGeom prst="rect">
             <a:avLst/>
@@ -35447,547 +35564,19 @@
           <a:bodyPr wrap="square" lIns="0" tIns="0" rIns="0" bIns="0" rtlCol="0" anchor="ctr"/>
           <a:lstStyle/>
           <a:p>
-            <a:pPr algn="l" indent="0" marL="0">
+            <a:pPr algn="ctr" indent="0" marL="0">
               <a:buNone/>
             </a:pPr>
             <a:r>
               <a:rPr lang="en-US" sz="1200" b="1" dirty="0">
                 <a:solidFill>
-                  <a:srgbClr val="0F172A"/>
+                  <a:srgbClr val="4338CA"/>
                 </a:solidFill>
                 <a:latin typeface="Trebuchet MS" pitchFamily="34" charset="0"/>
                 <a:ea typeface="Trebuchet MS" pitchFamily="34" charset="-122"/>
                 <a:cs typeface="Trebuchet MS" pitchFamily="34" charset="-120"/>
               </a:rPr>
-              <a:t>Sample words:</a:t>
-            </a:r>
-            <a:endParaRPr lang="en-US" sz="1200" dirty="0"/>
-          </a:p>
-        </p:txBody>
-      </p:sp>
-      <p:sp>
-        <p:nvSpPr>
-          <p:cNvPr id="44" name="Shape 42"/>
-          <p:cNvSpPr/>
-          <p:nvPr/>
-        </p:nvSpPr>
-        <p:spPr>
-          <a:xfrm>
-            <a:off x="365760" y="4023360"/>
-            <a:ext cx="2011680" cy="402336"/>
-          </a:xfrm>
-          <a:prstGeom prst="rect">
-            <a:avLst>
-              <a:gd name="adj" fmla="val 13636"/>
-            </a:avLst>
-          </a:prstGeom>
-          <a:solidFill>
-            <a:srgbClr val="EEF2FF"/>
-          </a:solidFill>
-          <a:ln w="12700">
-            <a:solidFill>
-              <a:srgbClr val="6366F1"/>
-            </a:solidFill>
-            <a:prstDash val="solid"/>
-          </a:ln>
-        </p:spPr>
-      </p:sp>
-      <p:sp>
-        <p:nvSpPr>
-          <p:cNvPr id="45" name="Text 43"/>
-          <p:cNvSpPr/>
-          <p:nvPr/>
-        </p:nvSpPr>
-        <p:spPr>
-          <a:xfrm>
-            <a:off x="365760" y="4023360"/>
-            <a:ext cx="2011680" cy="402336"/>
-          </a:xfrm>
-          <a:prstGeom prst="rect">
-            <a:avLst/>
-          </a:prstGeom>
-          <a:noFill/>
-          <a:ln/>
-        </p:spPr>
-        <p:txBody>
-          <a:bodyPr wrap="square" lIns="0" tIns="0" rIns="0" bIns="0" rtlCol="0" anchor="ctr"/>
-          <a:lstStyle/>
-          <a:p>
-            <a:pPr algn="ctr" indent="0" marL="0">
-              <a:buNone/>
-            </a:pPr>
-            <a:r>
-              <a:rPr lang="en-US" sz="1200" b="1" dirty="0">
-                <a:solidFill>
-                  <a:srgbClr val="4338CA"/>
-                </a:solidFill>
-                <a:latin typeface="Trebuchet MS" pitchFamily="34" charset="0"/>
-                <a:ea typeface="Trebuchet MS" pitchFamily="34" charset="-122"/>
-                <a:cs typeface="Trebuchet MS" pitchFamily="34" charset="-120"/>
-              </a:rPr>
-              <a:t>builder</a:t>
-            </a:r>
-            <a:endParaRPr lang="en-US" sz="1200" dirty="0"/>
-          </a:p>
-        </p:txBody>
-      </p:sp>
-      <p:sp>
-        <p:nvSpPr>
-          <p:cNvPr id="46" name="Shape 44"/>
-          <p:cNvSpPr/>
-          <p:nvPr/>
-        </p:nvSpPr>
-        <p:spPr>
-          <a:xfrm>
-            <a:off x="2542032" y="4023360"/>
-            <a:ext cx="2011680" cy="402336"/>
-          </a:xfrm>
-          <a:prstGeom prst="rect">
-            <a:avLst>
-              <a:gd name="adj" fmla="val 13636"/>
-            </a:avLst>
-          </a:prstGeom>
-          <a:solidFill>
-            <a:srgbClr val="EEF2FF"/>
-          </a:solidFill>
-          <a:ln w="12700">
-            <a:solidFill>
-              <a:srgbClr val="6366F1"/>
-            </a:solidFill>
-            <a:prstDash val="solid"/>
-          </a:ln>
-        </p:spPr>
-      </p:sp>
-      <p:sp>
-        <p:nvSpPr>
-          <p:cNvPr id="47" name="Text 45"/>
-          <p:cNvSpPr/>
-          <p:nvPr/>
-        </p:nvSpPr>
-        <p:spPr>
-          <a:xfrm>
-            <a:off x="2542032" y="4023360"/>
-            <a:ext cx="2011680" cy="402336"/>
-          </a:xfrm>
-          <a:prstGeom prst="rect">
-            <a:avLst/>
-          </a:prstGeom>
-          <a:noFill/>
-          <a:ln/>
-        </p:spPr>
-        <p:txBody>
-          <a:bodyPr wrap="square" lIns="0" tIns="0" rIns="0" bIns="0" rtlCol="0" anchor="ctr"/>
-          <a:lstStyle/>
-          <a:p>
-            <a:pPr algn="ctr" indent="0" marL="0">
-              <a:buNone/>
-            </a:pPr>
-            <a:r>
-              <a:rPr lang="en-US" sz="1200" b="1" dirty="0">
-                <a:solidFill>
-                  <a:srgbClr val="4338CA"/>
-                </a:solidFill>
-                <a:latin typeface="Trebuchet MS" pitchFamily="34" charset="0"/>
-                <a:ea typeface="Trebuchet MS" pitchFamily="34" charset="-122"/>
-                <a:cs typeface="Trebuchet MS" pitchFamily="34" charset="-120"/>
-              </a:rPr>
-              <a:t>building</a:t>
-            </a:r>
-            <a:endParaRPr lang="en-US" sz="1200" dirty="0"/>
-          </a:p>
-        </p:txBody>
-      </p:sp>
-      <p:sp>
-        <p:nvSpPr>
-          <p:cNvPr id="48" name="Shape 46"/>
-          <p:cNvSpPr/>
-          <p:nvPr/>
-        </p:nvSpPr>
-        <p:spPr>
-          <a:xfrm>
-            <a:off x="4718304" y="4023360"/>
-            <a:ext cx="2011680" cy="402336"/>
-          </a:xfrm>
-          <a:prstGeom prst="rect">
-            <a:avLst>
-              <a:gd name="adj" fmla="val 13636"/>
-            </a:avLst>
-          </a:prstGeom>
-          <a:solidFill>
-            <a:srgbClr val="EEF2FF"/>
-          </a:solidFill>
-          <a:ln w="12700">
-            <a:solidFill>
-              <a:srgbClr val="6366F1"/>
-            </a:solidFill>
-            <a:prstDash val="solid"/>
-          </a:ln>
-        </p:spPr>
-      </p:sp>
-      <p:sp>
-        <p:nvSpPr>
-          <p:cNvPr id="49" name="Text 47"/>
-          <p:cNvSpPr/>
-          <p:nvPr/>
-        </p:nvSpPr>
-        <p:spPr>
-          <a:xfrm>
-            <a:off x="4718304" y="4023360"/>
-            <a:ext cx="2011680" cy="402336"/>
-          </a:xfrm>
-          <a:prstGeom prst="rect">
-            <a:avLst/>
-          </a:prstGeom>
-          <a:noFill/>
-          <a:ln/>
-        </p:spPr>
-        <p:txBody>
-          <a:bodyPr wrap="square" lIns="0" tIns="0" rIns="0" bIns="0" rtlCol="0" anchor="ctr"/>
-          <a:lstStyle/>
-          <a:p>
-            <a:pPr algn="ctr" indent="0" marL="0">
-              <a:buNone/>
-            </a:pPr>
-            <a:r>
-              <a:rPr lang="en-US" sz="1200" b="1" dirty="0">
-                <a:solidFill>
-                  <a:srgbClr val="4338CA"/>
-                </a:solidFill>
-                <a:latin typeface="Trebuchet MS" pitchFamily="34" charset="0"/>
-                <a:ea typeface="Trebuchet MS" pitchFamily="34" charset="-122"/>
-                <a:cs typeface="Trebuchet MS" pitchFamily="34" charset="-120"/>
-              </a:rPr>
-              <a:t>rebuild</a:t>
-            </a:r>
-            <a:endParaRPr lang="en-US" sz="1200" dirty="0"/>
-          </a:p>
-        </p:txBody>
-      </p:sp>
-      <p:sp>
-        <p:nvSpPr>
-          <p:cNvPr id="50" name="Shape 48"/>
-          <p:cNvSpPr/>
-          <p:nvPr/>
-        </p:nvSpPr>
-        <p:spPr>
-          <a:xfrm>
-            <a:off x="6894576" y="4023360"/>
-            <a:ext cx="2011680" cy="402336"/>
-          </a:xfrm>
-          <a:prstGeom prst="rect">
-            <a:avLst>
-              <a:gd name="adj" fmla="val 13636"/>
-            </a:avLst>
-          </a:prstGeom>
-          <a:solidFill>
-            <a:srgbClr val="EEF2FF"/>
-          </a:solidFill>
-          <a:ln w="12700">
-            <a:solidFill>
-              <a:srgbClr val="6366F1"/>
-            </a:solidFill>
-            <a:prstDash val="solid"/>
-          </a:ln>
-        </p:spPr>
-      </p:sp>
-      <p:sp>
-        <p:nvSpPr>
-          <p:cNvPr id="51" name="Text 49"/>
-          <p:cNvSpPr/>
-          <p:nvPr/>
-        </p:nvSpPr>
-        <p:spPr>
-          <a:xfrm>
-            <a:off x="6894576" y="4023360"/>
-            <a:ext cx="2011680" cy="402336"/>
-          </a:xfrm>
-          <a:prstGeom prst="rect">
-            <a:avLst/>
-          </a:prstGeom>
-          <a:noFill/>
-          <a:ln/>
-        </p:spPr>
-        <p:txBody>
-          <a:bodyPr wrap="square" lIns="0" tIns="0" rIns="0" bIns="0" rtlCol="0" anchor="ctr"/>
-          <a:lstStyle/>
-          <a:p>
-            <a:pPr algn="ctr" indent="0" marL="0">
-              <a:buNone/>
-            </a:pPr>
-            <a:r>
-              <a:rPr lang="en-US" sz="1200" b="1" dirty="0">
-                <a:solidFill>
-                  <a:srgbClr val="4338CA"/>
-                </a:solidFill>
-                <a:latin typeface="Trebuchet MS" pitchFamily="34" charset="0"/>
-                <a:ea typeface="Trebuchet MS" pitchFamily="34" charset="-122"/>
-                <a:cs typeface="Trebuchet MS" pitchFamily="34" charset="-120"/>
-              </a:rPr>
-              <a:t>upbuilding</a:t>
-            </a:r>
-            <a:endParaRPr lang="en-US" sz="1200" dirty="0"/>
-          </a:p>
-        </p:txBody>
-      </p:sp>
-      <p:sp>
-        <p:nvSpPr>
-          <p:cNvPr id="52" name="Shape 50"/>
-          <p:cNvSpPr/>
-          <p:nvPr/>
-        </p:nvSpPr>
-        <p:spPr>
-          <a:xfrm>
-            <a:off x="365760" y="4498848"/>
-            <a:ext cx="2011680" cy="402336"/>
-          </a:xfrm>
-          <a:prstGeom prst="rect">
-            <a:avLst>
-              <a:gd name="adj" fmla="val 13636"/>
-            </a:avLst>
-          </a:prstGeom>
-          <a:solidFill>
-            <a:srgbClr val="EEF2FF"/>
-          </a:solidFill>
-          <a:ln w="12700">
-            <a:solidFill>
-              <a:srgbClr val="6366F1"/>
-            </a:solidFill>
-            <a:prstDash val="solid"/>
-          </a:ln>
-        </p:spPr>
-      </p:sp>
-      <p:sp>
-        <p:nvSpPr>
-          <p:cNvPr id="53" name="Text 51"/>
-          <p:cNvSpPr/>
-          <p:nvPr/>
-        </p:nvSpPr>
-        <p:spPr>
-          <a:xfrm>
-            <a:off x="365760" y="4498848"/>
-            <a:ext cx="2011680" cy="402336"/>
-          </a:xfrm>
-          <a:prstGeom prst="rect">
-            <a:avLst/>
-          </a:prstGeom>
-          <a:noFill/>
-          <a:ln/>
-        </p:spPr>
-        <p:txBody>
-          <a:bodyPr wrap="square" lIns="0" tIns="0" rIns="0" bIns="0" rtlCol="0" anchor="ctr"/>
-          <a:lstStyle/>
-          <a:p>
-            <a:pPr algn="ctr" indent="0" marL="0">
-              <a:buNone/>
-            </a:pPr>
-            <a:r>
-              <a:rPr lang="en-US" sz="1200" b="1" dirty="0">
-                <a:solidFill>
-                  <a:srgbClr val="4338CA"/>
-                </a:solidFill>
-                <a:latin typeface="Trebuchet MS" pitchFamily="34" charset="0"/>
-                <a:ea typeface="Trebuchet MS" pitchFamily="34" charset="-122"/>
-                <a:cs typeface="Trebuchet MS" pitchFamily="34" charset="-120"/>
-              </a:rPr>
               <a:t>builders</a:t>
-            </a:r>
-            <a:endParaRPr lang="en-US" sz="1200" dirty="0"/>
-          </a:p>
-        </p:txBody>
-      </p:sp>
-      <p:sp>
-        <p:nvSpPr>
-          <p:cNvPr id="54" name="Shape 52"/>
-          <p:cNvSpPr/>
-          <p:nvPr/>
-        </p:nvSpPr>
-        <p:spPr>
-          <a:xfrm>
-            <a:off x="2542032" y="4498848"/>
-            <a:ext cx="2011680" cy="402336"/>
-          </a:xfrm>
-          <a:prstGeom prst="rect">
-            <a:avLst>
-              <a:gd name="adj" fmla="val 13636"/>
-            </a:avLst>
-          </a:prstGeom>
-          <a:solidFill>
-            <a:srgbClr val="EEF2FF"/>
-          </a:solidFill>
-          <a:ln w="12700">
-            <a:solidFill>
-              <a:srgbClr val="6366F1"/>
-            </a:solidFill>
-            <a:prstDash val="solid"/>
-          </a:ln>
-        </p:spPr>
-      </p:sp>
-      <p:sp>
-        <p:nvSpPr>
-          <p:cNvPr id="55" name="Text 53"/>
-          <p:cNvSpPr/>
-          <p:nvPr/>
-        </p:nvSpPr>
-        <p:spPr>
-          <a:xfrm>
-            <a:off x="2542032" y="4498848"/>
-            <a:ext cx="2011680" cy="402336"/>
-          </a:xfrm>
-          <a:prstGeom prst="rect">
-            <a:avLst/>
-          </a:prstGeom>
-          <a:noFill/>
-          <a:ln/>
-        </p:spPr>
-        <p:txBody>
-          <a:bodyPr wrap="square" lIns="0" tIns="0" rIns="0" bIns="0" rtlCol="0" anchor="ctr"/>
-          <a:lstStyle/>
-          <a:p>
-            <a:pPr algn="ctr" indent="0" marL="0">
-              <a:buNone/>
-            </a:pPr>
-            <a:r>
-              <a:rPr lang="en-US" sz="1200" b="1" dirty="0">
-                <a:solidFill>
-                  <a:srgbClr val="4338CA"/>
-                </a:solidFill>
-                <a:latin typeface="Trebuchet MS" pitchFamily="34" charset="0"/>
-                <a:ea typeface="Trebuchet MS" pitchFamily="34" charset="-122"/>
-                <a:cs typeface="Trebuchet MS" pitchFamily="34" charset="-120"/>
-              </a:rPr>
-              <a:t>outbuilding</a:t>
-            </a:r>
-            <a:endParaRPr lang="en-US" sz="1200" dirty="0"/>
-          </a:p>
-        </p:txBody>
-      </p:sp>
-      <p:sp>
-        <p:nvSpPr>
-          <p:cNvPr id="56" name="Shape 54"/>
-          <p:cNvSpPr/>
-          <p:nvPr/>
-        </p:nvSpPr>
-        <p:spPr>
-          <a:xfrm>
-            <a:off x="4718304" y="4498848"/>
-            <a:ext cx="2011680" cy="402336"/>
-          </a:xfrm>
-          <a:prstGeom prst="rect">
-            <a:avLst>
-              <a:gd name="adj" fmla="val 13636"/>
-            </a:avLst>
-          </a:prstGeom>
-          <a:solidFill>
-            <a:srgbClr val="EEF2FF"/>
-          </a:solidFill>
-          <a:ln w="12700">
-            <a:solidFill>
-              <a:srgbClr val="6366F1"/>
-            </a:solidFill>
-            <a:prstDash val="solid"/>
-          </a:ln>
-        </p:spPr>
-      </p:sp>
-      <p:sp>
-        <p:nvSpPr>
-          <p:cNvPr id="57" name="Text 55"/>
-          <p:cNvSpPr/>
-          <p:nvPr/>
-        </p:nvSpPr>
-        <p:spPr>
-          <a:xfrm>
-            <a:off x="4718304" y="4498848"/>
-            <a:ext cx="2011680" cy="402336"/>
-          </a:xfrm>
-          <a:prstGeom prst="rect">
-            <a:avLst/>
-          </a:prstGeom>
-          <a:noFill/>
-          <a:ln/>
-        </p:spPr>
-        <p:txBody>
-          <a:bodyPr wrap="square" lIns="0" tIns="0" rIns="0" bIns="0" rtlCol="0" anchor="ctr"/>
-          <a:lstStyle/>
-          <a:p>
-            <a:pPr algn="ctr" indent="0" marL="0">
-              <a:buNone/>
-            </a:pPr>
-            <a:r>
-              <a:rPr lang="en-US" sz="1200" b="1" dirty="0">
-                <a:solidFill>
-                  <a:srgbClr val="4338CA"/>
-                </a:solidFill>
-                <a:latin typeface="Trebuchet MS" pitchFamily="34" charset="0"/>
-                <a:ea typeface="Trebuchet MS" pitchFamily="34" charset="-122"/>
-                <a:cs typeface="Trebuchet MS" pitchFamily="34" charset="-120"/>
-              </a:rPr>
-              <a:t>rebuilding</a:t>
-            </a:r>
-            <a:endParaRPr lang="en-US" sz="1200" dirty="0"/>
-          </a:p>
-        </p:txBody>
-      </p:sp>
-      <p:sp>
-        <p:nvSpPr>
-          <p:cNvPr id="58" name="Shape 56"/>
-          <p:cNvSpPr/>
-          <p:nvPr/>
-        </p:nvSpPr>
-        <p:spPr>
-          <a:xfrm>
-            <a:off x="6894576" y="4498848"/>
-            <a:ext cx="2011680" cy="402336"/>
-          </a:xfrm>
-          <a:prstGeom prst="rect">
-            <a:avLst>
-              <a:gd name="adj" fmla="val 13636"/>
-            </a:avLst>
-          </a:prstGeom>
-          <a:solidFill>
-            <a:srgbClr val="EEF2FF"/>
-          </a:solidFill>
-          <a:ln w="12700">
-            <a:solidFill>
-              <a:srgbClr val="6366F1"/>
-            </a:solidFill>
-            <a:prstDash val="solid"/>
-          </a:ln>
-        </p:spPr>
-      </p:sp>
-      <p:sp>
-        <p:nvSpPr>
-          <p:cNvPr id="59" name="Text 57"/>
-          <p:cNvSpPr/>
-          <p:nvPr/>
-        </p:nvSpPr>
-        <p:spPr>
-          <a:xfrm>
-            <a:off x="6894576" y="4498848"/>
-            <a:ext cx="2011680" cy="402336"/>
-          </a:xfrm>
-          <a:prstGeom prst="rect">
-            <a:avLst/>
-          </a:prstGeom>
-          <a:noFill/>
-          <a:ln/>
-        </p:spPr>
-        <p:txBody>
-          <a:bodyPr wrap="square" lIns="0" tIns="0" rIns="0" bIns="0" rtlCol="0" anchor="ctr"/>
-          <a:lstStyle/>
-          <a:p>
-            <a:pPr algn="ctr" indent="0" marL="0">
-              <a:buNone/>
-            </a:pPr>
-            <a:r>
-              <a:rPr lang="en-US" sz="1200" b="1" dirty="0">
-                <a:solidFill>
-                  <a:srgbClr val="4338CA"/>
-                </a:solidFill>
-                <a:latin typeface="Trebuchet MS" pitchFamily="34" charset="0"/>
-                <a:ea typeface="Trebuchet MS" pitchFamily="34" charset="-122"/>
-                <a:cs typeface="Trebuchet MS" pitchFamily="34" charset="-120"/>
-              </a:rPr>
-              <a:t>buildable</a:t>
             </a:r>
             <a:endParaRPr lang="en-US" sz="1200" dirty="0"/>
           </a:p>
@@ -36279,7 +35868,7 @@
                 <a:ea typeface="Calibri" pitchFamily="34" charset="-122"/>
                 <a:cs typeface="Calibri" pitchFamily="34" charset="-120"/>
               </a:rPr>
-              <a:t>Word Labs  •  wordlabs.app  •  Root: 'build' = to construct or make</a:t>
+              <a:t>Word Labs  •  wordlabs.app  •  Root: 'build' = make by putting parts together</a:t>
             </a:r>
             <a:endParaRPr lang="en-US" sz="800" dirty="0"/>
           </a:p>
@@ -36443,7 +36032,7 @@
                 <a:ea typeface="Calibri" pitchFamily="34" charset="-122"/>
                 <a:cs typeface="Calibri" pitchFamily="34" charset="-120"/>
               </a:rPr>
-              <a:t>The core part of a word carrying its basic meaning. For example, 'build' means 'to construct or make'.</a:t>
+              <a:t>The core part of a word carrying its basic meaning. For example, 'build' means 'make by putting parts together'.</a:t>
             </a:r>
             <a:endParaRPr lang="en-US" sz="1350" dirty="0"/>
           </a:p>
@@ -37063,7 +36652,7 @@
                 <a:ea typeface="Calibri" pitchFamily="34" charset="-122"/>
                 <a:cs typeface="Calibri" pitchFamily="34" charset="-120"/>
               </a:rPr>
-              <a:t>Word Labs  •  wordlabs.app  •  Root: 'build' = to construct or make</a:t>
+              <a:t>Word Labs  •  wordlabs.app  •  Root: 'build' = make by putting parts together</a:t>
             </a:r>
             <a:endParaRPr lang="en-US" sz="800" dirty="0"/>
           </a:p>
@@ -37175,7 +36764,7 @@
                 <a:ea typeface="Calibri" pitchFamily="34" charset="-122"/>
                 <a:cs typeface="Calibri" pitchFamily="34" charset="-120"/>
               </a:rPr>
-              <a:t>1.  A 'builder' is a person who constructs or makes structures.</a:t>
+              <a:t>1.  'build' means 'make by putting parts together'.</a:t>
             </a:r>
             <a:endParaRPr lang="en-US" sz="1300" dirty="0"/>
           </a:p>
@@ -37314,7 +36903,7 @@
                 <a:ea typeface="Calibri" pitchFamily="34" charset="-122"/>
                 <a:cs typeface="Calibri" pitchFamily="34" charset="-120"/>
               </a:rPr>
-              <a:t>2.  Adding '-ing' to 'build' gives you the word 'building'.</a:t>
+              <a:t>2.  'builds' means 'breaks something into small pieces'.</a:t>
             </a:r>
             <a:endParaRPr lang="en-US" sz="1300" dirty="0"/>
           </a:p>
@@ -37337,11 +36926,11 @@
             </a:avLst>
           </a:prstGeom>
           <a:solidFill>
-            <a:srgbClr val="DCFCE7"/>
-          </a:solidFill>
-          <a:ln w="12700">
-            <a:solidFill>
-              <a:srgbClr val="16A34A"/>
+            <a:srgbClr val="FEE2E2"/>
+          </a:solidFill>
+          <a:ln w="12700">
+            <a:solidFill>
+              <a:srgbClr val="DC2626"/>
             </a:solidFill>
             <a:prstDash val="solid"/>
           </a:ln>
@@ -37374,13 +36963,13 @@
             <a:r>
               <a:rPr lang="en-US" sz="1100" b="1" dirty="0">
                 <a:solidFill>
-                  <a:srgbClr val="16A34A"/>
+                  <a:srgbClr val="DC2626"/>
                 </a:solidFill>
                 <a:latin typeface="Trebuchet MS" pitchFamily="34" charset="0"/>
                 <a:ea typeface="Trebuchet MS" pitchFamily="34" charset="-122"/>
                 <a:cs typeface="Trebuchet MS" pitchFamily="34" charset="-120"/>
               </a:rPr>
-              <a:t>TRUE</a:t>
+              <a:t>FALSE</a:t>
             </a:r>
             <a:endParaRPr lang="en-US" sz="1100" dirty="0"/>
           </a:p>
@@ -37453,7 +37042,7 @@
                 <a:ea typeface="Calibri" pitchFamily="34" charset="-122"/>
                 <a:cs typeface="Calibri" pitchFamily="34" charset="-120"/>
               </a:rPr>
-              <a:t>3.  The root 'build' comes from the ancient Greek language.</a:t>
+              <a:t>3.  'builds' means 'puts together the parts of something to make it whole'.</a:t>
             </a:r>
             <a:endParaRPr lang="en-US" sz="1300" dirty="0"/>
           </a:p>
@@ -37476,11 +37065,11 @@
             </a:avLst>
           </a:prstGeom>
           <a:solidFill>
-            <a:srgbClr val="FEE2E2"/>
-          </a:solidFill>
-          <a:ln w="12700">
-            <a:solidFill>
-              <a:srgbClr val="DC2626"/>
+            <a:srgbClr val="DCFCE7"/>
+          </a:solidFill>
+          <a:ln w="12700">
+            <a:solidFill>
+              <a:srgbClr val="16A34A"/>
             </a:solidFill>
             <a:prstDash val="solid"/>
           </a:ln>
@@ -37513,13 +37102,13 @@
             <a:r>
               <a:rPr lang="en-US" sz="1100" b="1" dirty="0">
                 <a:solidFill>
-                  <a:srgbClr val="DC2626"/>
+                  <a:srgbClr val="16A34A"/>
                 </a:solidFill>
                 <a:latin typeface="Trebuchet MS" pitchFamily="34" charset="0"/>
                 <a:ea typeface="Trebuchet MS" pitchFamily="34" charset="-122"/>
                 <a:cs typeface="Trebuchet MS" pitchFamily="34" charset="-120"/>
               </a:rPr>
-              <a:t>FALSE</a:t>
+              <a:t>TRUE</a:t>
             </a:r>
             <a:endParaRPr lang="en-US" sz="1100" dirty="0"/>
           </a:p>
@@ -37592,7 +37181,7 @@
                 <a:ea typeface="Calibri" pitchFamily="34" charset="-122"/>
                 <a:cs typeface="Calibri" pitchFamily="34" charset="-120"/>
               </a:rPr>
-              <a:t>4.  The prefix 'out' in 'outbuilding' means 'before' or 'earlier'.</a:t>
+              <a:t>4.  'build' means 'to make something by putting parts together'.</a:t>
             </a:r>
             <a:endParaRPr lang="en-US" sz="1300" dirty="0"/>
           </a:p>
@@ -37615,11 +37204,11 @@
             </a:avLst>
           </a:prstGeom>
           <a:solidFill>
-            <a:srgbClr val="FEE2E2"/>
-          </a:solidFill>
-          <a:ln w="12700">
-            <a:solidFill>
-              <a:srgbClr val="DC2626"/>
+            <a:srgbClr val="DCFCE7"/>
+          </a:solidFill>
+          <a:ln w="12700">
+            <a:solidFill>
+              <a:srgbClr val="16A34A"/>
             </a:solidFill>
             <a:prstDash val="solid"/>
           </a:ln>
@@ -37652,13 +37241,13 @@
             <a:r>
               <a:rPr lang="en-US" sz="1100" b="1" dirty="0">
                 <a:solidFill>
-                  <a:srgbClr val="DC2626"/>
+                  <a:srgbClr val="16A34A"/>
                 </a:solidFill>
                 <a:latin typeface="Trebuchet MS" pitchFamily="34" charset="0"/>
                 <a:ea typeface="Trebuchet MS" pitchFamily="34" charset="-122"/>
                 <a:cs typeface="Trebuchet MS" pitchFamily="34" charset="-120"/>
               </a:rPr>
-              <a:t>FALSE</a:t>
+              <a:t>TRUE</a:t>
             </a:r>
             <a:endParaRPr lang="en-US" sz="1100" dirty="0"/>
           </a:p>
@@ -37731,7 +37320,7 @@
                 <a:ea typeface="Calibri" pitchFamily="34" charset="-122"/>
                 <a:cs typeface="Calibri" pitchFamily="34" charset="-120"/>
               </a:rPr>
-              <a:t>5.  The word 'rebuild' contains the root 'build' with a prefix added to the front.</a:t>
+              <a:t>5.  'build' means 'to break something into small pieces'.</a:t>
             </a:r>
             <a:endParaRPr lang="en-US" sz="1300" dirty="0"/>
           </a:p>
@@ -37754,11 +37343,11 @@
             </a:avLst>
           </a:prstGeom>
           <a:solidFill>
-            <a:srgbClr val="DCFCE7"/>
-          </a:solidFill>
-          <a:ln w="12700">
-            <a:solidFill>
-              <a:srgbClr val="16A34A"/>
+            <a:srgbClr val="FEE2E2"/>
+          </a:solidFill>
+          <a:ln w="12700">
+            <a:solidFill>
+              <a:srgbClr val="DC2626"/>
             </a:solidFill>
             <a:prstDash val="solid"/>
           </a:ln>
@@ -37791,13 +37380,13 @@
             <a:r>
               <a:rPr lang="en-US" sz="1100" b="1" dirty="0">
                 <a:solidFill>
-                  <a:srgbClr val="16A34A"/>
+                  <a:srgbClr val="DC2626"/>
                 </a:solidFill>
                 <a:latin typeface="Trebuchet MS" pitchFamily="34" charset="0"/>
                 <a:ea typeface="Trebuchet MS" pitchFamily="34" charset="-122"/>
                 <a:cs typeface="Trebuchet MS" pitchFamily="34" charset="-120"/>
               </a:rPr>
-              <a:t>TRUE</a:t>
+              <a:t>FALSE</a:t>
             </a:r>
             <a:endParaRPr lang="en-US" sz="1100" dirty="0"/>
           </a:p>
@@ -38089,7 +37678,7 @@
                 <a:ea typeface="Calibri" pitchFamily="34" charset="-122"/>
                 <a:cs typeface="Calibri" pitchFamily="34" charset="-120"/>
               </a:rPr>
-              <a:t>Word Labs  •  wordlabs.app  •  Root: 'build' = to construct or make</a:t>
+              <a:t>Word Labs  •  wordlabs.app  •  Root: 'build' = make by putting parts together</a:t>
             </a:r>
             <a:endParaRPr lang="en-US" sz="800" dirty="0"/>
           </a:p>
@@ -38226,7 +37815,7 @@
                 <a:ea typeface="Trebuchet MS" pitchFamily="34" charset="-122"/>
                 <a:cs typeface="Trebuchet MS" pitchFamily="34" charset="-120"/>
               </a:rPr>
-              <a:t>to construct or make</a:t>
+              <a:t>make by putting parts together</a:t>
             </a:r>
             <a:endParaRPr lang="en-US" sz="2000" dirty="0"/>
           </a:p>
@@ -38265,7 +37854,7 @@
                 <a:ea typeface="Calibri" pitchFamily="34" charset="-122"/>
                 <a:cs typeface="Calibri" pitchFamily="34" charset="-120"/>
               </a:rPr>
-              <a:t>Origin: Latin: buildjan</a:t>
+              <a:t>Origin: Core English root</a:t>
             </a:r>
             <a:endParaRPr lang="en-US" sz="1100" dirty="0"/>
           </a:p>
@@ -38370,7 +37959,7 @@
                 <a:ea typeface="Trebuchet MS" pitchFamily="34" charset="-122"/>
                 <a:cs typeface="Trebuchet MS" pitchFamily="34" charset="-120"/>
               </a:rPr>
-              <a:t>builder</a:t>
+              <a:t>build</a:t>
             </a:r>
             <a:endParaRPr lang="en-US" sz="1300" dirty="0"/>
           </a:p>
@@ -38436,7 +38025,7 @@
                 <a:ea typeface="Trebuchet MS" pitchFamily="34" charset="-122"/>
                 <a:cs typeface="Trebuchet MS" pitchFamily="34" charset="-120"/>
               </a:rPr>
-              <a:t>building</a:t>
+              <a:t>builds</a:t>
             </a:r>
             <a:endParaRPr lang="en-US" sz="1300" dirty="0"/>
           </a:p>
@@ -38502,7 +38091,7 @@
                 <a:ea typeface="Trebuchet MS" pitchFamily="34" charset="-122"/>
                 <a:cs typeface="Trebuchet MS" pitchFamily="34" charset="-120"/>
               </a:rPr>
-              <a:t>rebuild</a:t>
+              <a:t>builder</a:t>
             </a:r>
             <a:endParaRPr lang="en-US" sz="1300" dirty="0"/>
           </a:p>
@@ -38568,7 +38157,7 @@
                 <a:ea typeface="Trebuchet MS" pitchFamily="34" charset="-122"/>
                 <a:cs typeface="Trebuchet MS" pitchFamily="34" charset="-120"/>
               </a:rPr>
-              <a:t>upbuilding</a:t>
+              <a:t>rebuild</a:t>
             </a:r>
             <a:endParaRPr lang="en-US" sz="1300" dirty="0"/>
           </a:p>
@@ -38635,138 +38224,6 @@
                 <a:cs typeface="Trebuchet MS" pitchFamily="34" charset="-120"/>
               </a:rPr>
               <a:t>builders</a:t>
-            </a:r>
-            <a:endParaRPr lang="en-US" sz="1300" dirty="0"/>
-          </a:p>
-        </p:txBody>
-      </p:sp>
-      <p:sp>
-        <p:nvSpPr>
-          <p:cNvPr id="26" name="Shape 24"/>
-          <p:cNvSpPr/>
-          <p:nvPr/>
-        </p:nvSpPr>
-        <p:spPr>
-          <a:xfrm>
-            <a:off x="2514600" y="3401568"/>
-            <a:ext cx="2011680" cy="502920"/>
-          </a:xfrm>
-          <a:prstGeom prst="rect">
-            <a:avLst>
-              <a:gd name="adj" fmla="val 14545"/>
-            </a:avLst>
-          </a:prstGeom>
-          <a:solidFill>
-            <a:srgbClr val="EEF2FF"/>
-          </a:solidFill>
-          <a:ln w="12700">
-            <a:solidFill>
-              <a:srgbClr val="6366F1"/>
-            </a:solidFill>
-            <a:prstDash val="solid"/>
-          </a:ln>
-        </p:spPr>
-      </p:sp>
-      <p:sp>
-        <p:nvSpPr>
-          <p:cNvPr id="27" name="Text 25"/>
-          <p:cNvSpPr/>
-          <p:nvPr/>
-        </p:nvSpPr>
-        <p:spPr>
-          <a:xfrm>
-            <a:off x="2514600" y="3401568"/>
-            <a:ext cx="2011680" cy="502920"/>
-          </a:xfrm>
-          <a:prstGeom prst="rect">
-            <a:avLst/>
-          </a:prstGeom>
-          <a:noFill/>
-          <a:ln/>
-        </p:spPr>
-        <p:txBody>
-          <a:bodyPr wrap="square" lIns="0" tIns="0" rIns="0" bIns="0" rtlCol="0" anchor="ctr"/>
-          <a:lstStyle/>
-          <a:p>
-            <a:pPr algn="ctr" indent="0" marL="0">
-              <a:buNone/>
-            </a:pPr>
-            <a:r>
-              <a:rPr lang="en-US" sz="1300" b="1" dirty="0">
-                <a:solidFill>
-                  <a:srgbClr val="4338CA"/>
-                </a:solidFill>
-                <a:latin typeface="Trebuchet MS" pitchFamily="34" charset="0"/>
-                <a:ea typeface="Trebuchet MS" pitchFamily="34" charset="-122"/>
-                <a:cs typeface="Trebuchet MS" pitchFamily="34" charset="-120"/>
-              </a:rPr>
-              <a:t>outbuilding</a:t>
-            </a:r>
-            <a:endParaRPr lang="en-US" sz="1300" dirty="0"/>
-          </a:p>
-        </p:txBody>
-      </p:sp>
-      <p:sp>
-        <p:nvSpPr>
-          <p:cNvPr id="28" name="Shape 26"/>
-          <p:cNvSpPr/>
-          <p:nvPr/>
-        </p:nvSpPr>
-        <p:spPr>
-          <a:xfrm>
-            <a:off x="4663440" y="3401568"/>
-            <a:ext cx="2011680" cy="502920"/>
-          </a:xfrm>
-          <a:prstGeom prst="rect">
-            <a:avLst>
-              <a:gd name="adj" fmla="val 14545"/>
-            </a:avLst>
-          </a:prstGeom>
-          <a:solidFill>
-            <a:srgbClr val="EEF2FF"/>
-          </a:solidFill>
-          <a:ln w="12700">
-            <a:solidFill>
-              <a:srgbClr val="6366F1"/>
-            </a:solidFill>
-            <a:prstDash val="solid"/>
-          </a:ln>
-        </p:spPr>
-      </p:sp>
-      <p:sp>
-        <p:nvSpPr>
-          <p:cNvPr id="29" name="Text 27"/>
-          <p:cNvSpPr/>
-          <p:nvPr/>
-        </p:nvSpPr>
-        <p:spPr>
-          <a:xfrm>
-            <a:off x="4663440" y="3401568"/>
-            <a:ext cx="2011680" cy="502920"/>
-          </a:xfrm>
-          <a:prstGeom prst="rect">
-            <a:avLst/>
-          </a:prstGeom>
-          <a:noFill/>
-          <a:ln/>
-        </p:spPr>
-        <p:txBody>
-          <a:bodyPr wrap="square" lIns="0" tIns="0" rIns="0" bIns="0" rtlCol="0" anchor="ctr"/>
-          <a:lstStyle/>
-          <a:p>
-            <a:pPr algn="ctr" indent="0" marL="0">
-              <a:buNone/>
-            </a:pPr>
-            <a:r>
-              <a:rPr lang="en-US" sz="1300" b="1" dirty="0">
-                <a:solidFill>
-                  <a:srgbClr val="4338CA"/>
-                </a:solidFill>
-                <a:latin typeface="Trebuchet MS" pitchFamily="34" charset="0"/>
-                <a:ea typeface="Trebuchet MS" pitchFamily="34" charset="-122"/>
-                <a:cs typeface="Trebuchet MS" pitchFamily="34" charset="-120"/>
-              </a:rPr>
-              <a:t>rebuilding</a:t>
             </a:r>
             <a:endParaRPr lang="en-US" sz="1300" dirty="0"/>
           </a:p>
@@ -39058,7 +38515,7 @@
                 <a:ea typeface="Calibri" pitchFamily="34" charset="-122"/>
                 <a:cs typeface="Calibri" pitchFamily="34" charset="-120"/>
               </a:rPr>
-              <a:t>Word Labs  •  wordlabs.app  •  Root: 'build' = to construct or make</a:t>
+              <a:t>Word Labs  •  wordlabs.app  •  Root: 'build' = make by putting parts together</a:t>
             </a:r>
             <a:endParaRPr lang="en-US" sz="800" dirty="0"/>
           </a:p>
@@ -39359,7 +38816,7 @@
                 <a:ea typeface="Trebuchet MS" pitchFamily="34" charset="-122"/>
                 <a:cs typeface="Trebuchet MS" pitchFamily="34" charset="-120"/>
               </a:rPr>
-              <a:t>re-</a:t>
+              <a:t>over-</a:t>
             </a:r>
             <a:endParaRPr lang="en-US" sz="1300" dirty="0"/>
           </a:p>
@@ -39551,7 +39008,7 @@
                 <a:ea typeface="Trebuchet MS" pitchFamily="34" charset="-122"/>
                 <a:cs typeface="Trebuchet MS" pitchFamily="34" charset="-120"/>
               </a:rPr>
-              <a:t>up-</a:t>
+              <a:t>re-</a:t>
             </a:r>
             <a:endParaRPr lang="en-US" sz="1300" dirty="0"/>
           </a:p>
@@ -39661,7 +39118,7 @@
             <a:avLst/>
           </a:prstGeom>
           <a:solidFill>
-            <a:srgbClr val="DDD6FE"/>
+            <a:srgbClr val="F8FAFC"/>
           </a:solidFill>
           <a:ln w="12700">
             <a:solidFill>
@@ -39673,18 +39130,68 @@
       </p:sp>
       <p:sp>
         <p:nvSpPr>
-          <p:cNvPr id="29" name="Text 27"/>
-          <p:cNvSpPr/>
-          <p:nvPr/>
-        </p:nvSpPr>
-        <p:spPr>
-          <a:xfrm>
-            <a:off x="640080" y="2670048"/>
+          <p:cNvPr id="29" name="Shape 27"/>
+          <p:cNvSpPr/>
+          <p:nvPr/>
+        </p:nvSpPr>
+        <p:spPr>
+          <a:xfrm>
+            <a:off x="3291840" y="2670048"/>
+            <a:ext cx="1645920" cy="420624"/>
+          </a:xfrm>
+          <a:prstGeom prst="rect">
+            <a:avLst/>
+          </a:prstGeom>
+          <a:solidFill>
+            <a:srgbClr val="F8FAFC"/>
+          </a:solidFill>
+          <a:ln w="12700">
+            <a:solidFill>
+              <a:srgbClr val="E5E7EB"/>
+            </a:solidFill>
+            <a:prstDash val="solid"/>
+          </a:ln>
+        </p:spPr>
+      </p:sp>
+      <p:sp>
+        <p:nvSpPr>
+          <p:cNvPr id="30" name="Shape 28"/>
+          <p:cNvSpPr/>
+          <p:nvPr/>
+        </p:nvSpPr>
+        <p:spPr>
+          <a:xfrm>
+            <a:off x="5943600" y="2670048"/>
             <a:ext cx="1463040" cy="420624"/>
           </a:xfrm>
           <a:prstGeom prst="rect">
             <a:avLst/>
           </a:prstGeom>
+          <a:solidFill>
+            <a:srgbClr val="FCE7F3"/>
+          </a:solidFill>
+          <a:ln w="12700">
+            <a:solidFill>
+              <a:srgbClr val="E5E7EB"/>
+            </a:solidFill>
+            <a:prstDash val="solid"/>
+          </a:ln>
+        </p:spPr>
+      </p:sp>
+      <p:sp>
+        <p:nvSpPr>
+          <p:cNvPr id="31" name="Text 29"/>
+          <p:cNvSpPr/>
+          <p:nvPr/>
+        </p:nvSpPr>
+        <p:spPr>
+          <a:xfrm>
+            <a:off x="5943600" y="2670048"/>
+            <a:ext cx="1463040" cy="420624"/>
+          </a:xfrm>
+          <a:prstGeom prst="rect">
+            <a:avLst/>
+          </a:prstGeom>
           <a:noFill/>
           <a:ln/>
         </p:spPr>
@@ -39698,13 +39205,13 @@
             <a:r>
               <a:rPr lang="en-US" sz="1300" b="1" dirty="0">
                 <a:solidFill>
-                  <a:srgbClr val="4C1D95"/>
+                  <a:srgbClr val="9D174D"/>
                 </a:solidFill>
                 <a:latin typeface="Trebuchet MS" pitchFamily="34" charset="0"/>
                 <a:ea typeface="Trebuchet MS" pitchFamily="34" charset="-122"/>
                 <a:cs typeface="Trebuchet MS" pitchFamily="34" charset="-120"/>
               </a:rPr>
-              <a:t>out-</a:t>
+              <a:t>-s</a:t>
             </a:r>
             <a:endParaRPr lang="en-US" sz="1300" dirty="0"/>
           </a:p>
@@ -39712,408 +39219,13 @@
       </p:sp>
       <p:sp>
         <p:nvSpPr>
-          <p:cNvPr id="30" name="Shape 28"/>
-          <p:cNvSpPr/>
-          <p:nvPr/>
-        </p:nvSpPr>
-        <p:spPr>
-          <a:xfrm>
-            <a:off x="3291840" y="2670048"/>
-            <a:ext cx="1645920" cy="420624"/>
-          </a:xfrm>
-          <a:prstGeom prst="rect">
-            <a:avLst/>
-          </a:prstGeom>
-          <a:solidFill>
-            <a:srgbClr val="F8FAFC"/>
-          </a:solidFill>
-          <a:ln w="12700">
-            <a:solidFill>
-              <a:srgbClr val="E5E7EB"/>
-            </a:solidFill>
-            <a:prstDash val="solid"/>
-          </a:ln>
-        </p:spPr>
-      </p:sp>
-      <p:sp>
-        <p:nvSpPr>
-          <p:cNvPr id="31" name="Shape 29"/>
-          <p:cNvSpPr/>
-          <p:nvPr/>
-        </p:nvSpPr>
-        <p:spPr>
-          <a:xfrm>
-            <a:off x="5943600" y="2670048"/>
-            <a:ext cx="1463040" cy="420624"/>
-          </a:xfrm>
-          <a:prstGeom prst="rect">
-            <a:avLst/>
-          </a:prstGeom>
-          <a:solidFill>
-            <a:srgbClr val="FCE7F3"/>
-          </a:solidFill>
-          <a:ln w="12700">
-            <a:solidFill>
-              <a:srgbClr val="E5E7EB"/>
-            </a:solidFill>
-            <a:prstDash val="solid"/>
-          </a:ln>
-        </p:spPr>
-      </p:sp>
-      <p:sp>
-        <p:nvSpPr>
           <p:cNvPr id="32" name="Text 30"/>
           <p:cNvSpPr/>
           <p:nvPr/>
         </p:nvSpPr>
         <p:spPr>
           <a:xfrm>
-            <a:off x="5943600" y="2670048"/>
-            <a:ext cx="1463040" cy="420624"/>
-          </a:xfrm>
-          <a:prstGeom prst="rect">
-            <a:avLst/>
-          </a:prstGeom>
-          <a:noFill/>
-          <a:ln/>
-        </p:spPr>
-        <p:txBody>
-          <a:bodyPr wrap="square" lIns="0" tIns="0" rIns="0" bIns="0" rtlCol="0" anchor="ctr"/>
-          <a:lstStyle/>
-          <a:p>
-            <a:pPr algn="ctr" indent="0" marL="0">
-              <a:buNone/>
-            </a:pPr>
-            <a:r>
-              <a:rPr lang="en-US" sz="1300" b="1" dirty="0">
-                <a:solidFill>
-                  <a:srgbClr val="9D174D"/>
-                </a:solidFill>
-                <a:latin typeface="Trebuchet MS" pitchFamily="34" charset="0"/>
-                <a:ea typeface="Trebuchet MS" pitchFamily="34" charset="-122"/>
-                <a:cs typeface="Trebuchet MS" pitchFamily="34" charset="-120"/>
-              </a:rPr>
-              <a:t>-ers</a:t>
-            </a:r>
-            <a:endParaRPr lang="en-US" sz="1300" dirty="0"/>
-          </a:p>
-        </p:txBody>
-      </p:sp>
-      <p:sp>
-        <p:nvSpPr>
-          <p:cNvPr id="33" name="Shape 31"/>
-          <p:cNvSpPr/>
-          <p:nvPr/>
-        </p:nvSpPr>
-        <p:spPr>
-          <a:xfrm>
-            <a:off x="640080" y="3127248"/>
-            <a:ext cx="1463040" cy="420624"/>
-          </a:xfrm>
-          <a:prstGeom prst="rect">
-            <a:avLst/>
-          </a:prstGeom>
-          <a:solidFill>
-            <a:srgbClr val="DDD6FE"/>
-          </a:solidFill>
-          <a:ln w="12700">
-            <a:solidFill>
-              <a:srgbClr val="E5E7EB"/>
-            </a:solidFill>
-            <a:prstDash val="solid"/>
-          </a:ln>
-        </p:spPr>
-      </p:sp>
-      <p:sp>
-        <p:nvSpPr>
-          <p:cNvPr id="34" name="Text 32"/>
-          <p:cNvSpPr/>
-          <p:nvPr/>
-        </p:nvSpPr>
-        <p:spPr>
-          <a:xfrm>
-            <a:off x="640080" y="3127248"/>
-            <a:ext cx="1463040" cy="420624"/>
-          </a:xfrm>
-          <a:prstGeom prst="rect">
-            <a:avLst/>
-          </a:prstGeom>
-          <a:noFill/>
-          <a:ln/>
-        </p:spPr>
-        <p:txBody>
-          <a:bodyPr wrap="square" lIns="0" tIns="0" rIns="0" bIns="0" rtlCol="0" anchor="ctr"/>
-          <a:lstStyle/>
-          <a:p>
-            <a:pPr algn="ctr" indent="0" marL="0">
-              <a:buNone/>
-            </a:pPr>
-            <a:r>
-              <a:rPr lang="en-US" sz="1300" b="1" dirty="0">
-                <a:solidFill>
-                  <a:srgbClr val="4C1D95"/>
-                </a:solidFill>
-                <a:latin typeface="Trebuchet MS" pitchFamily="34" charset="0"/>
-                <a:ea typeface="Trebuchet MS" pitchFamily="34" charset="-122"/>
-                <a:cs typeface="Trebuchet MS" pitchFamily="34" charset="-120"/>
-              </a:rPr>
-              <a:t>over-</a:t>
-            </a:r>
-            <a:endParaRPr lang="en-US" sz="1300" dirty="0"/>
-          </a:p>
-        </p:txBody>
-      </p:sp>
-      <p:sp>
-        <p:nvSpPr>
-          <p:cNvPr id="35" name="Shape 33"/>
-          <p:cNvSpPr/>
-          <p:nvPr/>
-        </p:nvSpPr>
-        <p:spPr>
-          <a:xfrm>
-            <a:off x="3291840" y="3127248"/>
-            <a:ext cx="1645920" cy="420624"/>
-          </a:xfrm>
-          <a:prstGeom prst="rect">
-            <a:avLst/>
-          </a:prstGeom>
-          <a:solidFill>
-            <a:srgbClr val="F1F5F9"/>
-          </a:solidFill>
-          <a:ln w="12700">
-            <a:solidFill>
-              <a:srgbClr val="E5E7EB"/>
-            </a:solidFill>
-            <a:prstDash val="solid"/>
-          </a:ln>
-        </p:spPr>
-      </p:sp>
-      <p:sp>
-        <p:nvSpPr>
-          <p:cNvPr id="36" name="Shape 34"/>
-          <p:cNvSpPr/>
-          <p:nvPr/>
-        </p:nvSpPr>
-        <p:spPr>
-          <a:xfrm>
-            <a:off x="5943600" y="3127248"/>
-            <a:ext cx="1463040" cy="420624"/>
-          </a:xfrm>
-          <a:prstGeom prst="rect">
-            <a:avLst/>
-          </a:prstGeom>
-          <a:solidFill>
-            <a:srgbClr val="FCE7F3"/>
-          </a:solidFill>
-          <a:ln w="12700">
-            <a:solidFill>
-              <a:srgbClr val="E5E7EB"/>
-            </a:solidFill>
-            <a:prstDash val="solid"/>
-          </a:ln>
-        </p:spPr>
-      </p:sp>
-      <p:sp>
-        <p:nvSpPr>
-          <p:cNvPr id="37" name="Text 35"/>
-          <p:cNvSpPr/>
-          <p:nvPr/>
-        </p:nvSpPr>
-        <p:spPr>
-          <a:xfrm>
-            <a:off x="5943600" y="3127248"/>
-            <a:ext cx="1463040" cy="420624"/>
-          </a:xfrm>
-          <a:prstGeom prst="rect">
-            <a:avLst/>
-          </a:prstGeom>
-          <a:noFill/>
-          <a:ln/>
-        </p:spPr>
-        <p:txBody>
-          <a:bodyPr wrap="square" lIns="0" tIns="0" rIns="0" bIns="0" rtlCol="0" anchor="ctr"/>
-          <a:lstStyle/>
-          <a:p>
-            <a:pPr algn="ctr" indent="0" marL="0">
-              <a:buNone/>
-            </a:pPr>
-            <a:r>
-              <a:rPr lang="en-US" sz="1300" b="1" dirty="0">
-                <a:solidFill>
-                  <a:srgbClr val="9D174D"/>
-                </a:solidFill>
-                <a:latin typeface="Trebuchet MS" pitchFamily="34" charset="0"/>
-                <a:ea typeface="Trebuchet MS" pitchFamily="34" charset="-122"/>
-                <a:cs typeface="Trebuchet MS" pitchFamily="34" charset="-120"/>
-              </a:rPr>
-              <a:t>-ings</a:t>
-            </a:r>
-            <a:endParaRPr lang="en-US" sz="1300" dirty="0"/>
-          </a:p>
-        </p:txBody>
-      </p:sp>
-      <p:sp>
-        <p:nvSpPr>
-          <p:cNvPr id="38" name="Shape 36"/>
-          <p:cNvSpPr/>
-          <p:nvPr/>
-        </p:nvSpPr>
-        <p:spPr>
-          <a:xfrm>
-            <a:off x="640080" y="3584448"/>
-            <a:ext cx="1463040" cy="420624"/>
-          </a:xfrm>
-          <a:prstGeom prst="rect">
-            <a:avLst/>
-          </a:prstGeom>
-          <a:solidFill>
-            <a:srgbClr val="DDD6FE"/>
-          </a:solidFill>
-          <a:ln w="12700">
-            <a:solidFill>
-              <a:srgbClr val="E5E7EB"/>
-            </a:solidFill>
-            <a:prstDash val="solid"/>
-          </a:ln>
-        </p:spPr>
-      </p:sp>
-      <p:sp>
-        <p:nvSpPr>
-          <p:cNvPr id="39" name="Text 37"/>
-          <p:cNvSpPr/>
-          <p:nvPr/>
-        </p:nvSpPr>
-        <p:spPr>
-          <a:xfrm>
-            <a:off x="640080" y="3584448"/>
-            <a:ext cx="1463040" cy="420624"/>
-          </a:xfrm>
-          <a:prstGeom prst="rect">
-            <a:avLst/>
-          </a:prstGeom>
-          <a:noFill/>
-          <a:ln/>
-        </p:spPr>
-        <p:txBody>
-          <a:bodyPr wrap="square" lIns="0" tIns="0" rIns="0" bIns="0" rtlCol="0" anchor="ctr"/>
-          <a:lstStyle/>
-          <a:p>
-            <a:pPr algn="ctr" indent="0" marL="0">
-              <a:buNone/>
-            </a:pPr>
-            <a:r>
-              <a:rPr lang="en-US" sz="1300" b="1" dirty="0">
-                <a:solidFill>
-                  <a:srgbClr val="4C1D95"/>
-                </a:solidFill>
-                <a:latin typeface="Trebuchet MS" pitchFamily="34" charset="0"/>
-                <a:ea typeface="Trebuchet MS" pitchFamily="34" charset="-122"/>
-                <a:cs typeface="Trebuchet MS" pitchFamily="34" charset="-120"/>
-              </a:rPr>
-              <a:t>un-</a:t>
-            </a:r>
-            <a:endParaRPr lang="en-US" sz="1300" dirty="0"/>
-          </a:p>
-        </p:txBody>
-      </p:sp>
-      <p:sp>
-        <p:nvSpPr>
-          <p:cNvPr id="40" name="Shape 38"/>
-          <p:cNvSpPr/>
-          <p:nvPr/>
-        </p:nvSpPr>
-        <p:spPr>
-          <a:xfrm>
-            <a:off x="3291840" y="3584448"/>
-            <a:ext cx="1645920" cy="420624"/>
-          </a:xfrm>
-          <a:prstGeom prst="rect">
-            <a:avLst/>
-          </a:prstGeom>
-          <a:solidFill>
-            <a:srgbClr val="F8FAFC"/>
-          </a:solidFill>
-          <a:ln w="12700">
-            <a:solidFill>
-              <a:srgbClr val="E5E7EB"/>
-            </a:solidFill>
-            <a:prstDash val="solid"/>
-          </a:ln>
-        </p:spPr>
-      </p:sp>
-      <p:sp>
-        <p:nvSpPr>
-          <p:cNvPr id="41" name="Shape 39"/>
-          <p:cNvSpPr/>
-          <p:nvPr/>
-        </p:nvSpPr>
-        <p:spPr>
-          <a:xfrm>
-            <a:off x="5943600" y="3584448"/>
-            <a:ext cx="1463040" cy="420624"/>
-          </a:xfrm>
-          <a:prstGeom prst="rect">
-            <a:avLst/>
-          </a:prstGeom>
-          <a:solidFill>
-            <a:srgbClr val="FCE7F3"/>
-          </a:solidFill>
-          <a:ln w="12700">
-            <a:solidFill>
-              <a:srgbClr val="E5E7EB"/>
-            </a:solidFill>
-            <a:prstDash val="solid"/>
-          </a:ln>
-        </p:spPr>
-      </p:sp>
-      <p:sp>
-        <p:nvSpPr>
-          <p:cNvPr id="42" name="Text 40"/>
-          <p:cNvSpPr/>
-          <p:nvPr/>
-        </p:nvSpPr>
-        <p:spPr>
-          <a:xfrm>
-            <a:off x="5943600" y="3584448"/>
-            <a:ext cx="1463040" cy="420624"/>
-          </a:xfrm>
-          <a:prstGeom prst="rect">
-            <a:avLst/>
-          </a:prstGeom>
-          <a:noFill/>
-          <a:ln/>
-        </p:spPr>
-        <p:txBody>
-          <a:bodyPr wrap="square" lIns="0" tIns="0" rIns="0" bIns="0" rtlCol="0" anchor="ctr"/>
-          <a:lstStyle/>
-          <a:p>
-            <a:pPr algn="ctr" indent="0" marL="0">
-              <a:buNone/>
-            </a:pPr>
-            <a:r>
-              <a:rPr lang="en-US" sz="1300" b="1" dirty="0">
-                <a:solidFill>
-                  <a:srgbClr val="9D174D"/>
-                </a:solidFill>
-                <a:latin typeface="Trebuchet MS" pitchFamily="34" charset="0"/>
-                <a:ea typeface="Trebuchet MS" pitchFamily="34" charset="-122"/>
-                <a:cs typeface="Trebuchet MS" pitchFamily="34" charset="-120"/>
-              </a:rPr>
-              <a:t>-able</a:t>
-            </a:r>
-            <a:endParaRPr lang="en-US" sz="1300" dirty="0"/>
-          </a:p>
-        </p:txBody>
-      </p:sp>
-      <p:sp>
-        <p:nvSpPr>
-          <p:cNvPr id="43" name="Text 41"/>
-          <p:cNvSpPr/>
-          <p:nvPr/>
-        </p:nvSpPr>
-        <p:spPr>
-          <a:xfrm>
-            <a:off x="365760" y="4178808"/>
+            <a:off x="365760" y="3264408"/>
             <a:ext cx="1097280" cy="420624"/>
           </a:xfrm>
           <a:prstGeom prst="rect">
@@ -40146,14 +39258,14 @@
       </p:sp>
       <p:sp>
         <p:nvSpPr>
-          <p:cNvPr id="44" name="Shape 42"/>
-          <p:cNvSpPr/>
-          <p:nvPr/>
-        </p:nvSpPr>
-        <p:spPr>
-          <a:xfrm>
-            <a:off x="1508760" y="4178808"/>
-            <a:ext cx="822960" cy="420624"/>
+          <p:cNvPr id="33" name="Shape 31"/>
+          <p:cNvSpPr/>
+          <p:nvPr/>
+        </p:nvSpPr>
+        <p:spPr>
+          <a:xfrm>
+            <a:off x="1508760" y="3264408"/>
+            <a:ext cx="1097280" cy="420624"/>
           </a:xfrm>
           <a:prstGeom prst="rect">
             <a:avLst>
@@ -40180,14 +39292,14 @@
       </p:sp>
       <p:sp>
         <p:nvSpPr>
-          <p:cNvPr id="45" name="Text 43"/>
-          <p:cNvSpPr/>
-          <p:nvPr/>
-        </p:nvSpPr>
-        <p:spPr>
-          <a:xfrm>
-            <a:off x="1508760" y="4178808"/>
-            <a:ext cx="822960" cy="420624"/>
+          <p:cNvPr id="34" name="Text 32"/>
+          <p:cNvSpPr/>
+          <p:nvPr/>
+        </p:nvSpPr>
+        <p:spPr>
+          <a:xfrm>
+            <a:off x="1508760" y="3264408"/>
+            <a:ext cx="1097280" cy="420624"/>
           </a:xfrm>
           <a:prstGeom prst="rect">
             <a:avLst/>
@@ -40211,7 +39323,7 @@
                 <a:ea typeface="Trebuchet MS" pitchFamily="34" charset="-122"/>
                 <a:cs typeface="Trebuchet MS" pitchFamily="34" charset="-120"/>
               </a:rPr>
-              <a:t>re-</a:t>
+              <a:t>over-</a:t>
             </a:r>
             <a:endParaRPr lang="en-US" sz="1300" dirty="0"/>
           </a:p>
@@ -40219,13 +39331,13 @@
       </p:sp>
       <p:sp>
         <p:nvSpPr>
-          <p:cNvPr id="46" name="Text 44"/>
-          <p:cNvSpPr/>
-          <p:nvPr/>
-        </p:nvSpPr>
-        <p:spPr>
-          <a:xfrm>
-            <a:off x="2359152" y="4178808"/>
+          <p:cNvPr id="35" name="Text 33"/>
+          <p:cNvSpPr/>
+          <p:nvPr/>
+        </p:nvSpPr>
+        <p:spPr>
+          <a:xfrm>
+            <a:off x="2633472" y="3264408"/>
             <a:ext cx="320040" cy="420624"/>
           </a:xfrm>
           <a:prstGeom prst="rect">
@@ -40258,13 +39370,13 @@
       </p:sp>
       <p:sp>
         <p:nvSpPr>
-          <p:cNvPr id="47" name="Shape 45"/>
-          <p:cNvSpPr/>
-          <p:nvPr/>
-        </p:nvSpPr>
-        <p:spPr>
-          <a:xfrm>
-            <a:off x="2706624" y="4178808"/>
+          <p:cNvPr id="36" name="Shape 34"/>
+          <p:cNvSpPr/>
+          <p:nvPr/>
+        </p:nvSpPr>
+        <p:spPr>
+          <a:xfrm>
+            <a:off x="2980944" y="3264408"/>
             <a:ext cx="1389888" cy="420624"/>
           </a:xfrm>
           <a:prstGeom prst="rect">
@@ -40292,13 +39404,13 @@
       </p:sp>
       <p:sp>
         <p:nvSpPr>
-          <p:cNvPr id="48" name="Text 46"/>
-          <p:cNvSpPr/>
-          <p:nvPr/>
-        </p:nvSpPr>
-        <p:spPr>
-          <a:xfrm>
-            <a:off x="2706624" y="4178808"/>
+          <p:cNvPr id="37" name="Text 35"/>
+          <p:cNvSpPr/>
+          <p:nvPr/>
+        </p:nvSpPr>
+        <p:spPr>
+          <a:xfrm>
+            <a:off x="2980944" y="3264408"/>
             <a:ext cx="1389888" cy="420624"/>
           </a:xfrm>
           <a:prstGeom prst="rect">
@@ -40331,13 +39443,13 @@
       </p:sp>
       <p:sp>
         <p:nvSpPr>
-          <p:cNvPr id="49" name="Text 47"/>
-          <p:cNvSpPr/>
-          <p:nvPr/>
-        </p:nvSpPr>
-        <p:spPr>
-          <a:xfrm>
-            <a:off x="4123944" y="4178808"/>
+          <p:cNvPr id="38" name="Text 36"/>
+          <p:cNvSpPr/>
+          <p:nvPr/>
+        </p:nvSpPr>
+        <p:spPr>
+          <a:xfrm>
+            <a:off x="4398264" y="3264408"/>
             <a:ext cx="320040" cy="420624"/>
           </a:xfrm>
           <a:prstGeom prst="rect">
@@ -40370,13 +39482,13 @@
       </p:sp>
       <p:sp>
         <p:nvSpPr>
-          <p:cNvPr id="50" name="Shape 48"/>
-          <p:cNvSpPr/>
-          <p:nvPr/>
-        </p:nvSpPr>
-        <p:spPr>
-          <a:xfrm>
-            <a:off x="4471416" y="4178808"/>
+          <p:cNvPr id="39" name="Shape 37"/>
+          <p:cNvSpPr/>
+          <p:nvPr/>
+        </p:nvSpPr>
+        <p:spPr>
+          <a:xfrm>
+            <a:off x="4745736" y="3264408"/>
             <a:ext cx="822960" cy="420624"/>
           </a:xfrm>
           <a:prstGeom prst="rect">
@@ -40404,13 +39516,13 @@
       </p:sp>
       <p:sp>
         <p:nvSpPr>
-          <p:cNvPr id="51" name="Text 49"/>
-          <p:cNvSpPr/>
-          <p:nvPr/>
-        </p:nvSpPr>
-        <p:spPr>
-          <a:xfrm>
-            <a:off x="4471416" y="4178808"/>
+          <p:cNvPr id="40" name="Text 38"/>
+          <p:cNvSpPr/>
+          <p:nvPr/>
+        </p:nvSpPr>
+        <p:spPr>
+          <a:xfrm>
+            <a:off x="4745736" y="3264408"/>
             <a:ext cx="822960" cy="420624"/>
           </a:xfrm>
           <a:prstGeom prst="rect">
@@ -40443,13 +39555,13 @@
       </p:sp>
       <p:sp>
         <p:nvSpPr>
-          <p:cNvPr id="52" name="Text 50"/>
-          <p:cNvSpPr/>
-          <p:nvPr/>
-        </p:nvSpPr>
-        <p:spPr>
-          <a:xfrm>
-            <a:off x="5367528" y="4178808"/>
+          <p:cNvPr id="41" name="Text 39"/>
+          <p:cNvSpPr/>
+          <p:nvPr/>
+        </p:nvSpPr>
+        <p:spPr>
+          <a:xfrm>
+            <a:off x="5641848" y="3264408"/>
             <a:ext cx="365760" cy="420624"/>
           </a:xfrm>
           <a:prstGeom prst="rect">
@@ -40482,13 +39594,13 @@
       </p:sp>
       <p:sp>
         <p:nvSpPr>
-          <p:cNvPr id="53" name="Shape 51"/>
-          <p:cNvSpPr/>
-          <p:nvPr/>
-        </p:nvSpPr>
-        <p:spPr>
-          <a:xfrm>
-            <a:off x="5779008" y="4178808"/>
+          <p:cNvPr id="42" name="Shape 40"/>
+          <p:cNvSpPr/>
+          <p:nvPr/>
+        </p:nvSpPr>
+        <p:spPr>
+          <a:xfrm>
+            <a:off x="6053328" y="3264408"/>
             <a:ext cx="2194560" cy="420624"/>
           </a:xfrm>
           <a:prstGeom prst="rect">
@@ -40509,13 +39621,13 @@
       </p:sp>
       <p:sp>
         <p:nvSpPr>
-          <p:cNvPr id="54" name="Text 52"/>
-          <p:cNvSpPr/>
-          <p:nvPr/>
-        </p:nvSpPr>
-        <p:spPr>
-          <a:xfrm>
-            <a:off x="5779008" y="4178808"/>
+          <p:cNvPr id="43" name="Text 41"/>
+          <p:cNvSpPr/>
+          <p:nvPr/>
+        </p:nvSpPr>
+        <p:spPr>
+          <a:xfrm>
+            <a:off x="6053328" y="3264408"/>
             <a:ext cx="2194560" cy="420624"/>
           </a:xfrm>
           <a:prstGeom prst="rect">
@@ -40540,7 +39652,7 @@
                 <a:ea typeface="Trebuchet MS" pitchFamily="34" charset="-122"/>
                 <a:cs typeface="Trebuchet MS" pitchFamily="34" charset="-120"/>
               </a:rPr>
-              <a:t>builder</a:t>
+              <a:t>build</a:t>
             </a:r>
             <a:endParaRPr lang="en-US" sz="1400" dirty="0"/>
           </a:p>
@@ -40832,7 +39944,7 @@
                 <a:ea typeface="Calibri" pitchFamily="34" charset="-122"/>
                 <a:cs typeface="Calibri" pitchFamily="34" charset="-120"/>
               </a:rPr>
-              <a:t>Word Labs  •  wordlabs.app  •  Root: 'build' = to construct or make</a:t>
+              <a:t>Word Labs  •  wordlabs.app  •  Root: 'build' = make by putting parts together</a:t>
             </a:r>
             <a:endParaRPr lang="en-US" sz="800" dirty="0"/>
           </a:p>
@@ -40944,7 +40056,7 @@
                 <a:ea typeface="Trebuchet MS" pitchFamily="34" charset="-122"/>
                 <a:cs typeface="Trebuchet MS" pitchFamily="34" charset="-120"/>
               </a:rPr>
-              <a:t>builder</a:t>
+              <a:t>build</a:t>
             </a:r>
             <a:endParaRPr lang="en-US" sz="1200" dirty="0"/>
           </a:p>
@@ -41010,7 +40122,7 @@
                 <a:ea typeface="Calibri" pitchFamily="34" charset="-122"/>
                 <a:cs typeface="Calibri" pitchFamily="34" charset="-120"/>
               </a:rPr>
-              <a:t>A person who constructs houses or other structures.</a:t>
+              <a:t>to make something by putting parts together</a:t>
             </a:r>
             <a:endParaRPr lang="en-US" sz="1200" dirty="0"/>
           </a:p>
@@ -41083,7 +40195,7 @@
                 <a:ea typeface="Trebuchet MS" pitchFamily="34" charset="-122"/>
                 <a:cs typeface="Trebuchet MS" pitchFamily="34" charset="-120"/>
               </a:rPr>
-              <a:t>building</a:t>
+              <a:t>builds</a:t>
             </a:r>
             <a:endParaRPr lang="en-US" sz="1200" dirty="0"/>
           </a:p>
@@ -41149,7 +40261,7 @@
                 <a:ea typeface="Calibri" pitchFamily="34" charset="-122"/>
                 <a:cs typeface="Calibri" pitchFamily="34" charset="-120"/>
               </a:rPr>
-              <a:t>To build something again after it has been damaged or destroyed.</a:t>
+              <a:t>a person whose job is to construct buildings</a:t>
             </a:r>
             <a:endParaRPr lang="en-US" sz="1200" dirty="0"/>
           </a:p>
@@ -41222,7 +40334,7 @@
                 <a:ea typeface="Trebuchet MS" pitchFamily="34" charset="-122"/>
                 <a:cs typeface="Trebuchet MS" pitchFamily="34" charset="-120"/>
               </a:rPr>
-              <a:t>rebuild</a:t>
+              <a:t>builder</a:t>
             </a:r>
             <a:endParaRPr lang="en-US" sz="1200" dirty="0"/>
           </a:p>
@@ -41288,7 +40400,7 @@
                 <a:ea typeface="Calibri" pitchFamily="34" charset="-122"/>
                 <a:cs typeface="Calibri" pitchFamily="34" charset="-120"/>
               </a:rPr>
-              <a:t>More than one person whose job is to construct buildings.</a:t>
+              <a:t>people whose job is to construct buildings</a:t>
             </a:r>
             <a:endParaRPr lang="en-US" sz="1200" dirty="0"/>
           </a:p>
@@ -41361,7 +40473,7 @@
                 <a:ea typeface="Trebuchet MS" pitchFamily="34" charset="-122"/>
                 <a:cs typeface="Trebuchet MS" pitchFamily="34" charset="-120"/>
               </a:rPr>
-              <a:t>upbuilding</a:t>
+              <a:t>rebuild</a:t>
             </a:r>
             <a:endParaRPr lang="en-US" sz="1200" dirty="0"/>
           </a:p>
@@ -41427,7 +40539,7 @@
                 <a:ea typeface="Calibri" pitchFamily="34" charset="-122"/>
                 <a:cs typeface="Calibri" pitchFamily="34" charset="-120"/>
               </a:rPr>
-              <a:t>A smaller building separate from the main one, like a shed or barn.</a:t>
+              <a:t>puts together the parts of something to make it whole</a:t>
             </a:r>
             <a:endParaRPr lang="en-US" sz="1200" dirty="0"/>
           </a:p>
@@ -41566,285 +40678,7 @@
                 <a:ea typeface="Calibri" pitchFamily="34" charset="-122"/>
                 <a:cs typeface="Calibri" pitchFamily="34" charset="-120"/>
               </a:rPr>
-              <a:t>The process of developing or strengthening something over time.</a:t>
-            </a:r>
-            <a:endParaRPr lang="en-US" sz="1200" dirty="0"/>
-          </a:p>
-        </p:txBody>
-      </p:sp>
-      <p:sp>
-        <p:nvSpPr>
-          <p:cNvPr id="31" name="Shape 29"/>
-          <p:cNvSpPr/>
-          <p:nvPr/>
-        </p:nvSpPr>
-        <p:spPr>
-          <a:xfrm>
-            <a:off x="365760" y="3840480"/>
-            <a:ext cx="2011680" cy="457200"/>
-          </a:xfrm>
-          <a:prstGeom prst="rect">
-            <a:avLst>
-              <a:gd name="adj" fmla="val 12000"/>
-            </a:avLst>
-          </a:prstGeom>
-          <a:solidFill>
-            <a:srgbClr val="EEF2FF"/>
-          </a:solidFill>
-          <a:ln w="12700">
-            <a:solidFill>
-              <a:srgbClr val="6366F1"/>
-            </a:solidFill>
-            <a:prstDash val="solid"/>
-          </a:ln>
-          <a:effectLst>
-            <a:outerShdw sx="100000" sy="100000" kx="0" ky="0" algn="bl" rotWithShape="0" blurRad="101600" dist="38100" dir="8100000">
-              <a:srgbClr val="000000">
-                <a:alpha val="12000"/>
-              </a:srgbClr>
-            </a:outerShdw>
-          </a:effectLst>
-        </p:spPr>
-      </p:sp>
-      <p:sp>
-        <p:nvSpPr>
-          <p:cNvPr id="32" name="Text 30"/>
-          <p:cNvSpPr/>
-          <p:nvPr/>
-        </p:nvSpPr>
-        <p:spPr>
-          <a:xfrm>
-            <a:off x="365760" y="3840480"/>
-            <a:ext cx="2011680" cy="457200"/>
-          </a:xfrm>
-          <a:prstGeom prst="rect">
-            <a:avLst/>
-          </a:prstGeom>
-          <a:noFill/>
-          <a:ln/>
-        </p:spPr>
-        <p:txBody>
-          <a:bodyPr wrap="square" lIns="0" tIns="0" rIns="0" bIns="0" rtlCol="0" anchor="ctr"/>
-          <a:lstStyle/>
-          <a:p>
-            <a:pPr algn="ctr" indent="0" marL="0">
-              <a:buNone/>
-            </a:pPr>
-            <a:r>
-              <a:rPr lang="en-US" sz="1200" b="1" dirty="0">
-                <a:solidFill>
-                  <a:srgbClr val="4338CA"/>
-                </a:solidFill>
-                <a:latin typeface="Trebuchet MS" pitchFamily="34" charset="0"/>
-                <a:ea typeface="Trebuchet MS" pitchFamily="34" charset="-122"/>
-                <a:cs typeface="Trebuchet MS" pitchFamily="34" charset="-120"/>
-              </a:rPr>
-              <a:t>outbuilding</a:t>
-            </a:r>
-            <a:endParaRPr lang="en-US" sz="1200" dirty="0"/>
-          </a:p>
-        </p:txBody>
-      </p:sp>
-      <p:sp>
-        <p:nvSpPr>
-          <p:cNvPr id="33" name="Shape 31"/>
-          <p:cNvSpPr/>
-          <p:nvPr/>
-        </p:nvSpPr>
-        <p:spPr>
-          <a:xfrm>
-            <a:off x="2514600" y="3840480"/>
-            <a:ext cx="6263640" cy="457200"/>
-          </a:xfrm>
-          <a:prstGeom prst="rect">
-            <a:avLst>
-              <a:gd name="adj" fmla="val 12000"/>
-            </a:avLst>
-          </a:prstGeom>
-          <a:solidFill>
-            <a:srgbClr val="F8FAFC"/>
-          </a:solidFill>
-          <a:ln w="12700">
-            <a:solidFill>
-              <a:srgbClr val="E2E8F0"/>
-            </a:solidFill>
-            <a:prstDash val="solid"/>
-          </a:ln>
-        </p:spPr>
-      </p:sp>
-      <p:sp>
-        <p:nvSpPr>
-          <p:cNvPr id="34" name="Text 32"/>
-          <p:cNvSpPr/>
-          <p:nvPr/>
-        </p:nvSpPr>
-        <p:spPr>
-          <a:xfrm>
-            <a:off x="2651760" y="3840480"/>
-            <a:ext cx="6035040" cy="457200"/>
-          </a:xfrm>
-          <a:prstGeom prst="rect">
-            <a:avLst/>
-          </a:prstGeom>
-          <a:noFill/>
-          <a:ln/>
-        </p:spPr>
-        <p:txBody>
-          <a:bodyPr wrap="square" rtlCol="0" anchor="ctr"/>
-          <a:lstStyle/>
-          <a:p>
-            <a:pPr algn="l" indent="0" marL="0">
-              <a:buNone/>
-            </a:pPr>
-            <a:r>
-              <a:rPr lang="en-US" sz="1200" dirty="0">
-                <a:solidFill>
-                  <a:srgbClr val="0F172A"/>
-                </a:solidFill>
-                <a:latin typeface="Calibri" pitchFamily="34" charset="0"/>
-                <a:ea typeface="Calibri" pitchFamily="34" charset="-122"/>
-                <a:cs typeface="Calibri" pitchFamily="34" charset="-120"/>
-              </a:rPr>
-              <a:t>The act of constructing something again that was broken or destroyed.</a:t>
-            </a:r>
-            <a:endParaRPr lang="en-US" sz="1200" dirty="0"/>
-          </a:p>
-        </p:txBody>
-      </p:sp>
-      <p:sp>
-        <p:nvSpPr>
-          <p:cNvPr id="35" name="Shape 33"/>
-          <p:cNvSpPr/>
-          <p:nvPr/>
-        </p:nvSpPr>
-        <p:spPr>
-          <a:xfrm>
-            <a:off x="365760" y="4370832"/>
-            <a:ext cx="2011680" cy="457200"/>
-          </a:xfrm>
-          <a:prstGeom prst="rect">
-            <a:avLst>
-              <a:gd name="adj" fmla="val 12000"/>
-            </a:avLst>
-          </a:prstGeom>
-          <a:solidFill>
-            <a:srgbClr val="EEF2FF"/>
-          </a:solidFill>
-          <a:ln w="12700">
-            <a:solidFill>
-              <a:srgbClr val="6366F1"/>
-            </a:solidFill>
-            <a:prstDash val="solid"/>
-          </a:ln>
-          <a:effectLst>
-            <a:outerShdw sx="100000" sy="100000" kx="0" ky="0" algn="bl" rotWithShape="0" blurRad="101600" dist="38100" dir="8100000">
-              <a:srgbClr val="000000">
-                <a:alpha val="12000"/>
-              </a:srgbClr>
-            </a:outerShdw>
-          </a:effectLst>
-        </p:spPr>
-      </p:sp>
-      <p:sp>
-        <p:nvSpPr>
-          <p:cNvPr id="36" name="Text 34"/>
-          <p:cNvSpPr/>
-          <p:nvPr/>
-        </p:nvSpPr>
-        <p:spPr>
-          <a:xfrm>
-            <a:off x="365760" y="4370832"/>
-            <a:ext cx="2011680" cy="457200"/>
-          </a:xfrm>
-          <a:prstGeom prst="rect">
-            <a:avLst/>
-          </a:prstGeom>
-          <a:noFill/>
-          <a:ln/>
-        </p:spPr>
-        <p:txBody>
-          <a:bodyPr wrap="square" lIns="0" tIns="0" rIns="0" bIns="0" rtlCol="0" anchor="ctr"/>
-          <a:lstStyle/>
-          <a:p>
-            <a:pPr algn="ctr" indent="0" marL="0">
-              <a:buNone/>
-            </a:pPr>
-            <a:r>
-              <a:rPr lang="en-US" sz="1200" b="1" dirty="0">
-                <a:solidFill>
-                  <a:srgbClr val="4338CA"/>
-                </a:solidFill>
-                <a:latin typeface="Trebuchet MS" pitchFamily="34" charset="0"/>
-                <a:ea typeface="Trebuchet MS" pitchFamily="34" charset="-122"/>
-                <a:cs typeface="Trebuchet MS" pitchFamily="34" charset="-120"/>
-              </a:rPr>
-              <a:t>rebuilding</a:t>
-            </a:r>
-            <a:endParaRPr lang="en-US" sz="1200" dirty="0"/>
-          </a:p>
-        </p:txBody>
-      </p:sp>
-      <p:sp>
-        <p:nvSpPr>
-          <p:cNvPr id="37" name="Shape 35"/>
-          <p:cNvSpPr/>
-          <p:nvPr/>
-        </p:nvSpPr>
-        <p:spPr>
-          <a:xfrm>
-            <a:off x="2514600" y="4370832"/>
-            <a:ext cx="6263640" cy="457200"/>
-          </a:xfrm>
-          <a:prstGeom prst="rect">
-            <a:avLst>
-              <a:gd name="adj" fmla="val 12000"/>
-            </a:avLst>
-          </a:prstGeom>
-          <a:solidFill>
-            <a:srgbClr val="F8FAFC"/>
-          </a:solidFill>
-          <a:ln w="12700">
-            <a:solidFill>
-              <a:srgbClr val="E2E8F0"/>
-            </a:solidFill>
-            <a:prstDash val="solid"/>
-          </a:ln>
-        </p:spPr>
-      </p:sp>
-      <p:sp>
-        <p:nvSpPr>
-          <p:cNvPr id="38" name="Text 36"/>
-          <p:cNvSpPr/>
-          <p:nvPr/>
-        </p:nvSpPr>
-        <p:spPr>
-          <a:xfrm>
-            <a:off x="2651760" y="4370832"/>
-            <a:ext cx="6035040" cy="457200"/>
-          </a:xfrm>
-          <a:prstGeom prst="rect">
-            <a:avLst/>
-          </a:prstGeom>
-          <a:noFill/>
-          <a:ln/>
-        </p:spPr>
-        <p:txBody>
-          <a:bodyPr wrap="square" rtlCol="0" anchor="ctr"/>
-          <a:lstStyle/>
-          <a:p>
-            <a:pPr algn="l" indent="0" marL="0">
-              <a:buNone/>
-            </a:pPr>
-            <a:r>
-              <a:rPr lang="en-US" sz="1200" dirty="0">
-                <a:solidFill>
-                  <a:srgbClr val="0F172A"/>
-                </a:solidFill>
-                <a:latin typeface="Calibri" pitchFamily="34" charset="0"/>
-                <a:ea typeface="Calibri" pitchFamily="34" charset="-122"/>
-                <a:cs typeface="Calibri" pitchFamily="34" charset="-120"/>
-              </a:rPr>
-              <a:t>A structure with walls and a roof, like a school or house.</a:t>
+              <a:t>to build something again after it has been damaged or destroyed</a:t>
             </a:r>
             <a:endParaRPr lang="en-US" sz="1200" dirty="0"/>
           </a:p>
@@ -42136,7 +40970,7 @@
                 <a:ea typeface="Calibri" pitchFamily="34" charset="-122"/>
                 <a:cs typeface="Calibri" pitchFamily="34" charset="-120"/>
               </a:rPr>
-              <a:t>Word Labs  •  wordlabs.app  •  Root: 'build' = to construct or make</a:t>
+              <a:t>Word Labs  •  wordlabs.app  •  Root: 'build' = make by putting parts together</a:t>
             </a:r>
             <a:endParaRPr lang="en-US" sz="800" dirty="0"/>
           </a:p>
@@ -42339,7 +41173,7 @@
                 <a:ea typeface="Calibri" pitchFamily="34" charset="-122"/>
                 <a:cs typeface="Calibri" pitchFamily="34" charset="-120"/>
               </a:rPr>
-              <a:t>The builder used strong bricks and steel beams to construct the new school hall.</a:t>
+              <a:t>The workers will build a new bridge across the river.</a:t>
             </a:r>
             <a:endParaRPr lang="en-US" sz="1500" dirty="0"/>
           </a:p>
@@ -42503,7 +41337,7 @@
                 <a:ea typeface="Calibri" pitchFamily="34" charset="-122"/>
                 <a:cs typeface="Calibri" pitchFamily="34" charset="-120"/>
               </a:rPr>
-              <a:t>After the storm, the community worked together to start rebuilding the damaged bridge.</a:t>
+              <a:t>He builds model aeroplanes out of balsa wood.</a:t>
             </a:r>
             <a:endParaRPr lang="en-US" sz="1500" dirty="0"/>
           </a:p>
@@ -42667,7 +41501,7 @@
                 <a:ea typeface="Calibri" pitchFamily="34" charset="-122"/>
                 <a:cs typeface="Calibri" pitchFamily="34" charset="-120"/>
               </a:rPr>
-              <a:t>The old outbuilding at the back of the farm was used to store tools and hay.</a:t>
+              <a:t>The builder finished the new house in just three months.</a:t>
             </a:r>
             <a:endParaRPr lang="en-US" sz="1500" dirty="0"/>
           </a:p>
